--- a/Fase 1/Evidencias Grupales/Presentación Proyecto.pptx
+++ b/Fase 1/Evidencias Grupales/Presentación Proyecto.pptx
@@ -22,13 +22,15 @@
     <p:sldId id="267" r:id="rId17"/>
     <p:sldId id="268" r:id="rId18"/>
     <p:sldId id="269" r:id="rId19"/>
+    <p:sldId id="270" r:id="rId20"/>
+    <p:sldId id="271" r:id="rId21"/>
   </p:sldIdLst>
   <p:sldSz cy="10287000" cx="18288000"/>
   <p:notesSz cx="6858000" cy="9144000"/>
   <p:embeddedFontLst>
     <p:embeddedFont>
       <p:font typeface="Antonio"/>
-      <p:bold r:id="rId20"/>
+      <p:bold r:id="rId22"/>
     </p:embeddedFont>
   </p:embeddedFontLst>
   <p:defaultTextStyle>
@@ -276,7 +278,7 @@
       </p15:sldGuideLst>
     </p:ext>
     <p:ext uri="GoogleSlidesCustomDataVersion2">
-      <go:slidesCustomData xmlns:go="http://customooxmlschemas.google.com/" r:id="rId21" roundtripDataSignature="AMtx7mi4wpkSHARNIYKbbQoWR/a6/XgKHg=="/>
+      <go:slidesCustomData xmlns:go="http://customooxmlschemas.google.com/" r:id="rId23" roundtripDataSignature="AMtx7mgEvjgKEBKxd6dzC6FLMhR/WHqHBA=="/>
     </p:ext>
   </p:extLst>
 </p:presentation>
@@ -812,7 +814,7 @@
   <p:cSld>
     <p:spTree>
       <p:nvGrpSpPr>
-        <p:cNvPr id="270" name="Shape 270"/>
+        <p:cNvPr id="276" name="Shape 276"/>
         <p:cNvGrpSpPr/>
         <p:nvPr/>
       </p:nvGrpSpPr>
@@ -826,7 +828,7 @@
       </p:grpSpPr>
       <p:sp>
         <p:nvSpPr>
-          <p:cNvPr id="271" name="Google Shape;271;p10:notes"/>
+          <p:cNvPr id="277" name="Google Shape;277;g3f8c140b409_0_53:notes"/>
           <p:cNvSpPr txBox="1"/>
           <p:nvPr>
             <p:ph idx="1" type="body"/>
@@ -865,7 +867,7 @@
       </p:sp>
       <p:sp>
         <p:nvSpPr>
-          <p:cNvPr id="272" name="Google Shape;272;p10:notes"/>
+          <p:cNvPr id="278" name="Google Shape;278;g3f8c140b409_0_53:notes"/>
           <p:cNvSpPr/>
           <p:nvPr>
             <p:ph idx="2" type="sldImg"/>
@@ -874,7 +876,7 @@
         <p:spPr>
           <a:xfrm>
             <a:off x="1143225" y="685800"/>
-            <a:ext cx="4572225" cy="3429000"/>
+            <a:ext cx="4572300" cy="3429000"/>
           </a:xfrm>
           <a:custGeom>
             <a:rect b="b" l="l" r="r" t="t"/>
@@ -911,7 +913,7 @@
   <p:cSld>
     <p:spTree>
       <p:nvGrpSpPr>
-        <p:cNvPr id="311" name="Shape 311"/>
+        <p:cNvPr id="305" name="Shape 305"/>
         <p:cNvGrpSpPr/>
         <p:nvPr/>
       </p:nvGrpSpPr>
@@ -925,7 +927,7 @@
       </p:grpSpPr>
       <p:sp>
         <p:nvSpPr>
-          <p:cNvPr id="312" name="Google Shape;312;p11:notes"/>
+          <p:cNvPr id="306" name="Google Shape;306;p10:notes"/>
           <p:cNvSpPr txBox="1"/>
           <p:nvPr>
             <p:ph idx="1" type="body"/>
@@ -964,7 +966,7 @@
       </p:sp>
       <p:sp>
         <p:nvSpPr>
-          <p:cNvPr id="313" name="Google Shape;313;p11:notes"/>
+          <p:cNvPr id="307" name="Google Shape;307;p10:notes"/>
           <p:cNvSpPr/>
           <p:nvPr>
             <p:ph idx="2" type="sldImg"/>
@@ -1010,7 +1012,7 @@
   <p:cSld>
     <p:spTree>
       <p:nvGrpSpPr>
-        <p:cNvPr id="361" name="Shape 361"/>
+        <p:cNvPr id="346" name="Shape 346"/>
         <p:cNvGrpSpPr/>
         <p:nvPr/>
       </p:nvGrpSpPr>
@@ -1024,7 +1026,7 @@
       </p:grpSpPr>
       <p:sp>
         <p:nvSpPr>
-          <p:cNvPr id="362" name="Google Shape;362;p12:notes"/>
+          <p:cNvPr id="347" name="Google Shape;347;p11:notes"/>
           <p:cNvSpPr txBox="1"/>
           <p:nvPr>
             <p:ph idx="1" type="body"/>
@@ -1063,7 +1065,7 @@
       </p:sp>
       <p:sp>
         <p:nvSpPr>
-          <p:cNvPr id="363" name="Google Shape;363;p12:notes"/>
+          <p:cNvPr id="348" name="Google Shape;348;p11:notes"/>
           <p:cNvSpPr/>
           <p:nvPr>
             <p:ph idx="2" type="sldImg"/>
@@ -1109,7 +1111,7 @@
   <p:cSld>
     <p:spTree>
       <p:nvGrpSpPr>
-        <p:cNvPr id="380" name="Shape 380"/>
+        <p:cNvPr id="396" name="Shape 396"/>
         <p:cNvGrpSpPr/>
         <p:nvPr/>
       </p:nvGrpSpPr>
@@ -1123,7 +1125,7 @@
       </p:grpSpPr>
       <p:sp>
         <p:nvSpPr>
-          <p:cNvPr id="381" name="Google Shape;381;p13:notes"/>
+          <p:cNvPr id="397" name="Google Shape;397;g3f8c140b409_0_0:notes"/>
           <p:cNvSpPr txBox="1"/>
           <p:nvPr>
             <p:ph idx="1" type="body"/>
@@ -1162,7 +1164,7 @@
       </p:sp>
       <p:sp>
         <p:nvSpPr>
-          <p:cNvPr id="382" name="Google Shape;382;p13:notes"/>
+          <p:cNvPr id="398" name="Google Shape;398;g3f8c140b409_0_0:notes"/>
           <p:cNvSpPr/>
           <p:nvPr>
             <p:ph idx="2" type="sldImg"/>
@@ -1171,7 +1173,7 @@
         <p:spPr>
           <a:xfrm>
             <a:off x="1143225" y="685800"/>
-            <a:ext cx="4572225" cy="3429000"/>
+            <a:ext cx="4572300" cy="3429000"/>
           </a:xfrm>
           <a:custGeom>
             <a:rect b="b" l="l" r="r" t="t"/>
@@ -1208,7 +1210,7 @@
   <p:cSld>
     <p:spTree>
       <p:nvGrpSpPr>
-        <p:cNvPr id="392" name="Shape 392"/>
+        <p:cNvPr id="413" name="Shape 413"/>
         <p:cNvGrpSpPr/>
         <p:nvPr/>
       </p:nvGrpSpPr>
@@ -1222,7 +1224,7 @@
       </p:grpSpPr>
       <p:sp>
         <p:nvSpPr>
-          <p:cNvPr id="393" name="Google Shape;393;p14:notes"/>
+          <p:cNvPr id="414" name="Google Shape;414;p12:notes"/>
           <p:cNvSpPr txBox="1"/>
           <p:nvPr>
             <p:ph idx="1" type="body"/>
@@ -1261,7 +1263,205 @@
       </p:sp>
       <p:sp>
         <p:nvSpPr>
-          <p:cNvPr id="394" name="Google Shape;394;p14:notes"/>
+          <p:cNvPr id="415" name="Google Shape;415;p12:notes"/>
+          <p:cNvSpPr/>
+          <p:nvPr>
+            <p:ph idx="2" type="sldImg"/>
+          </p:nvPr>
+        </p:nvSpPr>
+        <p:spPr>
+          <a:xfrm>
+            <a:off x="1143225" y="685800"/>
+            <a:ext cx="4572225" cy="3429000"/>
+          </a:xfrm>
+          <a:custGeom>
+            <a:rect b="b" l="l" r="r" t="t"/>
+            <a:pathLst>
+              <a:path extrusionOk="0" h="120000" w="120000">
+                <a:moveTo>
+                  <a:pt x="0" y="0"/>
+                </a:moveTo>
+                <a:lnTo>
+                  <a:pt x="120000" y="0"/>
+                </a:lnTo>
+                <a:lnTo>
+                  <a:pt x="120000" y="120000"/>
+                </a:lnTo>
+                <a:lnTo>
+                  <a:pt x="0" y="120000"/>
+                </a:lnTo>
+                <a:close/>
+              </a:path>
+            </a:pathLst>
+          </a:custGeom>
+        </p:spPr>
+      </p:sp>
+    </p:spTree>
+  </p:cSld>
+  <p:clrMapOvr>
+    <a:masterClrMapping/>
+  </p:clrMapOvr>
+</p:notes>
+</file>
+
+<file path=ppt/notesSlides/notesSlide15.xml><?xml version="1.0" encoding="utf-8"?>
+<p:notes xmlns:a="http://schemas.openxmlformats.org/drawingml/2006/main" xmlns:r="http://schemas.openxmlformats.org/officeDocument/2006/relationships" xmlns:mc="http://schemas.openxmlformats.org/markup-compatibility/2006" xmlns:mv="urn:schemas-microsoft-com:mac:vml" xmlns:p="http://schemas.openxmlformats.org/presentationml/2006/main" xmlns:c="http://schemas.openxmlformats.org/drawingml/2006/chart" xmlns:dgm="http://schemas.openxmlformats.org/drawingml/2006/diagram" xmlns:o="urn:schemas-microsoft-com:office:office" xmlns:v="urn:schemas-microsoft-com:vml" xmlns:pvml="urn:schemas-microsoft-com:office:powerpoint" xmlns:com="http://schemas.openxmlformats.org/drawingml/2006/compatibility" xmlns:p14="http://schemas.microsoft.com/office/powerpoint/2010/main" xmlns:p15="http://schemas.microsoft.com/office/powerpoint/2012/main" xmlns:ahyp="http://schemas.microsoft.com/office/drawing/2018/hyperlinkcolor" showMasterPhAnim="0" showMasterSp="0">
+  <p:cSld>
+    <p:spTree>
+      <p:nvGrpSpPr>
+        <p:cNvPr id="432" name="Shape 432"/>
+        <p:cNvGrpSpPr/>
+        <p:nvPr/>
+      </p:nvGrpSpPr>
+      <p:grpSpPr>
+        <a:xfrm>
+          <a:off x="0" y="0"/>
+          <a:ext cx="0" cy="0"/>
+          <a:chOff x="0" y="0"/>
+          <a:chExt cx="0" cy="0"/>
+        </a:xfrm>
+      </p:grpSpPr>
+      <p:sp>
+        <p:nvSpPr>
+          <p:cNvPr id="433" name="Google Shape;433;p13:notes"/>
+          <p:cNvSpPr txBox="1"/>
+          <p:nvPr>
+            <p:ph idx="1" type="body"/>
+          </p:nvPr>
+        </p:nvSpPr>
+        <p:spPr>
+          <a:xfrm>
+            <a:off x="685800" y="4343400"/>
+            <a:ext cx="5486400" cy="4114800"/>
+          </a:xfrm>
+          <a:prstGeom prst="rect">
+            <a:avLst/>
+          </a:prstGeom>
+        </p:spPr>
+        <p:txBody>
+          <a:bodyPr anchorCtr="0" anchor="t" bIns="91425" lIns="91425" spcFirstLastPara="1" rIns="91425" wrap="square" tIns="91425">
+            <a:noAutofit/>
+          </a:bodyPr>
+          <a:lstStyle/>
+          <a:p>
+            <a:pPr indent="0" lvl="0" marL="0" rtl="0" algn="l">
+              <a:spcBef>
+                <a:spcPts val="0"/>
+              </a:spcBef>
+              <a:spcAft>
+                <a:spcPts val="0"/>
+              </a:spcAft>
+              <a:buNone/>
+            </a:pPr>
+            <a:r>
+              <a:t/>
+            </a:r>
+            <a:endParaRPr/>
+          </a:p>
+        </p:txBody>
+      </p:sp>
+      <p:sp>
+        <p:nvSpPr>
+          <p:cNvPr id="434" name="Google Shape;434;p13:notes"/>
+          <p:cNvSpPr/>
+          <p:nvPr>
+            <p:ph idx="2" type="sldImg"/>
+          </p:nvPr>
+        </p:nvSpPr>
+        <p:spPr>
+          <a:xfrm>
+            <a:off x="1143225" y="685800"/>
+            <a:ext cx="4572225" cy="3429000"/>
+          </a:xfrm>
+          <a:custGeom>
+            <a:rect b="b" l="l" r="r" t="t"/>
+            <a:pathLst>
+              <a:path extrusionOk="0" h="120000" w="120000">
+                <a:moveTo>
+                  <a:pt x="0" y="0"/>
+                </a:moveTo>
+                <a:lnTo>
+                  <a:pt x="120000" y="0"/>
+                </a:lnTo>
+                <a:lnTo>
+                  <a:pt x="120000" y="120000"/>
+                </a:lnTo>
+                <a:lnTo>
+                  <a:pt x="0" y="120000"/>
+                </a:lnTo>
+                <a:close/>
+              </a:path>
+            </a:pathLst>
+          </a:custGeom>
+        </p:spPr>
+      </p:sp>
+    </p:spTree>
+  </p:cSld>
+  <p:clrMapOvr>
+    <a:masterClrMapping/>
+  </p:clrMapOvr>
+</p:notes>
+</file>
+
+<file path=ppt/notesSlides/notesSlide16.xml><?xml version="1.0" encoding="utf-8"?>
+<p:notes xmlns:a="http://schemas.openxmlformats.org/drawingml/2006/main" xmlns:r="http://schemas.openxmlformats.org/officeDocument/2006/relationships" xmlns:mc="http://schemas.openxmlformats.org/markup-compatibility/2006" xmlns:mv="urn:schemas-microsoft-com:mac:vml" xmlns:p="http://schemas.openxmlformats.org/presentationml/2006/main" xmlns:c="http://schemas.openxmlformats.org/drawingml/2006/chart" xmlns:dgm="http://schemas.openxmlformats.org/drawingml/2006/diagram" xmlns:o="urn:schemas-microsoft-com:office:office" xmlns:v="urn:schemas-microsoft-com:vml" xmlns:pvml="urn:schemas-microsoft-com:office:powerpoint" xmlns:com="http://schemas.openxmlformats.org/drawingml/2006/compatibility" xmlns:p14="http://schemas.microsoft.com/office/powerpoint/2010/main" xmlns:p15="http://schemas.microsoft.com/office/powerpoint/2012/main" xmlns:ahyp="http://schemas.microsoft.com/office/drawing/2018/hyperlinkcolor" showMasterPhAnim="0" showMasterSp="0">
+  <p:cSld>
+    <p:spTree>
+      <p:nvGrpSpPr>
+        <p:cNvPr id="444" name="Shape 444"/>
+        <p:cNvGrpSpPr/>
+        <p:nvPr/>
+      </p:nvGrpSpPr>
+      <p:grpSpPr>
+        <a:xfrm>
+          <a:off x="0" y="0"/>
+          <a:ext cx="0" cy="0"/>
+          <a:chOff x="0" y="0"/>
+          <a:chExt cx="0" cy="0"/>
+        </a:xfrm>
+      </p:grpSpPr>
+      <p:sp>
+        <p:nvSpPr>
+          <p:cNvPr id="445" name="Google Shape;445;p14:notes"/>
+          <p:cNvSpPr txBox="1"/>
+          <p:nvPr>
+            <p:ph idx="1" type="body"/>
+          </p:nvPr>
+        </p:nvSpPr>
+        <p:spPr>
+          <a:xfrm>
+            <a:off x="685800" y="4343400"/>
+            <a:ext cx="5486400" cy="4114800"/>
+          </a:xfrm>
+          <a:prstGeom prst="rect">
+            <a:avLst/>
+          </a:prstGeom>
+        </p:spPr>
+        <p:txBody>
+          <a:bodyPr anchorCtr="0" anchor="t" bIns="91425" lIns="91425" spcFirstLastPara="1" rIns="91425" wrap="square" tIns="91425">
+            <a:noAutofit/>
+          </a:bodyPr>
+          <a:lstStyle/>
+          <a:p>
+            <a:pPr indent="0" lvl="0" marL="0" rtl="0" algn="l">
+              <a:spcBef>
+                <a:spcPts val="0"/>
+              </a:spcBef>
+              <a:spcAft>
+                <a:spcPts val="0"/>
+              </a:spcAft>
+              <a:buNone/>
+            </a:pPr>
+            <a:r>
+              <a:t/>
+            </a:r>
+            <a:endParaRPr/>
+          </a:p>
+        </p:txBody>
+      </p:sp>
+      <p:sp>
+        <p:nvSpPr>
+          <p:cNvPr id="446" name="Google Shape;446;p14:notes"/>
           <p:cNvSpPr/>
           <p:nvPr>
             <p:ph idx="2" type="sldImg"/>
@@ -1406,7 +1606,7 @@
   <p:cSld>
     <p:spTree>
       <p:nvGrpSpPr>
-        <p:cNvPr id="152" name="Shape 152"/>
+        <p:cNvPr id="158" name="Shape 158"/>
         <p:cNvGrpSpPr/>
         <p:nvPr/>
       </p:nvGrpSpPr>
@@ -1420,7 +1620,7 @@
       </p:grpSpPr>
       <p:sp>
         <p:nvSpPr>
-          <p:cNvPr id="153" name="Google Shape;153;p3:notes"/>
+          <p:cNvPr id="159" name="Google Shape;159;p3:notes"/>
           <p:cNvSpPr txBox="1"/>
           <p:nvPr>
             <p:ph idx="1" type="body"/>
@@ -1459,7 +1659,7 @@
       </p:sp>
       <p:sp>
         <p:nvSpPr>
-          <p:cNvPr id="154" name="Google Shape;154;p3:notes"/>
+          <p:cNvPr id="160" name="Google Shape;160;p3:notes"/>
           <p:cNvSpPr/>
           <p:nvPr>
             <p:ph idx="2" type="sldImg"/>
@@ -1505,7 +1705,7 @@
   <p:cSld>
     <p:spTree>
       <p:nvGrpSpPr>
-        <p:cNvPr id="165" name="Shape 165"/>
+        <p:cNvPr id="171" name="Shape 171"/>
         <p:cNvGrpSpPr/>
         <p:nvPr/>
       </p:nvGrpSpPr>
@@ -1519,7 +1719,7 @@
       </p:grpSpPr>
       <p:sp>
         <p:nvSpPr>
-          <p:cNvPr id="166" name="Google Shape;166;p4:notes"/>
+          <p:cNvPr id="172" name="Google Shape;172;p4:notes"/>
           <p:cNvSpPr txBox="1"/>
           <p:nvPr>
             <p:ph idx="1" type="body"/>
@@ -1558,7 +1758,7 @@
       </p:sp>
       <p:sp>
         <p:nvSpPr>
-          <p:cNvPr id="167" name="Google Shape;167;p4:notes"/>
+          <p:cNvPr id="173" name="Google Shape;173;p4:notes"/>
           <p:cNvSpPr/>
           <p:nvPr>
             <p:ph idx="2" type="sldImg"/>
@@ -1604,7 +1804,7 @@
   <p:cSld>
     <p:spTree>
       <p:nvGrpSpPr>
-        <p:cNvPr id="185" name="Shape 185"/>
+        <p:cNvPr id="191" name="Shape 191"/>
         <p:cNvGrpSpPr/>
         <p:nvPr/>
       </p:nvGrpSpPr>
@@ -1618,7 +1818,7 @@
       </p:grpSpPr>
       <p:sp>
         <p:nvSpPr>
-          <p:cNvPr id="186" name="Google Shape;186;p5:notes"/>
+          <p:cNvPr id="192" name="Google Shape;192;p5:notes"/>
           <p:cNvSpPr txBox="1"/>
           <p:nvPr>
             <p:ph idx="1" type="body"/>
@@ -1657,7 +1857,7 @@
       </p:sp>
       <p:sp>
         <p:nvSpPr>
-          <p:cNvPr id="187" name="Google Shape;187;p5:notes"/>
+          <p:cNvPr id="193" name="Google Shape;193;p5:notes"/>
           <p:cNvSpPr/>
           <p:nvPr>
             <p:ph idx="2" type="sldImg"/>
@@ -1703,7 +1903,7 @@
   <p:cSld>
     <p:spTree>
       <p:nvGrpSpPr>
-        <p:cNvPr id="196" name="Shape 196"/>
+        <p:cNvPr id="202" name="Shape 202"/>
         <p:cNvGrpSpPr/>
         <p:nvPr/>
       </p:nvGrpSpPr>
@@ -1717,7 +1917,7 @@
       </p:grpSpPr>
       <p:sp>
         <p:nvSpPr>
-          <p:cNvPr id="197" name="Google Shape;197;p6:notes"/>
+          <p:cNvPr id="203" name="Google Shape;203;p6:notes"/>
           <p:cNvSpPr txBox="1"/>
           <p:nvPr>
             <p:ph idx="1" type="body"/>
@@ -1756,7 +1956,7 @@
       </p:sp>
       <p:sp>
         <p:nvSpPr>
-          <p:cNvPr id="198" name="Google Shape;198;p6:notes"/>
+          <p:cNvPr id="204" name="Google Shape;204;p6:notes"/>
           <p:cNvSpPr/>
           <p:nvPr>
             <p:ph idx="2" type="sldImg"/>
@@ -1802,7 +2002,7 @@
   <p:cSld>
     <p:spTree>
       <p:nvGrpSpPr>
-        <p:cNvPr id="204" name="Shape 204"/>
+        <p:cNvPr id="210" name="Shape 210"/>
         <p:cNvGrpSpPr/>
         <p:nvPr/>
       </p:nvGrpSpPr>
@@ -1816,7 +2016,7 @@
       </p:grpSpPr>
       <p:sp>
         <p:nvSpPr>
-          <p:cNvPr id="205" name="Google Shape;205;p7:notes"/>
+          <p:cNvPr id="211" name="Google Shape;211;p7:notes"/>
           <p:cNvSpPr txBox="1"/>
           <p:nvPr>
             <p:ph idx="1" type="body"/>
@@ -1855,7 +2055,7 @@
       </p:sp>
       <p:sp>
         <p:nvSpPr>
-          <p:cNvPr id="206" name="Google Shape;206;p7:notes"/>
+          <p:cNvPr id="212" name="Google Shape;212;p7:notes"/>
           <p:cNvSpPr/>
           <p:nvPr>
             <p:ph idx="2" type="sldImg"/>
@@ -1901,7 +2101,7 @@
   <p:cSld>
     <p:spTree>
       <p:nvGrpSpPr>
-        <p:cNvPr id="225" name="Shape 225"/>
+        <p:cNvPr id="231" name="Shape 231"/>
         <p:cNvGrpSpPr/>
         <p:nvPr/>
       </p:nvGrpSpPr>
@@ -1915,7 +2115,7 @@
       </p:grpSpPr>
       <p:sp>
         <p:nvSpPr>
-          <p:cNvPr id="226" name="Google Shape;226;p8:notes"/>
+          <p:cNvPr id="232" name="Google Shape;232;p8:notes"/>
           <p:cNvSpPr txBox="1"/>
           <p:nvPr>
             <p:ph idx="1" type="body"/>
@@ -1954,7 +2154,7 @@
       </p:sp>
       <p:sp>
         <p:nvSpPr>
-          <p:cNvPr id="227" name="Google Shape;227;p8:notes"/>
+          <p:cNvPr id="233" name="Google Shape;233;p8:notes"/>
           <p:cNvSpPr/>
           <p:nvPr>
             <p:ph idx="2" type="sldImg"/>
@@ -2000,7 +2200,7 @@
   <p:cSld>
     <p:spTree>
       <p:nvGrpSpPr>
-        <p:cNvPr id="248" name="Shape 248"/>
+        <p:cNvPr id="254" name="Shape 254"/>
         <p:cNvGrpSpPr/>
         <p:nvPr/>
       </p:nvGrpSpPr>
@@ -2014,7 +2214,7 @@
       </p:grpSpPr>
       <p:sp>
         <p:nvSpPr>
-          <p:cNvPr id="249" name="Google Shape;249;p9:notes"/>
+          <p:cNvPr id="255" name="Google Shape;255;p9:notes"/>
           <p:cNvSpPr txBox="1"/>
           <p:nvPr>
             <p:ph idx="1" type="body"/>
@@ -2053,7 +2253,7 @@
       </p:sp>
       <p:sp>
         <p:nvSpPr>
-          <p:cNvPr id="250" name="Google Shape;250;p9:notes"/>
+          <p:cNvPr id="256" name="Google Shape;256;p9:notes"/>
           <p:cNvSpPr/>
           <p:nvPr>
             <p:ph idx="2" type="sldImg"/>
@@ -12807,9 +13007,24 @@
 <file path=ppt/slides/slide10.xml><?xml version="1.0" encoding="utf-8"?>
 <p:sld xmlns:a="http://schemas.openxmlformats.org/drawingml/2006/main" xmlns:r="http://schemas.openxmlformats.org/officeDocument/2006/relationships" xmlns:mc="http://schemas.openxmlformats.org/markup-compatibility/2006" xmlns:mv="urn:schemas-microsoft-com:mac:vml" xmlns:p="http://schemas.openxmlformats.org/presentationml/2006/main" xmlns:c="http://schemas.openxmlformats.org/drawingml/2006/chart" xmlns:dgm="http://schemas.openxmlformats.org/drawingml/2006/diagram" xmlns:o="urn:schemas-microsoft-com:office:office" xmlns:v="urn:schemas-microsoft-com:vml" xmlns:pvml="urn:schemas-microsoft-com:office:powerpoint" xmlns:com="http://schemas.openxmlformats.org/drawingml/2006/compatibility" xmlns:p14="http://schemas.microsoft.com/office/powerpoint/2010/main" xmlns:p15="http://schemas.microsoft.com/office/powerpoint/2012/main" xmlns:ahyp="http://schemas.microsoft.com/office/drawing/2018/hyperlinkcolor">
   <p:cSld>
+    <p:bg>
+      <p:bgPr>
+        <a:gradFill>
+          <a:gsLst>
+            <a:gs pos="0">
+              <a:srgbClr val="424242"/>
+            </a:gs>
+            <a:gs pos="100000">
+              <a:srgbClr val="010101"/>
+            </a:gs>
+          </a:gsLst>
+          <a:lin ang="5400012" scaled="0"/>
+        </a:gradFill>
+      </p:bgPr>
+    </p:bg>
     <p:spTree>
       <p:nvGrpSpPr>
-        <p:cNvPr id="273" name="Shape 273"/>
+        <p:cNvPr id="279" name="Shape 279"/>
         <p:cNvGrpSpPr/>
         <p:nvPr/>
       </p:nvGrpSpPr>
@@ -12823,12 +13038,1381 @@
       </p:grpSpPr>
       <p:grpSp>
         <p:nvGrpSpPr>
-          <p:cNvPr id="274" name="Google Shape;274;p10"/>
+          <p:cNvPr id="280" name="Google Shape;280;g3f8c140b409_0_53"/>
           <p:cNvGrpSpPr/>
           <p:nvPr/>
         </p:nvGrpSpPr>
         <p:grpSpPr>
           <a:xfrm>
+            <a:off x="650" y="-28575"/>
+            <a:ext cx="9030113" cy="10315575"/>
+            <a:chOff x="-154" y="-38100"/>
+            <a:chExt cx="10414154" cy="13754100"/>
+          </a:xfrm>
+        </p:grpSpPr>
+        <p:sp>
+          <p:nvSpPr>
+            <p:cNvPr id="281" name="Google Shape;281;g3f8c140b409_0_53"/>
+            <p:cNvSpPr/>
+            <p:nvPr/>
+          </p:nvSpPr>
+          <p:spPr>
+            <a:xfrm>
+              <a:off x="0" y="0"/>
+              <a:ext cx="10414000" cy="13716000"/>
+            </a:xfrm>
+            <a:custGeom>
+              <a:rect b="b" l="l" r="r" t="t"/>
+              <a:pathLst>
+                <a:path extrusionOk="0" h="13716000" w="10414000">
+                  <a:moveTo>
+                    <a:pt x="0" y="0"/>
+                  </a:moveTo>
+                  <a:lnTo>
+                    <a:pt x="10414000" y="0"/>
+                  </a:lnTo>
+                  <a:lnTo>
+                    <a:pt x="10414000" y="13716000"/>
+                  </a:lnTo>
+                  <a:lnTo>
+                    <a:pt x="0" y="13716000"/>
+                  </a:lnTo>
+                  <a:close/>
+                </a:path>
+              </a:pathLst>
+            </a:custGeom>
+            <a:gradFill>
+              <a:gsLst>
+                <a:gs pos="0">
+                  <a:srgbClr val="E30613"/>
+                </a:gs>
+                <a:gs pos="100000">
+                  <a:srgbClr val="520B07"/>
+                </a:gs>
+              </a:gsLst>
+              <a:lin ang="5400012" scaled="0"/>
+            </a:gradFill>
+            <a:ln>
+              <a:noFill/>
+            </a:ln>
+          </p:spPr>
+        </p:sp>
+        <p:sp>
+          <p:nvSpPr>
+            <p:cNvPr id="282" name="Google Shape;282;g3f8c140b409_0_53"/>
+            <p:cNvSpPr txBox="1"/>
+            <p:nvPr/>
+          </p:nvSpPr>
+          <p:spPr>
+            <a:xfrm>
+              <a:off x="-154" y="-38100"/>
+              <a:ext cx="5231400" cy="13754100"/>
+            </a:xfrm>
+            <a:prstGeom prst="rect">
+              <a:avLst/>
+            </a:prstGeom>
+            <a:noFill/>
+            <a:ln>
+              <a:noFill/>
+            </a:ln>
+          </p:spPr>
+          <p:txBody>
+            <a:bodyPr anchorCtr="0" anchor="ctr" bIns="50800" lIns="50800" spcFirstLastPara="1" rIns="50800" wrap="square" tIns="50800">
+              <a:noAutofit/>
+            </a:bodyPr>
+            <a:lstStyle/>
+            <a:p>
+              <a:pPr indent="0" lvl="0" marL="0" marR="0" rtl="0" algn="l">
+                <a:lnSpc>
+                  <a:spcPct val="93277"/>
+                </a:lnSpc>
+                <a:spcBef>
+                  <a:spcPts val="0"/>
+                </a:spcBef>
+                <a:spcAft>
+                  <a:spcPts val="0"/>
+                </a:spcAft>
+                <a:buNone/>
+              </a:pPr>
+              <a:r>
+                <a:t/>
+              </a:r>
+              <a:endParaRPr b="0" i="0" sz="1800" u="none" cap="none" strike="noStrike">
+                <a:solidFill>
+                  <a:schemeClr val="dk1"/>
+                </a:solidFill>
+                <a:latin typeface="Calibri"/>
+                <a:ea typeface="Calibri"/>
+                <a:cs typeface="Calibri"/>
+                <a:sym typeface="Calibri"/>
+              </a:endParaRPr>
+            </a:p>
+          </p:txBody>
+        </p:sp>
+      </p:grpSp>
+      <p:sp>
+        <p:nvSpPr>
+          <p:cNvPr id="283" name="Google Shape;283;g3f8c140b409_0_53"/>
+          <p:cNvSpPr txBox="1"/>
+          <p:nvPr/>
+        </p:nvSpPr>
+        <p:spPr>
+          <a:xfrm>
+            <a:off x="762000" y="342900"/>
+            <a:ext cx="1143000" cy="369300"/>
+          </a:xfrm>
+          <a:prstGeom prst="rect">
+            <a:avLst/>
+          </a:prstGeom>
+          <a:noFill/>
+          <a:ln>
+            <a:noFill/>
+          </a:ln>
+        </p:spPr>
+        <p:txBody>
+          <a:bodyPr anchorCtr="0" anchor="t" bIns="0" lIns="0" spcFirstLastPara="1" rIns="0" wrap="square" tIns="0">
+            <a:spAutoFit/>
+          </a:bodyPr>
+          <a:lstStyle/>
+          <a:p>
+            <a:pPr indent="0" lvl="0" marL="0" marR="0" rtl="0" algn="l">
+              <a:lnSpc>
+                <a:spcPct val="139958"/>
+              </a:lnSpc>
+              <a:spcBef>
+                <a:spcPts val="0"/>
+              </a:spcBef>
+              <a:spcAft>
+                <a:spcPts val="0"/>
+              </a:spcAft>
+              <a:buNone/>
+            </a:pPr>
+            <a:r>
+              <a:rPr b="0" i="0" lang="en-US" sz="2400" u="none" cap="none" strike="noStrike">
+                <a:solidFill>
+                  <a:schemeClr val="lt1"/>
+                </a:solidFill>
+                <a:latin typeface="Antonio"/>
+                <a:ea typeface="Antonio"/>
+                <a:cs typeface="Antonio"/>
+                <a:sym typeface="Antonio"/>
+              </a:rPr>
+              <a:t>0</a:t>
+            </a:r>
+            <a:r>
+              <a:rPr lang="en-US" sz="2400">
+                <a:solidFill>
+                  <a:schemeClr val="lt1"/>
+                </a:solidFill>
+                <a:latin typeface="Antonio"/>
+                <a:ea typeface="Antonio"/>
+                <a:cs typeface="Antonio"/>
+                <a:sym typeface="Antonio"/>
+              </a:rPr>
+              <a:t>8</a:t>
+            </a:r>
+            <a:endParaRPr>
+              <a:solidFill>
+                <a:schemeClr val="lt1"/>
+              </a:solidFill>
+            </a:endParaRPr>
+          </a:p>
+        </p:txBody>
+      </p:sp>
+      <p:sp>
+        <p:nvSpPr>
+          <p:cNvPr id="284" name="Google Shape;284;g3f8c140b409_0_53"/>
+          <p:cNvSpPr txBox="1"/>
+          <p:nvPr/>
+        </p:nvSpPr>
+        <p:spPr>
+          <a:xfrm>
+            <a:off x="6441600" y="524525"/>
+            <a:ext cx="5404800" cy="1231500"/>
+          </a:xfrm>
+          <a:prstGeom prst="rect">
+            <a:avLst/>
+          </a:prstGeom>
+          <a:noFill/>
+          <a:ln>
+            <a:noFill/>
+          </a:ln>
+        </p:spPr>
+        <p:txBody>
+          <a:bodyPr anchorCtr="0" anchor="t" bIns="0" lIns="0" spcFirstLastPara="1" rIns="0" wrap="square" tIns="0">
+            <a:spAutoFit/>
+          </a:bodyPr>
+          <a:lstStyle/>
+          <a:p>
+            <a:pPr indent="0" lvl="0" marL="0" marR="0" rtl="0" algn="l">
+              <a:lnSpc>
+                <a:spcPct val="100000"/>
+              </a:lnSpc>
+              <a:spcBef>
+                <a:spcPts val="0"/>
+              </a:spcBef>
+              <a:spcAft>
+                <a:spcPts val="0"/>
+              </a:spcAft>
+              <a:buNone/>
+            </a:pPr>
+            <a:r>
+              <a:rPr lang="en-US" sz="8000">
+                <a:solidFill>
+                  <a:srgbClr val="FFFFFF"/>
+                </a:solidFill>
+                <a:latin typeface="Antonio"/>
+                <a:ea typeface="Antonio"/>
+                <a:cs typeface="Antonio"/>
+                <a:sym typeface="Antonio"/>
+              </a:rPr>
+              <a:t>Competencias</a:t>
+            </a:r>
+            <a:endParaRPr/>
+          </a:p>
+        </p:txBody>
+      </p:sp>
+      <p:grpSp>
+        <p:nvGrpSpPr>
+          <p:cNvPr id="285" name="Google Shape;285;g3f8c140b409_0_53"/>
+          <p:cNvGrpSpPr/>
+          <p:nvPr/>
+        </p:nvGrpSpPr>
+        <p:grpSpPr>
+          <a:xfrm flipH="1" rot="10800000">
+            <a:off x="6582947" y="1648757"/>
+            <a:ext cx="5153266" cy="84218"/>
+            <a:chOff x="0" y="-38100"/>
+            <a:chExt cx="6223000" cy="101700"/>
+          </a:xfrm>
+        </p:grpSpPr>
+        <p:sp>
+          <p:nvSpPr>
+            <p:cNvPr id="286" name="Google Shape;286;g3f8c140b409_0_53"/>
+            <p:cNvSpPr/>
+            <p:nvPr/>
+          </p:nvSpPr>
+          <p:spPr>
+            <a:xfrm>
+              <a:off x="0" y="0"/>
+              <a:ext cx="6223000" cy="63500"/>
+            </a:xfrm>
+            <a:custGeom>
+              <a:rect b="b" l="l" r="r" t="t"/>
+              <a:pathLst>
+                <a:path extrusionOk="0" h="63500" w="6223000">
+                  <a:moveTo>
+                    <a:pt x="0" y="0"/>
+                  </a:moveTo>
+                  <a:lnTo>
+                    <a:pt x="6223000" y="0"/>
+                  </a:lnTo>
+                  <a:lnTo>
+                    <a:pt x="6223000" y="63500"/>
+                  </a:lnTo>
+                  <a:lnTo>
+                    <a:pt x="0" y="63500"/>
+                  </a:lnTo>
+                  <a:close/>
+                </a:path>
+              </a:pathLst>
+            </a:custGeom>
+            <a:solidFill>
+              <a:schemeClr val="lt1"/>
+            </a:solidFill>
+            <a:ln>
+              <a:noFill/>
+            </a:ln>
+          </p:spPr>
+        </p:sp>
+        <p:sp>
+          <p:nvSpPr>
+            <p:cNvPr id="287" name="Google Shape;287;g3f8c140b409_0_53"/>
+            <p:cNvSpPr txBox="1"/>
+            <p:nvPr/>
+          </p:nvSpPr>
+          <p:spPr>
+            <a:xfrm>
+              <a:off x="0" y="-38100"/>
+              <a:ext cx="6222900" cy="101700"/>
+            </a:xfrm>
+            <a:prstGeom prst="rect">
+              <a:avLst/>
+            </a:prstGeom>
+            <a:solidFill>
+              <a:schemeClr val="lt1"/>
+            </a:solidFill>
+            <a:ln>
+              <a:noFill/>
+            </a:ln>
+          </p:spPr>
+          <p:txBody>
+            <a:bodyPr anchorCtr="0" anchor="ctr" bIns="56100" lIns="56100" spcFirstLastPara="1" rIns="56100" wrap="square" tIns="56100">
+              <a:noAutofit/>
+            </a:bodyPr>
+            <a:lstStyle/>
+            <a:p>
+              <a:pPr indent="0" lvl="0" marL="0" marR="0" rtl="0" algn="l">
+                <a:lnSpc>
+                  <a:spcPct val="93277"/>
+                </a:lnSpc>
+                <a:spcBef>
+                  <a:spcPts val="0"/>
+                </a:spcBef>
+                <a:spcAft>
+                  <a:spcPts val="0"/>
+                </a:spcAft>
+                <a:buNone/>
+              </a:pPr>
+              <a:r>
+                <a:t/>
+              </a:r>
+              <a:endParaRPr b="0" i="0" sz="1987" u="none" cap="none" strike="noStrike">
+                <a:solidFill>
+                  <a:schemeClr val="dk1"/>
+                </a:solidFill>
+                <a:latin typeface="Calibri"/>
+                <a:ea typeface="Calibri"/>
+                <a:cs typeface="Calibri"/>
+                <a:sym typeface="Calibri"/>
+              </a:endParaRPr>
+            </a:p>
+          </p:txBody>
+        </p:sp>
+      </p:grpSp>
+      <p:grpSp>
+        <p:nvGrpSpPr>
+          <p:cNvPr id="288" name="Google Shape;288;g3f8c140b409_0_53"/>
+          <p:cNvGrpSpPr/>
+          <p:nvPr/>
+        </p:nvGrpSpPr>
+        <p:grpSpPr>
+          <a:xfrm>
+            <a:off x="1905000" y="2931800"/>
+            <a:ext cx="5781827" cy="3557081"/>
+            <a:chOff x="0" y="-38100"/>
+            <a:chExt cx="5842000" cy="3594100"/>
+          </a:xfrm>
+        </p:grpSpPr>
+        <p:sp>
+          <p:nvSpPr>
+            <p:cNvPr id="289" name="Google Shape;289;g3f8c140b409_0_53"/>
+            <p:cNvSpPr/>
+            <p:nvPr/>
+          </p:nvSpPr>
+          <p:spPr>
+            <a:xfrm>
+              <a:off x="0" y="0"/>
+              <a:ext cx="5842000" cy="3556000"/>
+            </a:xfrm>
+            <a:custGeom>
+              <a:rect b="b" l="l" r="r" t="t"/>
+              <a:pathLst>
+                <a:path extrusionOk="0" h="3556000" w="5842000">
+                  <a:moveTo>
+                    <a:pt x="355600" y="0"/>
+                  </a:moveTo>
+                  <a:lnTo>
+                    <a:pt x="5486400" y="0"/>
+                  </a:lnTo>
+                  <a:cubicBezTo>
+                    <a:pt x="5682792" y="0"/>
+                    <a:pt x="5842000" y="159208"/>
+                    <a:pt x="5842000" y="355600"/>
+                  </a:cubicBezTo>
+                  <a:lnTo>
+                    <a:pt x="5842000" y="3200400"/>
+                  </a:lnTo>
+                  <a:cubicBezTo>
+                    <a:pt x="5842000" y="3396792"/>
+                    <a:pt x="5682792" y="3556000"/>
+                    <a:pt x="5486400" y="3556000"/>
+                  </a:cubicBezTo>
+                  <a:lnTo>
+                    <a:pt x="355600" y="3556000"/>
+                  </a:lnTo>
+                  <a:cubicBezTo>
+                    <a:pt x="159208" y="3556000"/>
+                    <a:pt x="0" y="3396792"/>
+                    <a:pt x="0" y="3200400"/>
+                  </a:cubicBezTo>
+                  <a:lnTo>
+                    <a:pt x="0" y="355600"/>
+                  </a:lnTo>
+                  <a:cubicBezTo>
+                    <a:pt x="0" y="159208"/>
+                    <a:pt x="159208" y="0"/>
+                    <a:pt x="355600" y="0"/>
+                  </a:cubicBezTo>
+                  <a:close/>
+                </a:path>
+              </a:pathLst>
+            </a:custGeom>
+            <a:solidFill>
+              <a:srgbClr val="333333"/>
+            </a:solidFill>
+            <a:ln>
+              <a:noFill/>
+            </a:ln>
+          </p:spPr>
+          <p:txBody>
+            <a:bodyPr anchorCtr="0" anchor="ctr" bIns="98450" lIns="98450" spcFirstLastPara="1" rIns="98450" wrap="square" tIns="98450">
+              <a:noAutofit/>
+            </a:bodyPr>
+            <a:lstStyle/>
+            <a:p>
+              <a:pPr indent="0" lvl="0" marL="0" rtl="0" algn="l">
+                <a:spcBef>
+                  <a:spcPts val="0"/>
+                </a:spcBef>
+                <a:spcAft>
+                  <a:spcPts val="0"/>
+                </a:spcAft>
+                <a:buNone/>
+              </a:pPr>
+              <a:r>
+                <a:t/>
+              </a:r>
+              <a:endParaRPr/>
+            </a:p>
+          </p:txBody>
+        </p:sp>
+        <p:sp>
+          <p:nvSpPr>
+            <p:cNvPr id="290" name="Google Shape;290;g3f8c140b409_0_53"/>
+            <p:cNvSpPr txBox="1"/>
+            <p:nvPr/>
+          </p:nvSpPr>
+          <p:spPr>
+            <a:xfrm>
+              <a:off x="0" y="-38100"/>
+              <a:ext cx="5841900" cy="3594000"/>
+            </a:xfrm>
+            <a:prstGeom prst="rect">
+              <a:avLst/>
+            </a:prstGeom>
+            <a:noFill/>
+            <a:ln>
+              <a:noFill/>
+            </a:ln>
+          </p:spPr>
+          <p:txBody>
+            <a:bodyPr anchorCtr="0" anchor="ctr" bIns="54700" lIns="54700" spcFirstLastPara="1" rIns="54700" wrap="square" tIns="54700">
+              <a:noAutofit/>
+            </a:bodyPr>
+            <a:lstStyle/>
+            <a:p>
+              <a:pPr indent="0" lvl="0" marL="0" marR="0" rtl="0" algn="l">
+                <a:lnSpc>
+                  <a:spcPct val="93277"/>
+                </a:lnSpc>
+                <a:spcBef>
+                  <a:spcPts val="0"/>
+                </a:spcBef>
+                <a:spcAft>
+                  <a:spcPts val="0"/>
+                </a:spcAft>
+                <a:buNone/>
+              </a:pPr>
+              <a:r>
+                <a:t/>
+              </a:r>
+              <a:endParaRPr b="0" i="0" sz="1939" u="none" cap="none" strike="noStrike">
+                <a:solidFill>
+                  <a:schemeClr val="dk1"/>
+                </a:solidFill>
+                <a:latin typeface="Calibri"/>
+                <a:ea typeface="Calibri"/>
+                <a:cs typeface="Calibri"/>
+                <a:sym typeface="Calibri"/>
+              </a:endParaRPr>
+            </a:p>
+          </p:txBody>
+        </p:sp>
+      </p:grpSp>
+      <p:grpSp>
+        <p:nvGrpSpPr>
+          <p:cNvPr id="291" name="Google Shape;291;g3f8c140b409_0_53"/>
+          <p:cNvGrpSpPr/>
+          <p:nvPr/>
+        </p:nvGrpSpPr>
+        <p:grpSpPr>
+          <a:xfrm>
+            <a:off x="2165749" y="3059972"/>
+            <a:ext cx="78227" cy="3168190"/>
+            <a:chOff x="0" y="-38100"/>
+            <a:chExt cx="76200" cy="3086100"/>
+          </a:xfrm>
+        </p:grpSpPr>
+        <p:sp>
+          <p:nvSpPr>
+            <p:cNvPr id="292" name="Google Shape;292;g3f8c140b409_0_53"/>
+            <p:cNvSpPr/>
+            <p:nvPr/>
+          </p:nvSpPr>
+          <p:spPr>
+            <a:xfrm>
+              <a:off x="0" y="0"/>
+              <a:ext cx="76200" cy="3048000"/>
+            </a:xfrm>
+            <a:custGeom>
+              <a:rect b="b" l="l" r="r" t="t"/>
+              <a:pathLst>
+                <a:path extrusionOk="0" h="3048000" w="76200">
+                  <a:moveTo>
+                    <a:pt x="0" y="0"/>
+                  </a:moveTo>
+                  <a:lnTo>
+                    <a:pt x="76200" y="0"/>
+                  </a:lnTo>
+                  <a:lnTo>
+                    <a:pt x="76200" y="3048000"/>
+                  </a:lnTo>
+                  <a:lnTo>
+                    <a:pt x="0" y="3048000"/>
+                  </a:lnTo>
+                  <a:close/>
+                </a:path>
+              </a:pathLst>
+            </a:custGeom>
+            <a:solidFill>
+              <a:srgbClr val="E30613"/>
+            </a:solidFill>
+            <a:ln>
+              <a:noFill/>
+            </a:ln>
+          </p:spPr>
+        </p:sp>
+        <p:sp>
+          <p:nvSpPr>
+            <p:cNvPr id="293" name="Google Shape;293;g3f8c140b409_0_53"/>
+            <p:cNvSpPr txBox="1"/>
+            <p:nvPr/>
+          </p:nvSpPr>
+          <p:spPr>
+            <a:xfrm>
+              <a:off x="0" y="-38100"/>
+              <a:ext cx="76200" cy="3086100"/>
+            </a:xfrm>
+            <a:prstGeom prst="rect">
+              <a:avLst/>
+            </a:prstGeom>
+            <a:noFill/>
+            <a:ln>
+              <a:noFill/>
+            </a:ln>
+          </p:spPr>
+          <p:txBody>
+            <a:bodyPr anchorCtr="0" anchor="ctr" bIns="56750" lIns="56750" spcFirstLastPara="1" rIns="56750" wrap="square" tIns="56750">
+              <a:noAutofit/>
+            </a:bodyPr>
+            <a:lstStyle/>
+            <a:p>
+              <a:pPr indent="0" lvl="0" marL="0" marR="0" rtl="0" algn="l">
+                <a:lnSpc>
+                  <a:spcPct val="93277"/>
+                </a:lnSpc>
+                <a:spcBef>
+                  <a:spcPts val="0"/>
+                </a:spcBef>
+                <a:spcAft>
+                  <a:spcPts val="0"/>
+                </a:spcAft>
+                <a:buNone/>
+              </a:pPr>
+              <a:r>
+                <a:t/>
+              </a:r>
+              <a:endParaRPr b="0" i="0" sz="2011" u="none" cap="none" strike="noStrike">
+                <a:solidFill>
+                  <a:schemeClr val="dk1"/>
+                </a:solidFill>
+                <a:latin typeface="Calibri"/>
+                <a:ea typeface="Calibri"/>
+                <a:cs typeface="Calibri"/>
+                <a:sym typeface="Calibri"/>
+              </a:endParaRPr>
+            </a:p>
+          </p:txBody>
+        </p:sp>
+      </p:grpSp>
+      <p:sp>
+        <p:nvSpPr>
+          <p:cNvPr id="294" name="Google Shape;294;g3f8c140b409_0_53"/>
+          <p:cNvSpPr txBox="1"/>
+          <p:nvPr/>
+        </p:nvSpPr>
+        <p:spPr>
+          <a:xfrm>
+            <a:off x="2533450" y="3228400"/>
+            <a:ext cx="4518300" cy="431100"/>
+          </a:xfrm>
+          <a:prstGeom prst="rect">
+            <a:avLst/>
+          </a:prstGeom>
+          <a:noFill/>
+          <a:ln>
+            <a:noFill/>
+          </a:ln>
+        </p:spPr>
+        <p:txBody>
+          <a:bodyPr anchorCtr="0" anchor="t" bIns="0" lIns="0" spcFirstLastPara="1" rIns="0" wrap="square" tIns="0">
+            <a:spAutoFit/>
+          </a:bodyPr>
+          <a:lstStyle/>
+          <a:p>
+            <a:pPr indent="0" lvl="0" marL="0" marR="0" rtl="0" algn="ctr">
+              <a:lnSpc>
+                <a:spcPct val="120000"/>
+              </a:lnSpc>
+              <a:spcBef>
+                <a:spcPts val="0"/>
+              </a:spcBef>
+              <a:spcAft>
+                <a:spcPts val="0"/>
+              </a:spcAft>
+              <a:buNone/>
+            </a:pPr>
+            <a:r>
+              <a:rPr b="1" lang="en-US" sz="2800">
+                <a:solidFill>
+                  <a:srgbClr val="FFFFFF"/>
+                </a:solidFill>
+              </a:rPr>
+              <a:t>Tecnicas</a:t>
+            </a:r>
+            <a:endParaRPr sz="2800"/>
+          </a:p>
+        </p:txBody>
+      </p:sp>
+      <p:sp>
+        <p:nvSpPr>
+          <p:cNvPr id="295" name="Google Shape;295;g3f8c140b409_0_53"/>
+          <p:cNvSpPr txBox="1"/>
+          <p:nvPr/>
+        </p:nvSpPr>
+        <p:spPr>
+          <a:xfrm>
+            <a:off x="2533447" y="3910398"/>
+            <a:ext cx="4776300" cy="2181300"/>
+          </a:xfrm>
+          <a:prstGeom prst="rect">
+            <a:avLst/>
+          </a:prstGeom>
+          <a:noFill/>
+          <a:ln>
+            <a:noFill/>
+          </a:ln>
+        </p:spPr>
+        <p:txBody>
+          <a:bodyPr anchorCtr="0" anchor="t" bIns="0" lIns="0" spcFirstLastPara="1" rIns="0" wrap="square" tIns="0">
+            <a:spAutoFit/>
+          </a:bodyPr>
+          <a:lstStyle/>
+          <a:p>
+            <a:pPr indent="-357158" lvl="0" marL="457200" marR="0" rtl="0" algn="just">
+              <a:lnSpc>
+                <a:spcPct val="150000"/>
+              </a:lnSpc>
+              <a:spcBef>
+                <a:spcPts val="0"/>
+              </a:spcBef>
+              <a:spcAft>
+                <a:spcPts val="0"/>
+              </a:spcAft>
+              <a:buClr>
+                <a:srgbClr val="FFFFFF"/>
+              </a:buClr>
+              <a:buSzPts val="2025"/>
+              <a:buChar char="●"/>
+            </a:pPr>
+            <a:r>
+              <a:rPr lang="en-US" sz="2025">
+                <a:solidFill>
+                  <a:srgbClr val="FFFFFF"/>
+                </a:solidFill>
+              </a:rPr>
+              <a:t>Gestión de proyectos.</a:t>
+            </a:r>
+            <a:endParaRPr sz="2025">
+              <a:solidFill>
+                <a:srgbClr val="FFFFFF"/>
+              </a:solidFill>
+            </a:endParaRPr>
+          </a:p>
+          <a:p>
+            <a:pPr indent="-357158" lvl="0" marL="457200" marR="0" rtl="0" algn="just">
+              <a:lnSpc>
+                <a:spcPct val="150000"/>
+              </a:lnSpc>
+              <a:spcBef>
+                <a:spcPts val="0"/>
+              </a:spcBef>
+              <a:spcAft>
+                <a:spcPts val="0"/>
+              </a:spcAft>
+              <a:buClr>
+                <a:srgbClr val="FFFFFF"/>
+              </a:buClr>
+              <a:buSzPts val="2025"/>
+              <a:buChar char="●"/>
+            </a:pPr>
+            <a:r>
+              <a:rPr lang="en-US" sz="2025">
+                <a:solidFill>
+                  <a:srgbClr val="FFFFFF"/>
+                </a:solidFill>
+              </a:rPr>
+              <a:t>Desarrollo de software.</a:t>
+            </a:r>
+            <a:endParaRPr sz="2025">
+              <a:solidFill>
+                <a:srgbClr val="FFFFFF"/>
+              </a:solidFill>
+            </a:endParaRPr>
+          </a:p>
+          <a:p>
+            <a:pPr indent="-357158" lvl="0" marL="457200" marR="0" rtl="0" algn="just">
+              <a:lnSpc>
+                <a:spcPct val="150000"/>
+              </a:lnSpc>
+              <a:spcBef>
+                <a:spcPts val="0"/>
+              </a:spcBef>
+              <a:spcAft>
+                <a:spcPts val="0"/>
+              </a:spcAft>
+              <a:buClr>
+                <a:srgbClr val="FFFFFF"/>
+              </a:buClr>
+              <a:buSzPts val="2025"/>
+              <a:buChar char="●"/>
+            </a:pPr>
+            <a:r>
+              <a:rPr lang="en-US" sz="2025">
+                <a:solidFill>
+                  <a:srgbClr val="FFFFFF"/>
+                </a:solidFill>
+              </a:rPr>
+              <a:t>Modelamiento base de datos.</a:t>
+            </a:r>
+            <a:endParaRPr sz="2025">
+              <a:solidFill>
+                <a:srgbClr val="FFFFFF"/>
+              </a:solidFill>
+            </a:endParaRPr>
+          </a:p>
+          <a:p>
+            <a:pPr indent="-357158" lvl="0" marL="457200" marR="0" rtl="0" algn="just">
+              <a:lnSpc>
+                <a:spcPct val="150000"/>
+              </a:lnSpc>
+              <a:spcBef>
+                <a:spcPts val="0"/>
+              </a:spcBef>
+              <a:spcAft>
+                <a:spcPts val="0"/>
+              </a:spcAft>
+              <a:buClr>
+                <a:srgbClr val="FFFFFF"/>
+              </a:buClr>
+              <a:buSzPts val="2025"/>
+              <a:buChar char="●"/>
+            </a:pPr>
+            <a:r>
+              <a:rPr lang="en-US" sz="2025">
+                <a:solidFill>
+                  <a:srgbClr val="FFFFFF"/>
+                </a:solidFill>
+              </a:rPr>
+              <a:t>Consumo de API’s.</a:t>
+            </a:r>
+            <a:endParaRPr sz="2025">
+              <a:solidFill>
+                <a:srgbClr val="FFFFFF"/>
+              </a:solidFill>
+            </a:endParaRPr>
+          </a:p>
+          <a:p>
+            <a:pPr indent="-357158" lvl="0" marL="457200" marR="0" rtl="0" algn="just">
+              <a:lnSpc>
+                <a:spcPct val="150000"/>
+              </a:lnSpc>
+              <a:spcBef>
+                <a:spcPts val="0"/>
+              </a:spcBef>
+              <a:spcAft>
+                <a:spcPts val="0"/>
+              </a:spcAft>
+              <a:buClr>
+                <a:srgbClr val="FFFFFF"/>
+              </a:buClr>
+              <a:buSzPts val="2025"/>
+              <a:buChar char="●"/>
+            </a:pPr>
+            <a:r>
+              <a:rPr lang="en-US" sz="2025">
+                <a:solidFill>
+                  <a:srgbClr val="FFFFFF"/>
+                </a:solidFill>
+              </a:rPr>
+              <a:t>Diseño de prototipo.</a:t>
+            </a:r>
+            <a:endParaRPr sz="2025">
+              <a:solidFill>
+                <a:srgbClr val="FFFFFF"/>
+              </a:solidFill>
+            </a:endParaRPr>
+          </a:p>
+        </p:txBody>
+      </p:sp>
+      <p:pic>
+        <p:nvPicPr>
+          <p:cNvPr id="296" name="Google Shape;296;g3f8c140b409_0_53"/>
+          <p:cNvPicPr preferRelativeResize="0"/>
+          <p:nvPr/>
+        </p:nvPicPr>
+        <p:blipFill rotWithShape="1">
+          <a:blip r:embed="rId3">
+            <a:alphaModFix/>
+          </a:blip>
+          <a:srcRect b="0" l="0" r="0" t="0"/>
+          <a:stretch/>
+        </p:blipFill>
+        <p:spPr>
+          <a:xfrm>
+            <a:off x="16001984" y="-868967"/>
+            <a:ext cx="2286006" cy="2286006"/>
+          </a:xfrm>
+          <a:prstGeom prst="rect">
+            <a:avLst/>
+          </a:prstGeom>
+          <a:noFill/>
+          <a:ln>
+            <a:noFill/>
+          </a:ln>
+        </p:spPr>
+      </p:pic>
+      <p:grpSp>
+        <p:nvGrpSpPr>
+          <p:cNvPr id="297" name="Google Shape;297;g3f8c140b409_0_53"/>
+          <p:cNvGrpSpPr/>
+          <p:nvPr/>
+        </p:nvGrpSpPr>
+        <p:grpSpPr>
+          <a:xfrm>
+            <a:off x="9910075" y="2865525"/>
+            <a:ext cx="5781827" cy="3557081"/>
+            <a:chOff x="0" y="-38100"/>
+            <a:chExt cx="5842000" cy="3594100"/>
+          </a:xfrm>
+        </p:grpSpPr>
+        <p:sp>
+          <p:nvSpPr>
+            <p:cNvPr id="298" name="Google Shape;298;g3f8c140b409_0_53"/>
+            <p:cNvSpPr/>
+            <p:nvPr/>
+          </p:nvSpPr>
+          <p:spPr>
+            <a:xfrm>
+              <a:off x="0" y="0"/>
+              <a:ext cx="5842000" cy="3556000"/>
+            </a:xfrm>
+            <a:custGeom>
+              <a:rect b="b" l="l" r="r" t="t"/>
+              <a:pathLst>
+                <a:path extrusionOk="0" h="3556000" w="5842000">
+                  <a:moveTo>
+                    <a:pt x="355600" y="0"/>
+                  </a:moveTo>
+                  <a:lnTo>
+                    <a:pt x="5486400" y="0"/>
+                  </a:lnTo>
+                  <a:cubicBezTo>
+                    <a:pt x="5682792" y="0"/>
+                    <a:pt x="5842000" y="159208"/>
+                    <a:pt x="5842000" y="355600"/>
+                  </a:cubicBezTo>
+                  <a:lnTo>
+                    <a:pt x="5842000" y="3200400"/>
+                  </a:lnTo>
+                  <a:cubicBezTo>
+                    <a:pt x="5842000" y="3396792"/>
+                    <a:pt x="5682792" y="3556000"/>
+                    <a:pt x="5486400" y="3556000"/>
+                  </a:cubicBezTo>
+                  <a:lnTo>
+                    <a:pt x="355600" y="3556000"/>
+                  </a:lnTo>
+                  <a:cubicBezTo>
+                    <a:pt x="159208" y="3556000"/>
+                    <a:pt x="0" y="3396792"/>
+                    <a:pt x="0" y="3200400"/>
+                  </a:cubicBezTo>
+                  <a:lnTo>
+                    <a:pt x="0" y="355600"/>
+                  </a:lnTo>
+                  <a:cubicBezTo>
+                    <a:pt x="0" y="159208"/>
+                    <a:pt x="159208" y="0"/>
+                    <a:pt x="355600" y="0"/>
+                  </a:cubicBezTo>
+                  <a:close/>
+                </a:path>
+              </a:pathLst>
+            </a:custGeom>
+            <a:gradFill>
+              <a:gsLst>
+                <a:gs pos="0">
+                  <a:srgbClr val="E30613"/>
+                </a:gs>
+                <a:gs pos="100000">
+                  <a:srgbClr val="520B07"/>
+                </a:gs>
+              </a:gsLst>
+              <a:lin ang="5400700" scaled="0"/>
+            </a:gradFill>
+            <a:ln>
+              <a:noFill/>
+            </a:ln>
+          </p:spPr>
+          <p:txBody>
+            <a:bodyPr anchorCtr="0" anchor="ctr" bIns="98450" lIns="98450" spcFirstLastPara="1" rIns="98450" wrap="square" tIns="98450">
+              <a:noAutofit/>
+            </a:bodyPr>
+            <a:lstStyle/>
+            <a:p>
+              <a:pPr indent="0" lvl="0" marL="0" rtl="0" algn="l">
+                <a:spcBef>
+                  <a:spcPts val="0"/>
+                </a:spcBef>
+                <a:spcAft>
+                  <a:spcPts val="0"/>
+                </a:spcAft>
+                <a:buNone/>
+              </a:pPr>
+              <a:r>
+                <a:t/>
+              </a:r>
+              <a:endParaRPr/>
+            </a:p>
+          </p:txBody>
+        </p:sp>
+        <p:sp>
+          <p:nvSpPr>
+            <p:cNvPr id="299" name="Google Shape;299;g3f8c140b409_0_53"/>
+            <p:cNvSpPr txBox="1"/>
+            <p:nvPr/>
+          </p:nvSpPr>
+          <p:spPr>
+            <a:xfrm>
+              <a:off x="0" y="-38100"/>
+              <a:ext cx="5841900" cy="3594000"/>
+            </a:xfrm>
+            <a:prstGeom prst="rect">
+              <a:avLst/>
+            </a:prstGeom>
+            <a:gradFill>
+              <a:gsLst>
+                <a:gs pos="0">
+                  <a:srgbClr val="E30613"/>
+                </a:gs>
+                <a:gs pos="100000">
+                  <a:srgbClr val="520B07"/>
+                </a:gs>
+              </a:gsLst>
+              <a:lin ang="5400700" scaled="0"/>
+            </a:gradFill>
+            <a:ln>
+              <a:noFill/>
+            </a:ln>
+          </p:spPr>
+          <p:txBody>
+            <a:bodyPr anchorCtr="0" anchor="ctr" bIns="54700" lIns="54700" spcFirstLastPara="1" rIns="54700" wrap="square" tIns="54700">
+              <a:noAutofit/>
+            </a:bodyPr>
+            <a:lstStyle/>
+            <a:p>
+              <a:pPr indent="0" lvl="0" marL="0" marR="0" rtl="0" algn="l">
+                <a:lnSpc>
+                  <a:spcPct val="93277"/>
+                </a:lnSpc>
+                <a:spcBef>
+                  <a:spcPts val="0"/>
+                </a:spcBef>
+                <a:spcAft>
+                  <a:spcPts val="0"/>
+                </a:spcAft>
+                <a:buNone/>
+              </a:pPr>
+              <a:r>
+                <a:t/>
+              </a:r>
+              <a:endParaRPr b="0" i="0" sz="1939" u="none" cap="none" strike="noStrike">
+                <a:solidFill>
+                  <a:schemeClr val="dk1"/>
+                </a:solidFill>
+                <a:latin typeface="Calibri"/>
+                <a:ea typeface="Calibri"/>
+                <a:cs typeface="Calibri"/>
+                <a:sym typeface="Calibri"/>
+              </a:endParaRPr>
+            </a:p>
+          </p:txBody>
+        </p:sp>
+      </p:grpSp>
+      <p:grpSp>
+        <p:nvGrpSpPr>
+          <p:cNvPr id="300" name="Google Shape;300;g3f8c140b409_0_53"/>
+          <p:cNvGrpSpPr/>
+          <p:nvPr/>
+        </p:nvGrpSpPr>
+        <p:grpSpPr>
+          <a:xfrm>
+            <a:off x="10170824" y="2993697"/>
+            <a:ext cx="78227" cy="3168190"/>
+            <a:chOff x="0" y="-38100"/>
+            <a:chExt cx="76200" cy="3086100"/>
+          </a:xfrm>
+        </p:grpSpPr>
+        <p:sp>
+          <p:nvSpPr>
+            <p:cNvPr id="301" name="Google Shape;301;g3f8c140b409_0_53"/>
+            <p:cNvSpPr/>
+            <p:nvPr/>
+          </p:nvSpPr>
+          <p:spPr>
+            <a:xfrm>
+              <a:off x="0" y="0"/>
+              <a:ext cx="76200" cy="3048000"/>
+            </a:xfrm>
+            <a:custGeom>
+              <a:rect b="b" l="l" r="r" t="t"/>
+              <a:pathLst>
+                <a:path extrusionOk="0" h="3048000" w="76200">
+                  <a:moveTo>
+                    <a:pt x="0" y="0"/>
+                  </a:moveTo>
+                  <a:lnTo>
+                    <a:pt x="76200" y="0"/>
+                  </a:lnTo>
+                  <a:lnTo>
+                    <a:pt x="76200" y="3048000"/>
+                  </a:lnTo>
+                  <a:lnTo>
+                    <a:pt x="0" y="3048000"/>
+                  </a:lnTo>
+                  <a:close/>
+                </a:path>
+              </a:pathLst>
+            </a:custGeom>
+            <a:solidFill>
+              <a:schemeClr val="lt1"/>
+            </a:solidFill>
+            <a:ln>
+              <a:noFill/>
+            </a:ln>
+          </p:spPr>
+        </p:sp>
+        <p:sp>
+          <p:nvSpPr>
+            <p:cNvPr id="302" name="Google Shape;302;g3f8c140b409_0_53"/>
+            <p:cNvSpPr txBox="1"/>
+            <p:nvPr/>
+          </p:nvSpPr>
+          <p:spPr>
+            <a:xfrm>
+              <a:off x="0" y="-38100"/>
+              <a:ext cx="76200" cy="3086100"/>
+            </a:xfrm>
+            <a:prstGeom prst="rect">
+              <a:avLst/>
+            </a:prstGeom>
+            <a:solidFill>
+              <a:schemeClr val="lt1"/>
+            </a:solidFill>
+            <a:ln>
+              <a:noFill/>
+            </a:ln>
+          </p:spPr>
+          <p:txBody>
+            <a:bodyPr anchorCtr="0" anchor="ctr" bIns="56750" lIns="56750" spcFirstLastPara="1" rIns="56750" wrap="square" tIns="56750">
+              <a:noAutofit/>
+            </a:bodyPr>
+            <a:lstStyle/>
+            <a:p>
+              <a:pPr indent="0" lvl="0" marL="0" marR="0" rtl="0" algn="l">
+                <a:lnSpc>
+                  <a:spcPct val="93277"/>
+                </a:lnSpc>
+                <a:spcBef>
+                  <a:spcPts val="0"/>
+                </a:spcBef>
+                <a:spcAft>
+                  <a:spcPts val="0"/>
+                </a:spcAft>
+                <a:buNone/>
+              </a:pPr>
+              <a:r>
+                <a:t/>
+              </a:r>
+              <a:endParaRPr b="0" i="0" sz="2011" u="none" cap="none" strike="noStrike">
+                <a:solidFill>
+                  <a:schemeClr val="dk1"/>
+                </a:solidFill>
+                <a:latin typeface="Calibri"/>
+                <a:ea typeface="Calibri"/>
+                <a:cs typeface="Calibri"/>
+                <a:sym typeface="Calibri"/>
+              </a:endParaRPr>
+            </a:p>
+          </p:txBody>
+        </p:sp>
+      </p:grpSp>
+      <p:sp>
+        <p:nvSpPr>
+          <p:cNvPr id="303" name="Google Shape;303;g3f8c140b409_0_53"/>
+          <p:cNvSpPr txBox="1"/>
+          <p:nvPr/>
+        </p:nvSpPr>
+        <p:spPr>
+          <a:xfrm>
+            <a:off x="10538525" y="3162125"/>
+            <a:ext cx="4518300" cy="431100"/>
+          </a:xfrm>
+          <a:prstGeom prst="rect">
+            <a:avLst/>
+          </a:prstGeom>
+          <a:noFill/>
+          <a:ln>
+            <a:noFill/>
+          </a:ln>
+        </p:spPr>
+        <p:txBody>
+          <a:bodyPr anchorCtr="0" anchor="t" bIns="0" lIns="0" spcFirstLastPara="1" rIns="0" wrap="square" tIns="0">
+            <a:spAutoFit/>
+          </a:bodyPr>
+          <a:lstStyle/>
+          <a:p>
+            <a:pPr indent="0" lvl="0" marL="0" marR="0" rtl="0" algn="ctr">
+              <a:lnSpc>
+                <a:spcPct val="120000"/>
+              </a:lnSpc>
+              <a:spcBef>
+                <a:spcPts val="0"/>
+              </a:spcBef>
+              <a:spcAft>
+                <a:spcPts val="0"/>
+              </a:spcAft>
+              <a:buNone/>
+            </a:pPr>
+            <a:r>
+              <a:rPr b="1" lang="en-US" sz="2800">
+                <a:solidFill>
+                  <a:schemeClr val="lt1"/>
+                </a:solidFill>
+              </a:rPr>
+              <a:t>Blandas</a:t>
+            </a:r>
+            <a:endParaRPr sz="2800">
+              <a:solidFill>
+                <a:schemeClr val="lt1"/>
+              </a:solidFill>
+            </a:endParaRPr>
+          </a:p>
+        </p:txBody>
+      </p:sp>
+      <p:sp>
+        <p:nvSpPr>
+          <p:cNvPr id="304" name="Google Shape;304;g3f8c140b409_0_53"/>
+          <p:cNvSpPr txBox="1"/>
+          <p:nvPr/>
+        </p:nvSpPr>
+        <p:spPr>
+          <a:xfrm>
+            <a:off x="10538522" y="3844123"/>
+            <a:ext cx="4776300" cy="1713900"/>
+          </a:xfrm>
+          <a:prstGeom prst="rect">
+            <a:avLst/>
+          </a:prstGeom>
+          <a:noFill/>
+          <a:ln>
+            <a:noFill/>
+          </a:ln>
+        </p:spPr>
+        <p:txBody>
+          <a:bodyPr anchorCtr="0" anchor="t" bIns="0" lIns="0" spcFirstLastPara="1" rIns="0" wrap="square" tIns="0">
+            <a:spAutoFit/>
+          </a:bodyPr>
+          <a:lstStyle/>
+          <a:p>
+            <a:pPr indent="-357158" lvl="0" marL="457200" marR="0" rtl="0" algn="just">
+              <a:lnSpc>
+                <a:spcPct val="150000"/>
+              </a:lnSpc>
+              <a:spcBef>
+                <a:spcPts val="0"/>
+              </a:spcBef>
+              <a:spcAft>
+                <a:spcPts val="0"/>
+              </a:spcAft>
+              <a:buClr>
+                <a:schemeClr val="lt1"/>
+              </a:buClr>
+              <a:buSzPts val="2025"/>
+              <a:buChar char="●"/>
+            </a:pPr>
+            <a:r>
+              <a:rPr lang="en-US" sz="2025">
+                <a:solidFill>
+                  <a:schemeClr val="lt1"/>
+                </a:solidFill>
+              </a:rPr>
+              <a:t>Comunicación efectiva.</a:t>
+            </a:r>
+            <a:endParaRPr sz="2025">
+              <a:solidFill>
+                <a:schemeClr val="lt1"/>
+              </a:solidFill>
+            </a:endParaRPr>
+          </a:p>
+          <a:p>
+            <a:pPr indent="-357158" lvl="0" marL="457200" marR="0" rtl="0" algn="just">
+              <a:lnSpc>
+                <a:spcPct val="150000"/>
+              </a:lnSpc>
+              <a:spcBef>
+                <a:spcPts val="0"/>
+              </a:spcBef>
+              <a:spcAft>
+                <a:spcPts val="0"/>
+              </a:spcAft>
+              <a:buClr>
+                <a:schemeClr val="lt1"/>
+              </a:buClr>
+              <a:buSzPts val="2025"/>
+              <a:buChar char="●"/>
+            </a:pPr>
+            <a:r>
+              <a:rPr lang="en-US" sz="2025">
+                <a:solidFill>
+                  <a:schemeClr val="lt1"/>
+                </a:solidFill>
+              </a:rPr>
+              <a:t>Responsabilidad</a:t>
+            </a:r>
+            <a:r>
+              <a:rPr lang="en-US" sz="2025">
+                <a:solidFill>
+                  <a:schemeClr val="lt1"/>
+                </a:solidFill>
+              </a:rPr>
+              <a:t>.</a:t>
+            </a:r>
+            <a:endParaRPr sz="2025">
+              <a:solidFill>
+                <a:schemeClr val="lt1"/>
+              </a:solidFill>
+            </a:endParaRPr>
+          </a:p>
+          <a:p>
+            <a:pPr indent="-357158" lvl="0" marL="457200" marR="0" rtl="0" algn="just">
+              <a:lnSpc>
+                <a:spcPct val="150000"/>
+              </a:lnSpc>
+              <a:spcBef>
+                <a:spcPts val="0"/>
+              </a:spcBef>
+              <a:spcAft>
+                <a:spcPts val="0"/>
+              </a:spcAft>
+              <a:buClr>
+                <a:schemeClr val="lt1"/>
+              </a:buClr>
+              <a:buSzPts val="2025"/>
+              <a:buChar char="●"/>
+            </a:pPr>
+            <a:r>
+              <a:rPr lang="en-US" sz="2025">
+                <a:solidFill>
+                  <a:schemeClr val="lt1"/>
+                </a:solidFill>
+              </a:rPr>
+              <a:t>Productividad.</a:t>
+            </a:r>
+            <a:endParaRPr sz="2025">
+              <a:solidFill>
+                <a:schemeClr val="lt1"/>
+              </a:solidFill>
+            </a:endParaRPr>
+          </a:p>
+          <a:p>
+            <a:pPr indent="-357158" lvl="0" marL="457200" marR="0" rtl="0" algn="just">
+              <a:lnSpc>
+                <a:spcPct val="150000"/>
+              </a:lnSpc>
+              <a:spcBef>
+                <a:spcPts val="0"/>
+              </a:spcBef>
+              <a:spcAft>
+                <a:spcPts val="0"/>
+              </a:spcAft>
+              <a:buClr>
+                <a:schemeClr val="lt1"/>
+              </a:buClr>
+              <a:buSzPts val="2025"/>
+              <a:buChar char="●"/>
+            </a:pPr>
+            <a:r>
+              <a:rPr lang="en-US" sz="2025">
+                <a:solidFill>
+                  <a:schemeClr val="lt1"/>
+                </a:solidFill>
+              </a:rPr>
+              <a:t>Trabajo en equipo.</a:t>
+            </a:r>
+            <a:endParaRPr sz="2025">
+              <a:solidFill>
+                <a:schemeClr val="lt1"/>
+              </a:solidFill>
+            </a:endParaRPr>
+          </a:p>
+        </p:txBody>
+      </p:sp>
+    </p:spTree>
+  </p:cSld>
+  <p:clrMapOvr>
+    <a:masterClrMapping/>
+  </p:clrMapOvr>
+</p:sld>
+</file>
+
+<file path=ppt/slides/slide11.xml><?xml version="1.0" encoding="utf-8"?>
+<p:sld xmlns:a="http://schemas.openxmlformats.org/drawingml/2006/main" xmlns:r="http://schemas.openxmlformats.org/officeDocument/2006/relationships" xmlns:mc="http://schemas.openxmlformats.org/markup-compatibility/2006" xmlns:mv="urn:schemas-microsoft-com:mac:vml" xmlns:p="http://schemas.openxmlformats.org/presentationml/2006/main" xmlns:c="http://schemas.openxmlformats.org/drawingml/2006/chart" xmlns:dgm="http://schemas.openxmlformats.org/drawingml/2006/diagram" xmlns:o="urn:schemas-microsoft-com:office:office" xmlns:v="urn:schemas-microsoft-com:vml" xmlns:pvml="urn:schemas-microsoft-com:office:powerpoint" xmlns:com="http://schemas.openxmlformats.org/drawingml/2006/compatibility" xmlns:p14="http://schemas.microsoft.com/office/powerpoint/2010/main" xmlns:p15="http://schemas.microsoft.com/office/powerpoint/2012/main" xmlns:ahyp="http://schemas.microsoft.com/office/drawing/2018/hyperlinkcolor">
+  <p:cSld>
+    <p:spTree>
+      <p:nvGrpSpPr>
+        <p:cNvPr id="308" name="Shape 308"/>
+        <p:cNvGrpSpPr/>
+        <p:nvPr/>
+      </p:nvGrpSpPr>
+      <p:grpSpPr>
+        <a:xfrm>
+          <a:off x="0" y="0"/>
+          <a:ext cx="0" cy="0"/>
+          <a:chOff x="0" y="0"/>
+          <a:chExt cx="0" cy="0"/>
+        </a:xfrm>
+      </p:grpSpPr>
+      <p:grpSp>
+        <p:nvGrpSpPr>
+          <p:cNvPr id="309" name="Google Shape;309;p10"/>
+          <p:cNvGrpSpPr/>
+          <p:nvPr/>
+        </p:nvGrpSpPr>
+        <p:grpSpPr>
+          <a:xfrm>
             <a:off x="0" y="-28575"/>
             <a:ext cx="18288000" cy="104775"/>
             <a:chOff x="0" y="-38100"/>
@@ -12837,7 +14421,7 @@
         </p:grpSpPr>
         <p:sp>
           <p:nvSpPr>
-            <p:cNvPr id="275" name="Google Shape;275;p10"/>
+            <p:cNvPr id="310" name="Google Shape;310;p10"/>
             <p:cNvSpPr/>
             <p:nvPr/>
           </p:nvSpPr>
@@ -12876,7 +14460,7 @@
         </p:sp>
         <p:sp>
           <p:nvSpPr>
-            <p:cNvPr id="276" name="Google Shape;276;p10"/>
+            <p:cNvPr id="311" name="Google Shape;311;p10"/>
             <p:cNvSpPr txBox="1"/>
             <p:nvPr/>
           </p:nvSpPr>
@@ -12929,14 +14513,14 @@
       </p:grpSp>
       <p:sp>
         <p:nvSpPr>
-          <p:cNvPr id="277" name="Google Shape;277;p10"/>
+          <p:cNvPr id="312" name="Google Shape;312;p10"/>
           <p:cNvSpPr txBox="1"/>
           <p:nvPr/>
         </p:nvSpPr>
         <p:spPr>
           <a:xfrm>
             <a:off x="571500" y="342900"/>
-            <a:ext cx="1143000" cy="396240"/>
+            <a:ext cx="1143000" cy="369300"/>
           </a:xfrm>
           <a:prstGeom prst="rect">
             <a:avLst/>
@@ -12974,7 +14558,19 @@
                 <a:cs typeface="Antonio"/>
                 <a:sym typeface="Antonio"/>
               </a:rPr>
-              <a:t>08</a:t>
+              <a:t>0</a:t>
+            </a:r>
+            <a:r>
+              <a:rPr lang="en-US" sz="2400">
+                <a:solidFill>
+                  <a:srgbClr val="E30613"/>
+                </a:solidFill>
+                <a:latin typeface="Antonio"/>
+                <a:ea typeface="Antonio"/>
+                <a:cs typeface="Antonio"/>
+                <a:sym typeface="Antonio"/>
+              </a:rPr>
+              <a:t>9</a:t>
             </a:r>
             <a:endParaRPr/>
           </a:p>
@@ -12982,7 +14578,7 @@
       </p:sp>
       <p:sp>
         <p:nvSpPr>
-          <p:cNvPr id="278" name="Google Shape;278;p10"/>
+          <p:cNvPr id="313" name="Google Shape;313;p10"/>
           <p:cNvSpPr txBox="1"/>
           <p:nvPr/>
         </p:nvSpPr>
@@ -13035,7 +14631,7 @@
       </p:sp>
       <p:grpSp>
         <p:nvGrpSpPr>
-          <p:cNvPr id="279" name="Google Shape;279;p10"/>
+          <p:cNvPr id="314" name="Google Shape;314;p10"/>
           <p:cNvGrpSpPr/>
           <p:nvPr/>
         </p:nvGrpSpPr>
@@ -13049,7 +14645,7 @@
         </p:grpSpPr>
         <p:sp>
           <p:nvSpPr>
-            <p:cNvPr id="280" name="Google Shape;280;p10"/>
+            <p:cNvPr id="315" name="Google Shape;315;p10"/>
             <p:cNvSpPr/>
             <p:nvPr/>
           </p:nvSpPr>
@@ -13088,7 +14684,7 @@
         </p:sp>
         <p:sp>
           <p:nvSpPr>
-            <p:cNvPr id="281" name="Google Shape;281;p10"/>
+            <p:cNvPr id="316" name="Google Shape;316;p10"/>
             <p:cNvSpPr txBox="1"/>
             <p:nvPr/>
           </p:nvSpPr>
@@ -13141,7 +14737,7 @@
       </p:grpSp>
       <p:grpSp>
         <p:nvGrpSpPr>
-          <p:cNvPr id="282" name="Google Shape;282;p10"/>
+          <p:cNvPr id="317" name="Google Shape;317;p10"/>
           <p:cNvGrpSpPr/>
           <p:nvPr/>
         </p:nvGrpSpPr>
@@ -13155,7 +14751,7 @@
         </p:grpSpPr>
         <p:sp>
           <p:nvSpPr>
-            <p:cNvPr id="283" name="Google Shape;283;p10"/>
+            <p:cNvPr id="318" name="Google Shape;318;p10"/>
             <p:cNvSpPr/>
             <p:nvPr/>
           </p:nvSpPr>
@@ -13238,7 +14834,7 @@
         </p:sp>
         <p:sp>
           <p:nvSpPr>
-            <p:cNvPr id="284" name="Google Shape;284;p10"/>
+            <p:cNvPr id="319" name="Google Shape;319;p10"/>
             <p:cNvSpPr txBox="1"/>
             <p:nvPr/>
           </p:nvSpPr>
@@ -13291,7 +14887,7 @@
       </p:grpSp>
       <p:grpSp>
         <p:nvGrpSpPr>
-          <p:cNvPr id="285" name="Google Shape;285;p10"/>
+          <p:cNvPr id="320" name="Google Shape;320;p10"/>
           <p:cNvGrpSpPr/>
           <p:nvPr/>
         </p:nvGrpSpPr>
@@ -13305,7 +14901,7 @@
         </p:grpSpPr>
         <p:sp>
           <p:nvSpPr>
-            <p:cNvPr id="286" name="Google Shape;286;p10"/>
+            <p:cNvPr id="321" name="Google Shape;321;p10"/>
             <p:cNvSpPr/>
             <p:nvPr/>
           </p:nvSpPr>
@@ -13344,7 +14940,7 @@
         </p:sp>
         <p:sp>
           <p:nvSpPr>
-            <p:cNvPr id="287" name="Google Shape;287;p10"/>
+            <p:cNvPr id="322" name="Google Shape;322;p10"/>
             <p:cNvSpPr txBox="1"/>
             <p:nvPr/>
           </p:nvSpPr>
@@ -13397,7 +14993,7 @@
       </p:grpSp>
       <p:grpSp>
         <p:nvGrpSpPr>
-          <p:cNvPr id="288" name="Google Shape;288;p10"/>
+          <p:cNvPr id="323" name="Google Shape;323;p10"/>
           <p:cNvGrpSpPr/>
           <p:nvPr/>
         </p:nvGrpSpPr>
@@ -13411,7 +15007,7 @@
         </p:grpSpPr>
         <p:sp>
           <p:nvSpPr>
-            <p:cNvPr id="289" name="Google Shape;289;p10"/>
+            <p:cNvPr id="324" name="Google Shape;324;p10"/>
             <p:cNvSpPr/>
             <p:nvPr/>
           </p:nvSpPr>
@@ -13453,7 +15049,7 @@
         </p:sp>
         <p:sp>
           <p:nvSpPr>
-            <p:cNvPr id="290" name="Google Shape;290;p10"/>
+            <p:cNvPr id="325" name="Google Shape;325;p10"/>
             <p:cNvSpPr txBox="1"/>
             <p:nvPr/>
           </p:nvSpPr>
@@ -13506,7 +15102,7 @@
       </p:grpSp>
       <p:sp>
         <p:nvSpPr>
-          <p:cNvPr id="291" name="Google Shape;291;p10"/>
+          <p:cNvPr id="326" name="Google Shape;326;p10"/>
           <p:cNvSpPr txBox="1"/>
           <p:nvPr/>
         </p:nvSpPr>
@@ -13559,7 +15155,7 @@
       </p:sp>
       <p:grpSp>
         <p:nvGrpSpPr>
-          <p:cNvPr id="292" name="Google Shape;292;p10"/>
+          <p:cNvPr id="327" name="Google Shape;327;p10"/>
           <p:cNvGrpSpPr/>
           <p:nvPr/>
         </p:nvGrpSpPr>
@@ -13573,7 +15169,7 @@
         </p:grpSpPr>
         <p:sp>
           <p:nvSpPr>
-            <p:cNvPr id="293" name="Google Shape;293;p10"/>
+            <p:cNvPr id="328" name="Google Shape;328;p10"/>
             <p:cNvSpPr/>
             <p:nvPr/>
           </p:nvSpPr>
@@ -13615,7 +15211,7 @@
         </p:sp>
         <p:sp>
           <p:nvSpPr>
-            <p:cNvPr id="294" name="Google Shape;294;p10"/>
+            <p:cNvPr id="329" name="Google Shape;329;p10"/>
             <p:cNvSpPr txBox="1"/>
             <p:nvPr/>
           </p:nvSpPr>
@@ -13668,7 +15264,7 @@
       </p:grpSp>
       <p:sp>
         <p:nvSpPr>
-          <p:cNvPr id="295" name="Google Shape;295;p10"/>
+          <p:cNvPr id="330" name="Google Shape;330;p10"/>
           <p:cNvSpPr txBox="1"/>
           <p:nvPr/>
         </p:nvSpPr>
@@ -13721,7 +15317,7 @@
       </p:sp>
       <p:grpSp>
         <p:nvGrpSpPr>
-          <p:cNvPr id="296" name="Google Shape;296;p10"/>
+          <p:cNvPr id="331" name="Google Shape;331;p10"/>
           <p:cNvGrpSpPr/>
           <p:nvPr/>
         </p:nvGrpSpPr>
@@ -13735,7 +15331,7 @@
         </p:grpSpPr>
         <p:sp>
           <p:nvSpPr>
-            <p:cNvPr id="297" name="Google Shape;297;p10"/>
+            <p:cNvPr id="332" name="Google Shape;332;p10"/>
             <p:cNvSpPr/>
             <p:nvPr/>
           </p:nvSpPr>
@@ -13777,7 +15373,7 @@
         </p:sp>
         <p:sp>
           <p:nvSpPr>
-            <p:cNvPr id="298" name="Google Shape;298;p10"/>
+            <p:cNvPr id="333" name="Google Shape;333;p10"/>
             <p:cNvSpPr txBox="1"/>
             <p:nvPr/>
           </p:nvSpPr>
@@ -13830,7 +15426,7 @@
       </p:grpSp>
       <p:sp>
         <p:nvSpPr>
-          <p:cNvPr id="299" name="Google Shape;299;p10"/>
+          <p:cNvPr id="334" name="Google Shape;334;p10"/>
           <p:cNvSpPr txBox="1"/>
           <p:nvPr/>
         </p:nvSpPr>
@@ -13883,7 +15479,7 @@
       </p:sp>
       <p:grpSp>
         <p:nvGrpSpPr>
-          <p:cNvPr id="300" name="Google Shape;300;p10"/>
+          <p:cNvPr id="335" name="Google Shape;335;p10"/>
           <p:cNvGrpSpPr/>
           <p:nvPr/>
         </p:nvGrpSpPr>
@@ -13897,7 +15493,7 @@
         </p:grpSpPr>
         <p:sp>
           <p:nvSpPr>
-            <p:cNvPr id="301" name="Google Shape;301;p10"/>
+            <p:cNvPr id="336" name="Google Shape;336;p10"/>
             <p:cNvSpPr/>
             <p:nvPr/>
           </p:nvSpPr>
@@ -13939,7 +15535,7 @@
         </p:sp>
         <p:sp>
           <p:nvSpPr>
-            <p:cNvPr id="302" name="Google Shape;302;p10"/>
+            <p:cNvPr id="337" name="Google Shape;337;p10"/>
             <p:cNvSpPr txBox="1"/>
             <p:nvPr/>
           </p:nvSpPr>
@@ -13992,7 +15588,7 @@
       </p:grpSp>
       <p:sp>
         <p:nvSpPr>
-          <p:cNvPr id="303" name="Google Shape;303;p10"/>
+          <p:cNvPr id="338" name="Google Shape;338;p10"/>
           <p:cNvSpPr txBox="1"/>
           <p:nvPr/>
         </p:nvSpPr>
@@ -14045,7 +15641,7 @@
       </p:sp>
       <p:grpSp>
         <p:nvGrpSpPr>
-          <p:cNvPr id="304" name="Google Shape;304;p10"/>
+          <p:cNvPr id="339" name="Google Shape;339;p10"/>
           <p:cNvGrpSpPr/>
           <p:nvPr/>
         </p:nvGrpSpPr>
@@ -14059,7 +15655,7 @@
         </p:grpSpPr>
         <p:sp>
           <p:nvSpPr>
-            <p:cNvPr id="305" name="Google Shape;305;p10"/>
+            <p:cNvPr id="340" name="Google Shape;340;p10"/>
             <p:cNvSpPr/>
             <p:nvPr/>
           </p:nvSpPr>
@@ -14101,7 +15697,7 @@
         </p:sp>
         <p:sp>
           <p:nvSpPr>
-            <p:cNvPr id="306" name="Google Shape;306;p10"/>
+            <p:cNvPr id="341" name="Google Shape;341;p10"/>
             <p:cNvSpPr txBox="1"/>
             <p:nvPr/>
           </p:nvSpPr>
@@ -14154,7 +15750,7 @@
       </p:grpSp>
       <p:sp>
         <p:nvSpPr>
-          <p:cNvPr id="307" name="Google Shape;307;p10"/>
+          <p:cNvPr id="342" name="Google Shape;342;p10"/>
           <p:cNvSpPr txBox="1"/>
           <p:nvPr/>
         </p:nvSpPr>
@@ -14207,7 +15803,7 @@
       </p:sp>
       <p:pic>
         <p:nvPicPr>
-          <p:cNvPr id="308" name="Google Shape;308;p10"/>
+          <p:cNvPr id="343" name="Google Shape;343;p10"/>
           <p:cNvPicPr preferRelativeResize="0"/>
           <p:nvPr/>
         </p:nvPicPr>
@@ -14234,7 +15830,7 @@
       </p:pic>
       <p:pic>
         <p:nvPicPr>
-          <p:cNvPr id="309" name="Google Shape;309;p10"/>
+          <p:cNvPr id="344" name="Google Shape;344;p10"/>
           <p:cNvPicPr preferRelativeResize="0"/>
           <p:nvPr/>
         </p:nvPicPr>
@@ -14262,7 +15858,7 @@
       </p:pic>
       <p:pic>
         <p:nvPicPr>
-          <p:cNvPr id="310" name="Google Shape;310;p10"/>
+          <p:cNvPr id="345" name="Google Shape;345;p10"/>
           <p:cNvPicPr preferRelativeResize="0"/>
           <p:nvPr/>
         </p:nvPicPr>
@@ -14296,12 +15892,12 @@
 </p:sld>
 </file>
 
-<file path=ppt/slides/slide11.xml><?xml version="1.0" encoding="utf-8"?>
+<file path=ppt/slides/slide12.xml><?xml version="1.0" encoding="utf-8"?>
 <p:sld xmlns:a="http://schemas.openxmlformats.org/drawingml/2006/main" xmlns:r="http://schemas.openxmlformats.org/officeDocument/2006/relationships" xmlns:mc="http://schemas.openxmlformats.org/markup-compatibility/2006" xmlns:mv="urn:schemas-microsoft-com:mac:vml" xmlns:p="http://schemas.openxmlformats.org/presentationml/2006/main" xmlns:c="http://schemas.openxmlformats.org/drawingml/2006/chart" xmlns:dgm="http://schemas.openxmlformats.org/drawingml/2006/diagram" xmlns:o="urn:schemas-microsoft-com:office:office" xmlns:v="urn:schemas-microsoft-com:vml" xmlns:pvml="urn:schemas-microsoft-com:office:powerpoint" xmlns:com="http://schemas.openxmlformats.org/drawingml/2006/compatibility" xmlns:p14="http://schemas.microsoft.com/office/powerpoint/2010/main" xmlns:p15="http://schemas.microsoft.com/office/powerpoint/2012/main" xmlns:ahyp="http://schemas.microsoft.com/office/drawing/2018/hyperlinkcolor">
   <p:cSld>
     <p:spTree>
       <p:nvGrpSpPr>
-        <p:cNvPr id="314" name="Shape 314"/>
+        <p:cNvPr id="349" name="Shape 349"/>
         <p:cNvGrpSpPr/>
         <p:nvPr/>
       </p:nvGrpSpPr>
@@ -14315,7 +15911,7 @@
       </p:grpSpPr>
       <p:grpSp>
         <p:nvGrpSpPr>
-          <p:cNvPr id="315" name="Google Shape;315;p11"/>
+          <p:cNvPr id="350" name="Google Shape;350;p11"/>
           <p:cNvGrpSpPr/>
           <p:nvPr/>
         </p:nvGrpSpPr>
@@ -14329,7 +15925,7 @@
         </p:grpSpPr>
         <p:sp>
           <p:nvSpPr>
-            <p:cNvPr id="316" name="Google Shape;316;p11"/>
+            <p:cNvPr id="351" name="Google Shape;351;p11"/>
             <p:cNvSpPr/>
             <p:nvPr/>
           </p:nvSpPr>
@@ -14368,7 +15964,7 @@
         </p:sp>
         <p:sp>
           <p:nvSpPr>
-            <p:cNvPr id="317" name="Google Shape;317;p11"/>
+            <p:cNvPr id="352" name="Google Shape;352;p11"/>
             <p:cNvSpPr txBox="1"/>
             <p:nvPr/>
           </p:nvSpPr>
@@ -14421,7 +16017,7 @@
       </p:grpSp>
       <p:sp>
         <p:nvSpPr>
-          <p:cNvPr id="318" name="Google Shape;318;p11"/>
+          <p:cNvPr id="353" name="Google Shape;353;p11"/>
           <p:cNvSpPr txBox="1"/>
           <p:nvPr/>
         </p:nvSpPr>
@@ -14457,18 +16053,6 @@
               <a:buNone/>
             </a:pPr>
             <a:r>
-              <a:rPr b="0" i="0" lang="en-US" sz="2400" u="none" cap="none" strike="noStrike">
-                <a:solidFill>
-                  <a:srgbClr val="E30613"/>
-                </a:solidFill>
-                <a:latin typeface="Antonio"/>
-                <a:ea typeface="Antonio"/>
-                <a:cs typeface="Antonio"/>
-                <a:sym typeface="Antonio"/>
-              </a:rPr>
-              <a:t>0</a:t>
-            </a:r>
-            <a:r>
               <a:rPr lang="en-US" sz="2400">
                 <a:solidFill>
                   <a:srgbClr val="E30613"/>
@@ -14478,7 +16062,7 @@
                 <a:cs typeface="Antonio"/>
                 <a:sym typeface="Antonio"/>
               </a:rPr>
-              <a:t>9</a:t>
+              <a:t>10</a:t>
             </a:r>
             <a:endParaRPr/>
           </a:p>
@@ -14486,7 +16070,7 @@
       </p:sp>
       <p:sp>
         <p:nvSpPr>
-          <p:cNvPr id="319" name="Google Shape;319;p11"/>
+          <p:cNvPr id="354" name="Google Shape;354;p11"/>
           <p:cNvSpPr txBox="1"/>
           <p:nvPr/>
         </p:nvSpPr>
@@ -14539,7 +16123,7 @@
       </p:sp>
       <p:grpSp>
         <p:nvGrpSpPr>
-          <p:cNvPr id="320" name="Google Shape;320;p11"/>
+          <p:cNvPr id="355" name="Google Shape;355;p11"/>
           <p:cNvGrpSpPr/>
           <p:nvPr/>
         </p:nvGrpSpPr>
@@ -14553,7 +16137,7 @@
         </p:grpSpPr>
         <p:sp>
           <p:nvSpPr>
-            <p:cNvPr id="321" name="Google Shape;321;p11"/>
+            <p:cNvPr id="356" name="Google Shape;356;p11"/>
             <p:cNvSpPr/>
             <p:nvPr/>
           </p:nvSpPr>
@@ -14592,7 +16176,7 @@
         </p:sp>
         <p:sp>
           <p:nvSpPr>
-            <p:cNvPr id="322" name="Google Shape;322;p11"/>
+            <p:cNvPr id="357" name="Google Shape;357;p11"/>
             <p:cNvSpPr txBox="1"/>
             <p:nvPr/>
           </p:nvSpPr>
@@ -14645,7 +16229,7 @@
       </p:grpSp>
       <p:grpSp>
         <p:nvGrpSpPr>
-          <p:cNvPr id="323" name="Google Shape;323;p11"/>
+          <p:cNvPr id="358" name="Google Shape;358;p11"/>
           <p:cNvGrpSpPr/>
           <p:nvPr/>
         </p:nvGrpSpPr>
@@ -14659,7 +16243,7 @@
         </p:grpSpPr>
         <p:sp>
           <p:nvSpPr>
-            <p:cNvPr id="324" name="Google Shape;324;p11"/>
+            <p:cNvPr id="359" name="Google Shape;359;p11"/>
             <p:cNvSpPr/>
             <p:nvPr/>
           </p:nvSpPr>
@@ -14698,7 +16282,7 @@
         </p:sp>
         <p:sp>
           <p:nvSpPr>
-            <p:cNvPr id="325" name="Google Shape;325;p11"/>
+            <p:cNvPr id="360" name="Google Shape;360;p11"/>
             <p:cNvSpPr txBox="1"/>
             <p:nvPr/>
           </p:nvSpPr>
@@ -14751,7 +16335,7 @@
       </p:grpSp>
       <p:pic>
         <p:nvPicPr>
-          <p:cNvPr id="326" name="Google Shape;326;p11"/>
+          <p:cNvPr id="361" name="Google Shape;361;p11"/>
           <p:cNvPicPr preferRelativeResize="0"/>
           <p:nvPr/>
         </p:nvPicPr>
@@ -14778,7 +16362,7 @@
       </p:pic>
       <p:grpSp>
         <p:nvGrpSpPr>
-          <p:cNvPr id="327" name="Google Shape;327;p11"/>
+          <p:cNvPr id="362" name="Google Shape;362;p11"/>
           <p:cNvGrpSpPr/>
           <p:nvPr/>
         </p:nvGrpSpPr>
@@ -14792,7 +16376,7 @@
         </p:grpSpPr>
         <p:sp>
           <p:nvSpPr>
-            <p:cNvPr id="328" name="Google Shape;328;p11"/>
+            <p:cNvPr id="363" name="Google Shape;363;p11"/>
             <p:cNvSpPr/>
             <p:nvPr/>
           </p:nvSpPr>
@@ -14875,7 +16459,7 @@
         </p:sp>
         <p:sp>
           <p:nvSpPr>
-            <p:cNvPr id="329" name="Google Shape;329;p11"/>
+            <p:cNvPr id="364" name="Google Shape;364;p11"/>
             <p:cNvSpPr txBox="1"/>
             <p:nvPr/>
           </p:nvSpPr>
@@ -14928,7 +16512,7 @@
       </p:grpSp>
       <p:sp>
         <p:nvSpPr>
-          <p:cNvPr id="330" name="Google Shape;330;p11"/>
+          <p:cNvPr id="365" name="Google Shape;365;p11"/>
           <p:cNvSpPr txBox="1"/>
           <p:nvPr/>
         </p:nvSpPr>
@@ -15012,7 +16596,7 @@
       </p:sp>
       <p:grpSp>
         <p:nvGrpSpPr>
-          <p:cNvPr id="331" name="Google Shape;331;p11"/>
+          <p:cNvPr id="366" name="Google Shape;366;p11"/>
           <p:cNvGrpSpPr/>
           <p:nvPr/>
         </p:nvGrpSpPr>
@@ -15026,7 +16610,7 @@
         </p:grpSpPr>
         <p:sp>
           <p:nvSpPr>
-            <p:cNvPr id="332" name="Google Shape;332;p11"/>
+            <p:cNvPr id="367" name="Google Shape;367;p11"/>
             <p:cNvSpPr/>
             <p:nvPr/>
           </p:nvSpPr>
@@ -15068,7 +16652,7 @@
         </p:sp>
         <p:sp>
           <p:nvSpPr>
-            <p:cNvPr id="333" name="Google Shape;333;p11"/>
+            <p:cNvPr id="368" name="Google Shape;368;p11"/>
             <p:cNvSpPr txBox="1"/>
             <p:nvPr/>
           </p:nvSpPr>
@@ -15121,7 +16705,7 @@
       </p:grpSp>
       <p:sp>
         <p:nvSpPr>
-          <p:cNvPr id="334" name="Google Shape;334;p11"/>
+          <p:cNvPr id="369" name="Google Shape;369;p11"/>
           <p:cNvSpPr txBox="1"/>
           <p:nvPr/>
         </p:nvSpPr>
@@ -15170,7 +16754,7 @@
       </p:sp>
       <p:grpSp>
         <p:nvGrpSpPr>
-          <p:cNvPr id="335" name="Google Shape;335;p11"/>
+          <p:cNvPr id="370" name="Google Shape;370;p11"/>
           <p:cNvGrpSpPr/>
           <p:nvPr/>
         </p:nvGrpSpPr>
@@ -15184,7 +16768,7 @@
         </p:grpSpPr>
         <p:sp>
           <p:nvSpPr>
-            <p:cNvPr id="336" name="Google Shape;336;p11"/>
+            <p:cNvPr id="371" name="Google Shape;371;p11"/>
             <p:cNvSpPr/>
             <p:nvPr/>
           </p:nvSpPr>
@@ -15226,7 +16810,7 @@
         </p:sp>
         <p:sp>
           <p:nvSpPr>
-            <p:cNvPr id="337" name="Google Shape;337;p11"/>
+            <p:cNvPr id="372" name="Google Shape;372;p11"/>
             <p:cNvSpPr txBox="1"/>
             <p:nvPr/>
           </p:nvSpPr>
@@ -15279,7 +16863,7 @@
       </p:grpSp>
       <p:sp>
         <p:nvSpPr>
-          <p:cNvPr id="338" name="Google Shape;338;p11"/>
+          <p:cNvPr id="373" name="Google Shape;373;p11"/>
           <p:cNvSpPr txBox="1"/>
           <p:nvPr/>
         </p:nvSpPr>
@@ -15328,7 +16912,7 @@
       </p:sp>
       <p:grpSp>
         <p:nvGrpSpPr>
-          <p:cNvPr id="339" name="Google Shape;339;p11"/>
+          <p:cNvPr id="374" name="Google Shape;374;p11"/>
           <p:cNvGrpSpPr/>
           <p:nvPr/>
         </p:nvGrpSpPr>
@@ -15342,7 +16926,7 @@
         </p:grpSpPr>
         <p:sp>
           <p:nvSpPr>
-            <p:cNvPr id="340" name="Google Shape;340;p11"/>
+            <p:cNvPr id="375" name="Google Shape;375;p11"/>
             <p:cNvSpPr/>
             <p:nvPr/>
           </p:nvSpPr>
@@ -15384,7 +16968,7 @@
         </p:sp>
         <p:sp>
           <p:nvSpPr>
-            <p:cNvPr id="341" name="Google Shape;341;p11"/>
+            <p:cNvPr id="376" name="Google Shape;376;p11"/>
             <p:cNvSpPr txBox="1"/>
             <p:nvPr/>
           </p:nvSpPr>
@@ -15437,7 +17021,7 @@
       </p:grpSp>
       <p:sp>
         <p:nvSpPr>
-          <p:cNvPr id="342" name="Google Shape;342;p11"/>
+          <p:cNvPr id="377" name="Google Shape;377;p11"/>
           <p:cNvSpPr txBox="1"/>
           <p:nvPr/>
         </p:nvSpPr>
@@ -15518,7 +17102,7 @@
       </p:sp>
       <p:grpSp>
         <p:nvGrpSpPr>
-          <p:cNvPr id="343" name="Google Shape;343;p11"/>
+          <p:cNvPr id="378" name="Google Shape;378;p11"/>
           <p:cNvGrpSpPr/>
           <p:nvPr/>
         </p:nvGrpSpPr>
@@ -15532,7 +17116,7 @@
         </p:grpSpPr>
         <p:sp>
           <p:nvSpPr>
-            <p:cNvPr id="344" name="Google Shape;344;p11"/>
+            <p:cNvPr id="379" name="Google Shape;379;p11"/>
             <p:cNvSpPr/>
             <p:nvPr/>
           </p:nvSpPr>
@@ -15615,7 +17199,7 @@
         </p:sp>
         <p:sp>
           <p:nvSpPr>
-            <p:cNvPr id="345" name="Google Shape;345;p11"/>
+            <p:cNvPr id="380" name="Google Shape;380;p11"/>
             <p:cNvSpPr txBox="1"/>
             <p:nvPr/>
           </p:nvSpPr>
@@ -15668,7 +17252,7 @@
       </p:grpSp>
       <p:sp>
         <p:nvSpPr>
-          <p:cNvPr id="346" name="Google Shape;346;p11"/>
+          <p:cNvPr id="381" name="Google Shape;381;p11"/>
           <p:cNvSpPr txBox="1"/>
           <p:nvPr/>
         </p:nvSpPr>
@@ -15748,7 +17332,7 @@
       </p:sp>
       <p:sp>
         <p:nvSpPr>
-          <p:cNvPr id="347" name="Google Shape;347;p11"/>
+          <p:cNvPr id="382" name="Google Shape;382;p11"/>
           <p:cNvSpPr txBox="1"/>
           <p:nvPr/>
         </p:nvSpPr>
@@ -15792,7 +17376,7 @@
       </p:sp>
       <p:sp>
         <p:nvSpPr>
-          <p:cNvPr id="348" name="Google Shape;348;p11"/>
+          <p:cNvPr id="383" name="Google Shape;383;p11"/>
           <p:cNvSpPr txBox="1"/>
           <p:nvPr/>
         </p:nvSpPr>
@@ -15836,7 +17420,7 @@
       </p:sp>
       <p:grpSp>
         <p:nvGrpSpPr>
-          <p:cNvPr id="349" name="Google Shape;349;p11"/>
+          <p:cNvPr id="384" name="Google Shape;384;p11"/>
           <p:cNvGrpSpPr/>
           <p:nvPr/>
         </p:nvGrpSpPr>
@@ -15850,7 +17434,7 @@
         </p:grpSpPr>
         <p:sp>
           <p:nvSpPr>
-            <p:cNvPr id="350" name="Google Shape;350;p11"/>
+            <p:cNvPr id="385" name="Google Shape;385;p11"/>
             <p:cNvSpPr/>
             <p:nvPr/>
           </p:nvSpPr>
@@ -15892,7 +17476,7 @@
         </p:sp>
         <p:sp>
           <p:nvSpPr>
-            <p:cNvPr id="351" name="Google Shape;351;p11"/>
+            <p:cNvPr id="386" name="Google Shape;386;p11"/>
             <p:cNvSpPr txBox="1"/>
             <p:nvPr/>
           </p:nvSpPr>
@@ -15945,7 +17529,7 @@
       </p:grpSp>
       <p:sp>
         <p:nvSpPr>
-          <p:cNvPr id="352" name="Google Shape;352;p11"/>
+          <p:cNvPr id="387" name="Google Shape;387;p11"/>
           <p:cNvSpPr txBox="1"/>
           <p:nvPr/>
         </p:nvSpPr>
@@ -16010,7 +17594,7 @@
       </p:sp>
       <p:grpSp>
         <p:nvGrpSpPr>
-          <p:cNvPr id="353" name="Google Shape;353;p11"/>
+          <p:cNvPr id="388" name="Google Shape;388;p11"/>
           <p:cNvGrpSpPr/>
           <p:nvPr/>
         </p:nvGrpSpPr>
@@ -16024,7 +17608,7 @@
         </p:grpSpPr>
         <p:sp>
           <p:nvSpPr>
-            <p:cNvPr id="354" name="Google Shape;354;p11"/>
+            <p:cNvPr id="389" name="Google Shape;389;p11"/>
             <p:cNvSpPr/>
             <p:nvPr/>
           </p:nvSpPr>
@@ -16066,7 +17650,7 @@
         </p:sp>
         <p:sp>
           <p:nvSpPr>
-            <p:cNvPr id="355" name="Google Shape;355;p11"/>
+            <p:cNvPr id="390" name="Google Shape;390;p11"/>
             <p:cNvSpPr txBox="1"/>
             <p:nvPr/>
           </p:nvSpPr>
@@ -16119,7 +17703,7 @@
       </p:grpSp>
       <p:sp>
         <p:nvSpPr>
-          <p:cNvPr id="356" name="Google Shape;356;p11"/>
+          <p:cNvPr id="391" name="Google Shape;391;p11"/>
           <p:cNvSpPr txBox="1"/>
           <p:nvPr/>
         </p:nvSpPr>
@@ -16168,7 +17752,7 @@
       </p:sp>
       <p:grpSp>
         <p:nvGrpSpPr>
-          <p:cNvPr id="357" name="Google Shape;357;p11"/>
+          <p:cNvPr id="392" name="Google Shape;392;p11"/>
           <p:cNvGrpSpPr/>
           <p:nvPr/>
         </p:nvGrpSpPr>
@@ -16182,7 +17766,7 @@
         </p:grpSpPr>
         <p:sp>
           <p:nvSpPr>
-            <p:cNvPr id="358" name="Google Shape;358;p11"/>
+            <p:cNvPr id="393" name="Google Shape;393;p11"/>
             <p:cNvSpPr/>
             <p:nvPr/>
           </p:nvSpPr>
@@ -16224,7 +17808,7 @@
         </p:sp>
         <p:sp>
           <p:nvSpPr>
-            <p:cNvPr id="359" name="Google Shape;359;p11"/>
+            <p:cNvPr id="394" name="Google Shape;394;p11"/>
             <p:cNvSpPr txBox="1"/>
             <p:nvPr/>
           </p:nvSpPr>
@@ -16277,7 +17861,7 @@
       </p:grpSp>
       <p:sp>
         <p:nvSpPr>
-          <p:cNvPr id="360" name="Google Shape;360;p11"/>
+          <p:cNvPr id="395" name="Google Shape;395;p11"/>
           <p:cNvSpPr txBox="1"/>
           <p:nvPr/>
         </p:nvSpPr>
@@ -16332,19 +17916,12 @@
 </p:sld>
 </file>
 
-<file path=ppt/slides/slide12.xml><?xml version="1.0" encoding="utf-8"?>
+<file path=ppt/slides/slide13.xml><?xml version="1.0" encoding="utf-8"?>
 <p:sld xmlns:a="http://schemas.openxmlformats.org/drawingml/2006/main" xmlns:r="http://schemas.openxmlformats.org/officeDocument/2006/relationships" xmlns:mc="http://schemas.openxmlformats.org/markup-compatibility/2006" xmlns:mv="urn:schemas-microsoft-com:mac:vml" xmlns:p="http://schemas.openxmlformats.org/presentationml/2006/main" xmlns:c="http://schemas.openxmlformats.org/drawingml/2006/chart" xmlns:dgm="http://schemas.openxmlformats.org/drawingml/2006/diagram" xmlns:o="urn:schemas-microsoft-com:office:office" xmlns:v="urn:schemas-microsoft-com:vml" xmlns:pvml="urn:schemas-microsoft-com:office:powerpoint" xmlns:com="http://schemas.openxmlformats.org/drawingml/2006/compatibility" xmlns:p14="http://schemas.microsoft.com/office/powerpoint/2010/main" xmlns:p15="http://schemas.microsoft.com/office/powerpoint/2012/main" xmlns:ahyp="http://schemas.microsoft.com/office/drawing/2018/hyperlinkcolor">
   <p:cSld>
-    <p:bg>
-      <p:bgPr>
-        <a:solidFill>
-          <a:srgbClr val="F2F2F2"/>
-        </a:solidFill>
-      </p:bgPr>
-    </p:bg>
     <p:spTree>
       <p:nvGrpSpPr>
-        <p:cNvPr id="364" name="Shape 364"/>
+        <p:cNvPr id="399" name="Shape 399"/>
         <p:cNvGrpSpPr/>
         <p:nvPr/>
       </p:nvGrpSpPr>
@@ -16358,12 +17935,523 @@
       </p:grpSpPr>
       <p:grpSp>
         <p:nvGrpSpPr>
-          <p:cNvPr id="365" name="Google Shape;365;p12"/>
+          <p:cNvPr id="400" name="Google Shape;400;g3f8c140b409_0_0"/>
           <p:cNvGrpSpPr/>
           <p:nvPr/>
         </p:nvGrpSpPr>
         <p:grpSpPr>
           <a:xfrm>
+            <a:off x="0" y="-28575"/>
+            <a:ext cx="18288000" cy="104850"/>
+            <a:chOff x="0" y="-38100"/>
+            <a:chExt cx="24384000" cy="139800"/>
+          </a:xfrm>
+        </p:grpSpPr>
+        <p:sp>
+          <p:nvSpPr>
+            <p:cNvPr id="401" name="Google Shape;401;g3f8c140b409_0_0"/>
+            <p:cNvSpPr/>
+            <p:nvPr/>
+          </p:nvSpPr>
+          <p:spPr>
+            <a:xfrm>
+              <a:off x="0" y="0"/>
+              <a:ext cx="24384000" cy="101600"/>
+            </a:xfrm>
+            <a:custGeom>
+              <a:rect b="b" l="l" r="r" t="t"/>
+              <a:pathLst>
+                <a:path extrusionOk="0" h="101600" w="24384000">
+                  <a:moveTo>
+                    <a:pt x="0" y="0"/>
+                  </a:moveTo>
+                  <a:lnTo>
+                    <a:pt x="24384000" y="0"/>
+                  </a:lnTo>
+                  <a:lnTo>
+                    <a:pt x="24384000" y="101600"/>
+                  </a:lnTo>
+                  <a:lnTo>
+                    <a:pt x="0" y="101600"/>
+                  </a:lnTo>
+                  <a:close/>
+                </a:path>
+              </a:pathLst>
+            </a:custGeom>
+            <a:solidFill>
+              <a:srgbClr val="E30613"/>
+            </a:solidFill>
+            <a:ln>
+              <a:noFill/>
+            </a:ln>
+          </p:spPr>
+        </p:sp>
+        <p:sp>
+          <p:nvSpPr>
+            <p:cNvPr id="402" name="Google Shape;402;g3f8c140b409_0_0"/>
+            <p:cNvSpPr txBox="1"/>
+            <p:nvPr/>
+          </p:nvSpPr>
+          <p:spPr>
+            <a:xfrm>
+              <a:off x="0" y="-38100"/>
+              <a:ext cx="24384000" cy="139800"/>
+            </a:xfrm>
+            <a:prstGeom prst="rect">
+              <a:avLst/>
+            </a:prstGeom>
+            <a:noFill/>
+            <a:ln>
+              <a:noFill/>
+            </a:ln>
+          </p:spPr>
+          <p:txBody>
+            <a:bodyPr anchorCtr="0" anchor="ctr" bIns="50800" lIns="50800" spcFirstLastPara="1" rIns="50800" wrap="square" tIns="50800">
+              <a:noAutofit/>
+            </a:bodyPr>
+            <a:lstStyle/>
+            <a:p>
+              <a:pPr indent="0" lvl="0" marL="0" marR="0" rtl="0" algn="l">
+                <a:lnSpc>
+                  <a:spcPct val="93277"/>
+                </a:lnSpc>
+                <a:spcBef>
+                  <a:spcPts val="0"/>
+                </a:spcBef>
+                <a:spcAft>
+                  <a:spcPts val="0"/>
+                </a:spcAft>
+                <a:buNone/>
+              </a:pPr>
+              <a:r>
+                <a:t/>
+              </a:r>
+              <a:endParaRPr b="0" i="0" sz="1800" u="none" cap="none" strike="noStrike">
+                <a:solidFill>
+                  <a:schemeClr val="dk1"/>
+                </a:solidFill>
+                <a:latin typeface="Calibri"/>
+                <a:ea typeface="Calibri"/>
+                <a:cs typeface="Calibri"/>
+                <a:sym typeface="Calibri"/>
+              </a:endParaRPr>
+            </a:p>
+          </p:txBody>
+        </p:sp>
+      </p:grpSp>
+      <p:sp>
+        <p:nvSpPr>
+          <p:cNvPr id="403" name="Google Shape;403;g3f8c140b409_0_0"/>
+          <p:cNvSpPr txBox="1"/>
+          <p:nvPr/>
+        </p:nvSpPr>
+        <p:spPr>
+          <a:xfrm>
+            <a:off x="571500" y="342900"/>
+            <a:ext cx="1143000" cy="369300"/>
+          </a:xfrm>
+          <a:prstGeom prst="rect">
+            <a:avLst/>
+          </a:prstGeom>
+          <a:noFill/>
+          <a:ln>
+            <a:noFill/>
+          </a:ln>
+        </p:spPr>
+        <p:txBody>
+          <a:bodyPr anchorCtr="0" anchor="t" bIns="0" lIns="0" spcFirstLastPara="1" rIns="0" wrap="square" tIns="0">
+            <a:spAutoFit/>
+          </a:bodyPr>
+          <a:lstStyle/>
+          <a:p>
+            <a:pPr indent="0" lvl="0" marL="0" marR="0" rtl="0" algn="l">
+              <a:lnSpc>
+                <a:spcPct val="139958"/>
+              </a:lnSpc>
+              <a:spcBef>
+                <a:spcPts val="0"/>
+              </a:spcBef>
+              <a:spcAft>
+                <a:spcPts val="0"/>
+              </a:spcAft>
+              <a:buNone/>
+            </a:pPr>
+            <a:r>
+              <a:rPr lang="en-US" sz="2400">
+                <a:solidFill>
+                  <a:srgbClr val="E30613"/>
+                </a:solidFill>
+                <a:latin typeface="Antonio"/>
+                <a:ea typeface="Antonio"/>
+                <a:cs typeface="Antonio"/>
+                <a:sym typeface="Antonio"/>
+              </a:rPr>
+              <a:t>11</a:t>
+            </a:r>
+            <a:endParaRPr/>
+          </a:p>
+        </p:txBody>
+      </p:sp>
+      <p:sp>
+        <p:nvSpPr>
+          <p:cNvPr id="404" name="Google Shape;404;g3f8c140b409_0_0"/>
+          <p:cNvSpPr txBox="1"/>
+          <p:nvPr/>
+        </p:nvSpPr>
+        <p:spPr>
+          <a:xfrm>
+            <a:off x="5726490" y="342900"/>
+            <a:ext cx="6834900" cy="1108200"/>
+          </a:xfrm>
+          <a:prstGeom prst="rect">
+            <a:avLst/>
+          </a:prstGeom>
+          <a:noFill/>
+          <a:ln>
+            <a:noFill/>
+          </a:ln>
+        </p:spPr>
+        <p:txBody>
+          <a:bodyPr anchorCtr="0" anchor="t" bIns="0" lIns="0" spcFirstLastPara="1" rIns="0" wrap="square" tIns="0">
+            <a:spAutoFit/>
+          </a:bodyPr>
+          <a:lstStyle/>
+          <a:p>
+            <a:pPr indent="0" lvl="0" marL="0" marR="0" rtl="0" algn="ctr">
+              <a:lnSpc>
+                <a:spcPct val="100000"/>
+              </a:lnSpc>
+              <a:spcBef>
+                <a:spcPts val="0"/>
+              </a:spcBef>
+              <a:spcAft>
+                <a:spcPts val="0"/>
+              </a:spcAft>
+              <a:buNone/>
+            </a:pPr>
+            <a:r>
+              <a:rPr lang="en-US" sz="7200">
+                <a:solidFill>
+                  <a:srgbClr val="1A1A1A"/>
+                </a:solidFill>
+                <a:latin typeface="Antonio"/>
+                <a:ea typeface="Antonio"/>
+                <a:cs typeface="Antonio"/>
+                <a:sym typeface="Antonio"/>
+              </a:rPr>
+              <a:t>Modelo de negocio</a:t>
+            </a:r>
+            <a:endParaRPr/>
+          </a:p>
+        </p:txBody>
+      </p:sp>
+      <p:grpSp>
+        <p:nvGrpSpPr>
+          <p:cNvPr id="405" name="Google Shape;405;g3f8c140b409_0_0"/>
+          <p:cNvGrpSpPr/>
+          <p:nvPr/>
+        </p:nvGrpSpPr>
+        <p:grpSpPr>
+          <a:xfrm flipH="1" rot="10800000">
+            <a:off x="6587897" y="1346258"/>
+            <a:ext cx="5112110" cy="104853"/>
+            <a:chOff x="0" y="-38100"/>
+            <a:chExt cx="4958400" cy="101700"/>
+          </a:xfrm>
+        </p:grpSpPr>
+        <p:sp>
+          <p:nvSpPr>
+            <p:cNvPr id="406" name="Google Shape;406;g3f8c140b409_0_0"/>
+            <p:cNvSpPr/>
+            <p:nvPr/>
+          </p:nvSpPr>
+          <p:spPr>
+            <a:xfrm>
+              <a:off x="0" y="0"/>
+              <a:ext cx="4958310" cy="63500"/>
+            </a:xfrm>
+            <a:custGeom>
+              <a:rect b="b" l="l" r="r" t="t"/>
+              <a:pathLst>
+                <a:path extrusionOk="0" h="63500" w="4958310">
+                  <a:moveTo>
+                    <a:pt x="0" y="0"/>
+                  </a:moveTo>
+                  <a:lnTo>
+                    <a:pt x="4958310" y="0"/>
+                  </a:lnTo>
+                  <a:lnTo>
+                    <a:pt x="4958310" y="63500"/>
+                  </a:lnTo>
+                  <a:lnTo>
+                    <a:pt x="0" y="63500"/>
+                  </a:lnTo>
+                  <a:close/>
+                </a:path>
+              </a:pathLst>
+            </a:custGeom>
+            <a:solidFill>
+              <a:srgbClr val="E30613"/>
+            </a:solidFill>
+            <a:ln>
+              <a:noFill/>
+            </a:ln>
+          </p:spPr>
+        </p:sp>
+        <p:sp>
+          <p:nvSpPr>
+            <p:cNvPr id="407" name="Google Shape;407;g3f8c140b409_0_0"/>
+            <p:cNvSpPr txBox="1"/>
+            <p:nvPr/>
+          </p:nvSpPr>
+          <p:spPr>
+            <a:xfrm>
+              <a:off x="0" y="-38100"/>
+              <a:ext cx="4958400" cy="101700"/>
+            </a:xfrm>
+            <a:prstGeom prst="rect">
+              <a:avLst/>
+            </a:prstGeom>
+            <a:noFill/>
+            <a:ln>
+              <a:noFill/>
+            </a:ln>
+          </p:spPr>
+          <p:txBody>
+            <a:bodyPr anchorCtr="0" anchor="ctr" bIns="69825" lIns="69825" spcFirstLastPara="1" rIns="69825" wrap="square" tIns="69825">
+              <a:noAutofit/>
+            </a:bodyPr>
+            <a:lstStyle/>
+            <a:p>
+              <a:pPr indent="0" lvl="0" marL="0" marR="0" rtl="0" algn="l">
+                <a:lnSpc>
+                  <a:spcPct val="93277"/>
+                </a:lnSpc>
+                <a:spcBef>
+                  <a:spcPts val="0"/>
+                </a:spcBef>
+                <a:spcAft>
+                  <a:spcPts val="0"/>
+                </a:spcAft>
+                <a:buNone/>
+              </a:pPr>
+              <a:r>
+                <a:t/>
+              </a:r>
+              <a:endParaRPr b="0" i="0" sz="2474" u="none" cap="none" strike="noStrike">
+                <a:solidFill>
+                  <a:schemeClr val="dk1"/>
+                </a:solidFill>
+                <a:latin typeface="Calibri"/>
+                <a:ea typeface="Calibri"/>
+                <a:cs typeface="Calibri"/>
+                <a:sym typeface="Calibri"/>
+              </a:endParaRPr>
+            </a:p>
+          </p:txBody>
+        </p:sp>
+      </p:grpSp>
+      <p:grpSp>
+        <p:nvGrpSpPr>
+          <p:cNvPr id="408" name="Google Shape;408;g3f8c140b409_0_0"/>
+          <p:cNvGrpSpPr/>
+          <p:nvPr/>
+        </p:nvGrpSpPr>
+        <p:grpSpPr>
+          <a:xfrm>
+            <a:off x="0" y="10182225"/>
+            <a:ext cx="18288000" cy="104850"/>
+            <a:chOff x="0" y="-38100"/>
+            <a:chExt cx="24384000" cy="139800"/>
+          </a:xfrm>
+        </p:grpSpPr>
+        <p:sp>
+          <p:nvSpPr>
+            <p:cNvPr id="409" name="Google Shape;409;g3f8c140b409_0_0"/>
+            <p:cNvSpPr/>
+            <p:nvPr/>
+          </p:nvSpPr>
+          <p:spPr>
+            <a:xfrm>
+              <a:off x="0" y="0"/>
+              <a:ext cx="24384000" cy="101600"/>
+            </a:xfrm>
+            <a:custGeom>
+              <a:rect b="b" l="l" r="r" t="t"/>
+              <a:pathLst>
+                <a:path extrusionOk="0" h="101600" w="24384000">
+                  <a:moveTo>
+                    <a:pt x="0" y="0"/>
+                  </a:moveTo>
+                  <a:lnTo>
+                    <a:pt x="24384000" y="0"/>
+                  </a:lnTo>
+                  <a:lnTo>
+                    <a:pt x="24384000" y="101600"/>
+                  </a:lnTo>
+                  <a:lnTo>
+                    <a:pt x="0" y="101600"/>
+                  </a:lnTo>
+                  <a:close/>
+                </a:path>
+              </a:pathLst>
+            </a:custGeom>
+            <a:solidFill>
+              <a:srgbClr val="E30613"/>
+            </a:solidFill>
+            <a:ln>
+              <a:noFill/>
+            </a:ln>
+          </p:spPr>
+        </p:sp>
+        <p:sp>
+          <p:nvSpPr>
+            <p:cNvPr id="410" name="Google Shape;410;g3f8c140b409_0_0"/>
+            <p:cNvSpPr txBox="1"/>
+            <p:nvPr/>
+          </p:nvSpPr>
+          <p:spPr>
+            <a:xfrm>
+              <a:off x="0" y="-38100"/>
+              <a:ext cx="24384000" cy="139800"/>
+            </a:xfrm>
+            <a:prstGeom prst="rect">
+              <a:avLst/>
+            </a:prstGeom>
+            <a:noFill/>
+            <a:ln>
+              <a:noFill/>
+            </a:ln>
+          </p:spPr>
+          <p:txBody>
+            <a:bodyPr anchorCtr="0" anchor="ctr" bIns="50800" lIns="50800" spcFirstLastPara="1" rIns="50800" wrap="square" tIns="50800">
+              <a:noAutofit/>
+            </a:bodyPr>
+            <a:lstStyle/>
+            <a:p>
+              <a:pPr indent="0" lvl="0" marL="0" marR="0" rtl="0" algn="l">
+                <a:lnSpc>
+                  <a:spcPct val="93277"/>
+                </a:lnSpc>
+                <a:spcBef>
+                  <a:spcPts val="0"/>
+                </a:spcBef>
+                <a:spcAft>
+                  <a:spcPts val="0"/>
+                </a:spcAft>
+                <a:buNone/>
+              </a:pPr>
+              <a:r>
+                <a:t/>
+              </a:r>
+              <a:endParaRPr b="0" i="0" sz="1800" u="none" cap="none" strike="noStrike">
+                <a:solidFill>
+                  <a:schemeClr val="dk1"/>
+                </a:solidFill>
+                <a:latin typeface="Calibri"/>
+                <a:ea typeface="Calibri"/>
+                <a:cs typeface="Calibri"/>
+                <a:sym typeface="Calibri"/>
+              </a:endParaRPr>
+            </a:p>
+          </p:txBody>
+        </p:sp>
+      </p:grpSp>
+      <p:pic>
+        <p:nvPicPr>
+          <p:cNvPr id="411" name="Google Shape;411;g3f8c140b409_0_0"/>
+          <p:cNvPicPr preferRelativeResize="0"/>
+          <p:nvPr/>
+        </p:nvPicPr>
+        <p:blipFill rotWithShape="1">
+          <a:blip r:embed="rId3">
+            <a:alphaModFix/>
+          </a:blip>
+          <a:srcRect b="0" l="0" r="0" t="0"/>
+          <a:stretch/>
+        </p:blipFill>
+        <p:spPr>
+          <a:xfrm>
+            <a:off x="16001984" y="-868967"/>
+            <a:ext cx="2286006" cy="2286006"/>
+          </a:xfrm>
+          <a:prstGeom prst="rect">
+            <a:avLst/>
+          </a:prstGeom>
+          <a:noFill/>
+          <a:ln>
+            <a:noFill/>
+          </a:ln>
+        </p:spPr>
+      </p:pic>
+      <p:pic>
+        <p:nvPicPr>
+          <p:cNvPr id="412" name="Google Shape;412;g3f8c140b409_0_0"/>
+          <p:cNvPicPr preferRelativeResize="0"/>
+          <p:nvPr/>
+        </p:nvPicPr>
+        <p:blipFill>
+          <a:blip r:embed="rId4">
+            <a:alphaModFix/>
+          </a:blip>
+          <a:stretch>
+            <a:fillRect/>
+          </a:stretch>
+        </p:blipFill>
+        <p:spPr>
+          <a:xfrm>
+            <a:off x="1543938" y="1586475"/>
+            <a:ext cx="14980133" cy="8426325"/>
+          </a:xfrm>
+          <a:prstGeom prst="rect">
+            <a:avLst/>
+          </a:prstGeom>
+          <a:noFill/>
+          <a:ln>
+            <a:noFill/>
+          </a:ln>
+        </p:spPr>
+      </p:pic>
+    </p:spTree>
+  </p:cSld>
+  <p:clrMapOvr>
+    <a:masterClrMapping/>
+  </p:clrMapOvr>
+</p:sld>
+</file>
+
+<file path=ppt/slides/slide14.xml><?xml version="1.0" encoding="utf-8"?>
+<p:sld xmlns:a="http://schemas.openxmlformats.org/drawingml/2006/main" xmlns:r="http://schemas.openxmlformats.org/officeDocument/2006/relationships" xmlns:mc="http://schemas.openxmlformats.org/markup-compatibility/2006" xmlns:mv="urn:schemas-microsoft-com:mac:vml" xmlns:p="http://schemas.openxmlformats.org/presentationml/2006/main" xmlns:c="http://schemas.openxmlformats.org/drawingml/2006/chart" xmlns:dgm="http://schemas.openxmlformats.org/drawingml/2006/diagram" xmlns:o="urn:schemas-microsoft-com:office:office" xmlns:v="urn:schemas-microsoft-com:vml" xmlns:pvml="urn:schemas-microsoft-com:office:powerpoint" xmlns:com="http://schemas.openxmlformats.org/drawingml/2006/compatibility" xmlns:p14="http://schemas.microsoft.com/office/powerpoint/2010/main" xmlns:p15="http://schemas.microsoft.com/office/powerpoint/2012/main" xmlns:ahyp="http://schemas.microsoft.com/office/drawing/2018/hyperlinkcolor">
+  <p:cSld>
+    <p:bg>
+      <p:bgPr>
+        <a:solidFill>
+          <a:srgbClr val="F2F2F2"/>
+        </a:solidFill>
+      </p:bgPr>
+    </p:bg>
+    <p:spTree>
+      <p:nvGrpSpPr>
+        <p:cNvPr id="416" name="Shape 416"/>
+        <p:cNvGrpSpPr/>
+        <p:nvPr/>
+      </p:nvGrpSpPr>
+      <p:grpSpPr>
+        <a:xfrm>
+          <a:off x="0" y="0"/>
+          <a:ext cx="0" cy="0"/>
+          <a:chOff x="0" y="0"/>
+          <a:chExt cx="0" cy="0"/>
+        </a:xfrm>
+      </p:grpSpPr>
+      <p:grpSp>
+        <p:nvGrpSpPr>
+          <p:cNvPr id="417" name="Google Shape;417;p12"/>
+          <p:cNvGrpSpPr/>
+          <p:nvPr/>
+        </p:nvGrpSpPr>
+        <p:grpSpPr>
+          <a:xfrm>
             <a:off x="16383000" y="-981075"/>
             <a:ext cx="2857500" cy="2886075"/>
             <a:chOff x="0" y="-38100"/>
@@ -16372,7 +18460,7 @@
         </p:grpSpPr>
         <p:sp>
           <p:nvSpPr>
-            <p:cNvPr id="366" name="Google Shape;366;p12"/>
+            <p:cNvPr id="418" name="Google Shape;418;p12"/>
             <p:cNvSpPr/>
             <p:nvPr/>
           </p:nvSpPr>
@@ -16445,7 +18533,7 @@
         </p:sp>
         <p:sp>
           <p:nvSpPr>
-            <p:cNvPr id="367" name="Google Shape;367;p12"/>
+            <p:cNvPr id="419" name="Google Shape;419;p12"/>
             <p:cNvSpPr txBox="1"/>
             <p:nvPr/>
           </p:nvSpPr>
@@ -16498,14 +18586,14 @@
       </p:grpSp>
       <p:sp>
         <p:nvSpPr>
-          <p:cNvPr id="368" name="Google Shape;368;p12"/>
+          <p:cNvPr id="420" name="Google Shape;420;p12"/>
           <p:cNvSpPr txBox="1"/>
           <p:nvPr/>
         </p:nvSpPr>
         <p:spPr>
           <a:xfrm>
             <a:off x="762000" y="342900"/>
-            <a:ext cx="1143000" cy="396240"/>
+            <a:ext cx="1143000" cy="369300"/>
           </a:xfrm>
           <a:prstGeom prst="rect">
             <a:avLst/>
@@ -16543,7 +18631,19 @@
                 <a:cs typeface="Antonio"/>
                 <a:sym typeface="Antonio"/>
               </a:rPr>
-              <a:t>10</a:t>
+              <a:t>1</a:t>
+            </a:r>
+            <a:r>
+              <a:rPr lang="en-US" sz="2400">
+                <a:solidFill>
+                  <a:srgbClr val="E30613"/>
+                </a:solidFill>
+                <a:latin typeface="Antonio"/>
+                <a:ea typeface="Antonio"/>
+                <a:cs typeface="Antonio"/>
+                <a:sym typeface="Antonio"/>
+              </a:rPr>
+              <a:t>2</a:t>
             </a:r>
             <a:endParaRPr/>
           </a:p>
@@ -16551,7 +18651,7 @@
       </p:sp>
       <p:sp>
         <p:nvSpPr>
-          <p:cNvPr id="369" name="Google Shape;369;p12"/>
+          <p:cNvPr id="421" name="Google Shape;421;p12"/>
           <p:cNvSpPr txBox="1"/>
           <p:nvPr/>
         </p:nvSpPr>
@@ -16604,7 +18704,7 @@
       </p:sp>
       <p:grpSp>
         <p:nvGrpSpPr>
-          <p:cNvPr id="370" name="Google Shape;370;p12"/>
+          <p:cNvPr id="422" name="Google Shape;422;p12"/>
           <p:cNvGrpSpPr/>
           <p:nvPr/>
         </p:nvGrpSpPr>
@@ -16618,7 +18718,7 @@
         </p:grpSpPr>
         <p:sp>
           <p:nvSpPr>
-            <p:cNvPr id="371" name="Google Shape;371;p12"/>
+            <p:cNvPr id="423" name="Google Shape;423;p12"/>
             <p:cNvSpPr/>
             <p:nvPr/>
           </p:nvSpPr>
@@ -16657,7 +18757,7 @@
         </p:sp>
         <p:sp>
           <p:nvSpPr>
-            <p:cNvPr id="372" name="Google Shape;372;p12"/>
+            <p:cNvPr id="424" name="Google Shape;424;p12"/>
             <p:cNvSpPr txBox="1"/>
             <p:nvPr/>
           </p:nvSpPr>
@@ -16710,7 +18810,7 @@
       </p:grpSp>
       <p:pic>
         <p:nvPicPr>
-          <p:cNvPr id="373" name="Google Shape;373;p12"/>
+          <p:cNvPr id="425" name="Google Shape;425;p12"/>
           <p:cNvPicPr preferRelativeResize="0"/>
           <p:nvPr/>
         </p:nvPicPr>
@@ -16737,7 +18837,7 @@
       </p:pic>
       <p:pic>
         <p:nvPicPr>
-          <p:cNvPr id="374" name="Google Shape;374;p12"/>
+          <p:cNvPr id="426" name="Google Shape;426;p12"/>
           <p:cNvPicPr preferRelativeResize="0"/>
           <p:nvPr/>
         </p:nvPicPr>
@@ -16765,7 +18865,7 @@
       </p:pic>
       <p:pic>
         <p:nvPicPr>
-          <p:cNvPr id="375" name="Google Shape;375;p12"/>
+          <p:cNvPr id="427" name="Google Shape;427;p12"/>
           <p:cNvPicPr preferRelativeResize="0"/>
           <p:nvPr/>
         </p:nvPicPr>
@@ -16793,7 +18893,7 @@
       </p:pic>
       <p:pic>
         <p:nvPicPr>
-          <p:cNvPr id="376" name="Google Shape;376;p12"/>
+          <p:cNvPr id="428" name="Google Shape;428;p12"/>
           <p:cNvPicPr preferRelativeResize="0"/>
           <p:nvPr/>
         </p:nvPicPr>
@@ -16821,7 +18921,7 @@
       </p:pic>
       <p:pic>
         <p:nvPicPr>
-          <p:cNvPr id="377" name="Google Shape;377;p12"/>
+          <p:cNvPr id="429" name="Google Shape;429;p12"/>
           <p:cNvPicPr preferRelativeResize="0"/>
           <p:nvPr/>
         </p:nvPicPr>
@@ -16849,7 +18949,7 @@
       </p:pic>
       <p:pic>
         <p:nvPicPr>
-          <p:cNvPr id="378" name="Google Shape;378;p12"/>
+          <p:cNvPr id="430" name="Google Shape;430;p12"/>
           <p:cNvPicPr preferRelativeResize="0"/>
           <p:nvPr/>
         </p:nvPicPr>
@@ -16877,7 +18977,7 @@
       </p:pic>
       <p:pic>
         <p:nvPicPr>
-          <p:cNvPr id="379" name="Google Shape;379;p12"/>
+          <p:cNvPr id="431" name="Google Shape;431;p12"/>
           <p:cNvPicPr preferRelativeResize="0"/>
           <p:nvPr/>
         </p:nvPicPr>
@@ -16911,7 +19011,7 @@
 </p:sld>
 </file>
 
-<file path=ppt/slides/slide13.xml><?xml version="1.0" encoding="utf-8"?>
+<file path=ppt/slides/slide15.xml><?xml version="1.0" encoding="utf-8"?>
 <p:sld xmlns:a="http://schemas.openxmlformats.org/drawingml/2006/main" xmlns:r="http://schemas.openxmlformats.org/officeDocument/2006/relationships" xmlns:mc="http://schemas.openxmlformats.org/markup-compatibility/2006" xmlns:mv="urn:schemas-microsoft-com:mac:vml" xmlns:p="http://schemas.openxmlformats.org/presentationml/2006/main" xmlns:c="http://schemas.openxmlformats.org/drawingml/2006/chart" xmlns:dgm="http://schemas.openxmlformats.org/drawingml/2006/diagram" xmlns:o="urn:schemas-microsoft-com:office:office" xmlns:v="urn:schemas-microsoft-com:vml" xmlns:pvml="urn:schemas-microsoft-com:office:powerpoint" xmlns:com="http://schemas.openxmlformats.org/drawingml/2006/compatibility" xmlns:p14="http://schemas.microsoft.com/office/powerpoint/2010/main" xmlns:p15="http://schemas.microsoft.com/office/powerpoint/2012/main" xmlns:ahyp="http://schemas.microsoft.com/office/drawing/2018/hyperlinkcolor">
   <p:cSld>
     <p:bg>
@@ -16931,7 +19031,7 @@
     </p:bg>
     <p:spTree>
       <p:nvGrpSpPr>
-        <p:cNvPr id="383" name="Shape 383"/>
+        <p:cNvPr id="435" name="Shape 435"/>
         <p:cNvGrpSpPr/>
         <p:nvPr/>
       </p:nvGrpSpPr>
@@ -16945,7 +19045,7 @@
       </p:grpSpPr>
       <p:sp>
         <p:nvSpPr>
-          <p:cNvPr id="384" name="Google Shape;384;p13"/>
+          <p:cNvPr id="436" name="Google Shape;436;p13"/>
           <p:cNvSpPr txBox="1"/>
           <p:nvPr/>
         </p:nvSpPr>
@@ -16990,7 +19090,7 @@
                 <a:cs typeface="Antonio"/>
                 <a:sym typeface="Antonio"/>
               </a:rPr>
-              <a:t>11</a:t>
+              <a:t>13</a:t>
             </a:r>
             <a:endParaRPr/>
           </a:p>
@@ -16998,7 +19098,7 @@
       </p:sp>
       <p:sp>
         <p:nvSpPr>
-          <p:cNvPr id="385" name="Google Shape;385;p13"/>
+          <p:cNvPr id="437" name="Google Shape;437;p13"/>
           <p:cNvSpPr txBox="1"/>
           <p:nvPr/>
         </p:nvSpPr>
@@ -17051,7 +19151,7 @@
       </p:sp>
       <p:cxnSp>
         <p:nvCxnSpPr>
-          <p:cNvPr id="386" name="Google Shape;386;p13"/>
+          <p:cNvPr id="438" name="Google Shape;438;p13"/>
           <p:cNvCxnSpPr/>
           <p:nvPr/>
         </p:nvCxnSpPr>
@@ -17077,7 +19177,7 @@
       </p:cxnSp>
       <p:sp>
         <p:nvSpPr>
-          <p:cNvPr id="387" name="Google Shape;387;p13"/>
+          <p:cNvPr id="439" name="Google Shape;439;p13"/>
           <p:cNvSpPr txBox="1"/>
           <p:nvPr/>
         </p:nvSpPr>
@@ -17160,7 +19260,7 @@
       </p:sp>
       <p:grpSp>
         <p:nvGrpSpPr>
-          <p:cNvPr id="388" name="Google Shape;388;p13"/>
+          <p:cNvPr id="440" name="Google Shape;440;p13"/>
           <p:cNvGrpSpPr/>
           <p:nvPr/>
         </p:nvGrpSpPr>
@@ -17174,7 +19274,7 @@
         </p:grpSpPr>
         <p:sp>
           <p:nvSpPr>
-            <p:cNvPr id="389" name="Google Shape;389;p13"/>
+            <p:cNvPr id="441" name="Google Shape;441;p13"/>
             <p:cNvSpPr/>
             <p:nvPr/>
           </p:nvSpPr>
@@ -17215,7 +19315,7 @@
         </p:sp>
         <p:sp>
           <p:nvSpPr>
-            <p:cNvPr id="390" name="Google Shape;390;p13"/>
+            <p:cNvPr id="442" name="Google Shape;442;p13"/>
             <p:cNvSpPr txBox="1"/>
             <p:nvPr/>
           </p:nvSpPr>
@@ -17268,7 +19368,7 @@
       </p:grpSp>
       <p:pic>
         <p:nvPicPr>
-          <p:cNvPr id="391" name="Google Shape;391;p13"/>
+          <p:cNvPr id="443" name="Google Shape;443;p13"/>
           <p:cNvPicPr preferRelativeResize="0"/>
           <p:nvPr/>
         </p:nvPicPr>
@@ -17301,7 +19401,7 @@
 </p:sld>
 </file>
 
-<file path=ppt/slides/slide14.xml><?xml version="1.0" encoding="utf-8"?>
+<file path=ppt/slides/slide16.xml><?xml version="1.0" encoding="utf-8"?>
 <p:sld xmlns:a="http://schemas.openxmlformats.org/drawingml/2006/main" xmlns:r="http://schemas.openxmlformats.org/officeDocument/2006/relationships" xmlns:mc="http://schemas.openxmlformats.org/markup-compatibility/2006" xmlns:mv="urn:schemas-microsoft-com:mac:vml" xmlns:p="http://schemas.openxmlformats.org/presentationml/2006/main" xmlns:c="http://schemas.openxmlformats.org/drawingml/2006/chart" xmlns:dgm="http://schemas.openxmlformats.org/drawingml/2006/diagram" xmlns:o="urn:schemas-microsoft-com:office:office" xmlns:v="urn:schemas-microsoft-com:vml" xmlns:pvml="urn:schemas-microsoft-com:office:powerpoint" xmlns:com="http://schemas.openxmlformats.org/drawingml/2006/compatibility" xmlns:p14="http://schemas.microsoft.com/office/powerpoint/2010/main" xmlns:p15="http://schemas.microsoft.com/office/powerpoint/2012/main" xmlns:ahyp="http://schemas.microsoft.com/office/drawing/2018/hyperlinkcolor">
   <p:cSld>
     <p:bg>
@@ -17321,7 +19421,7 @@
     </p:bg>
     <p:spTree>
       <p:nvGrpSpPr>
-        <p:cNvPr id="395" name="Shape 395"/>
+        <p:cNvPr id="447" name="Shape 447"/>
         <p:cNvGrpSpPr/>
         <p:nvPr/>
       </p:nvGrpSpPr>
@@ -17335,7 +19435,7 @@
       </p:grpSpPr>
       <p:grpSp>
         <p:nvGrpSpPr>
-          <p:cNvPr id="396" name="Google Shape;396;p14"/>
+          <p:cNvPr id="448" name="Google Shape;448;p14"/>
           <p:cNvGrpSpPr/>
           <p:nvPr/>
         </p:nvGrpSpPr>
@@ -17349,7 +19449,7 @@
         </p:grpSpPr>
         <p:sp>
           <p:nvSpPr>
-            <p:cNvPr id="397" name="Google Shape;397;p14"/>
+            <p:cNvPr id="449" name="Google Shape;449;p14"/>
             <p:cNvSpPr txBox="1"/>
             <p:nvPr/>
           </p:nvSpPr>
@@ -17402,7 +19502,7 @@
         </p:sp>
         <p:sp>
           <p:nvSpPr>
-            <p:cNvPr id="398" name="Google Shape;398;p14"/>
+            <p:cNvPr id="450" name="Google Shape;450;p14"/>
             <p:cNvSpPr txBox="1"/>
             <p:nvPr/>
           </p:nvSpPr>
@@ -17454,7 +19554,7 @@
         </p:sp>
         <p:sp>
           <p:nvSpPr>
-            <p:cNvPr id="399" name="Google Shape;399;p14"/>
+            <p:cNvPr id="451" name="Google Shape;451;p14"/>
             <p:cNvSpPr txBox="1"/>
             <p:nvPr/>
           </p:nvSpPr>
@@ -17507,7 +19607,7 @@
       </p:grpSp>
       <p:pic>
         <p:nvPicPr>
-          <p:cNvPr id="400" name="Google Shape;400;p14"/>
+          <p:cNvPr id="452" name="Google Shape;452;p14"/>
           <p:cNvPicPr preferRelativeResize="0"/>
           <p:nvPr/>
         </p:nvPicPr>
@@ -18762,7 +20862,7 @@
         <p:spPr>
           <a:xfrm>
             <a:off x="9921973" y="3581695"/>
-            <a:ext cx="762000" cy="712470"/>
+            <a:ext cx="762000" cy="712500"/>
           </a:xfrm>
           <a:prstGeom prst="rect">
             <a:avLst/>
@@ -18815,7 +20915,7 @@
         <p:spPr>
           <a:xfrm>
             <a:off x="10779223" y="3638845"/>
-            <a:ext cx="5715000" cy="537845"/>
+            <a:ext cx="5715000" cy="492600"/>
           </a:xfrm>
           <a:prstGeom prst="rect">
             <a:avLst/>
@@ -18844,16 +20944,12 @@
               <a:buNone/>
             </a:pPr>
             <a:r>
-              <a:rPr b="0" i="0" lang="en-US" sz="3200" u="none" cap="none" strike="noStrike">
+              <a:rPr lang="en-US" sz="3200">
                 <a:solidFill>
                   <a:srgbClr val="FFFFFF"/>
                 </a:solidFill>
-                <a:latin typeface="Arial"/>
-                <a:ea typeface="Arial"/>
-                <a:cs typeface="Arial"/>
-                <a:sym typeface="Arial"/>
               </a:rPr>
-              <a:t>Riesgos</a:t>
+              <a:t>Competencias</a:t>
             </a:r>
             <a:endParaRPr/>
           </a:p>
@@ -18868,7 +20964,7 @@
         <p:spPr>
           <a:xfrm>
             <a:off x="9921973" y="4229395"/>
-            <a:ext cx="6000750" cy="0"/>
+            <a:ext cx="6000900" cy="0"/>
           </a:xfrm>
           <a:prstGeom prst="straightConnector1">
             <a:avLst/>
@@ -18894,7 +20990,7 @@
         <p:spPr>
           <a:xfrm>
             <a:off x="9921973" y="4534195"/>
-            <a:ext cx="762000" cy="712470"/>
+            <a:ext cx="762000" cy="712500"/>
           </a:xfrm>
           <a:prstGeom prst="rect">
             <a:avLst/>
@@ -18947,7 +21043,7 @@
         <p:spPr>
           <a:xfrm>
             <a:off x="10779223" y="4591345"/>
-            <a:ext cx="5715000" cy="537845"/>
+            <a:ext cx="5715000" cy="492600"/>
           </a:xfrm>
           <a:prstGeom prst="rect">
             <a:avLst/>
@@ -18976,16 +21072,12 @@
               <a:buNone/>
             </a:pPr>
             <a:r>
-              <a:rPr b="0" i="0" lang="en-US" sz="3200" u="none" cap="none" strike="noStrike">
+              <a:rPr lang="en-US" sz="3200">
                 <a:solidFill>
                   <a:srgbClr val="FFFFFF"/>
                 </a:solidFill>
-                <a:latin typeface="Arial"/>
-                <a:ea typeface="Arial"/>
-                <a:cs typeface="Arial"/>
-                <a:sym typeface="Arial"/>
               </a:rPr>
-              <a:t>Seguridad</a:t>
+              <a:t>Riesgos</a:t>
             </a:r>
             <a:endParaRPr/>
           </a:p>
@@ -19000,7 +21092,7 @@
         <p:spPr>
           <a:xfrm>
             <a:off x="9921973" y="5181895"/>
-            <a:ext cx="6000750" cy="0"/>
+            <a:ext cx="6000900" cy="0"/>
           </a:xfrm>
           <a:prstGeom prst="straightConnector1">
             <a:avLst/>
@@ -19026,7 +21118,7 @@
         <p:spPr>
           <a:xfrm>
             <a:off x="9921973" y="5486695"/>
-            <a:ext cx="762000" cy="712470"/>
+            <a:ext cx="762000" cy="712500"/>
           </a:xfrm>
           <a:prstGeom prst="rect">
             <a:avLst/>
@@ -19079,7 +21171,7 @@
         <p:spPr>
           <a:xfrm>
             <a:off x="10779223" y="5543845"/>
-            <a:ext cx="5715000" cy="537845"/>
+            <a:ext cx="5715000" cy="492600"/>
           </a:xfrm>
           <a:prstGeom prst="rect">
             <a:avLst/>
@@ -19108,16 +21200,12 @@
               <a:buNone/>
             </a:pPr>
             <a:r>
-              <a:rPr b="0" i="0" lang="en-US" sz="3200" u="none" cap="none" strike="noStrike">
+              <a:rPr lang="en-US" sz="3200">
                 <a:solidFill>
                   <a:srgbClr val="FFFFFF"/>
                 </a:solidFill>
-                <a:latin typeface="Arial"/>
-                <a:ea typeface="Arial"/>
-                <a:cs typeface="Arial"/>
-                <a:sym typeface="Arial"/>
               </a:rPr>
-              <a:t>Mockup</a:t>
+              <a:t>Seguridad</a:t>
             </a:r>
             <a:endParaRPr/>
           </a:p>
@@ -19132,7 +21220,7 @@
         <p:spPr>
           <a:xfrm>
             <a:off x="9921973" y="6134395"/>
-            <a:ext cx="6000750" cy="0"/>
+            <a:ext cx="6000900" cy="0"/>
           </a:xfrm>
           <a:prstGeom prst="straightConnector1">
             <a:avLst/>
@@ -19264,7 +21352,7 @@
         <p:spPr>
           <a:xfrm>
             <a:off x="10779223" y="6496345"/>
-            <a:ext cx="5715000" cy="537900"/>
+            <a:ext cx="5715000" cy="492600"/>
           </a:xfrm>
           <a:prstGeom prst="rect">
             <a:avLst/>
@@ -19293,16 +21381,12 @@
               <a:buNone/>
             </a:pPr>
             <a:r>
-              <a:rPr b="0" i="0" lang="en-US" sz="3200" u="none" cap="none" strike="noStrike">
+              <a:rPr lang="en-US" sz="3200">
                 <a:solidFill>
                   <a:srgbClr val="FFFFFF"/>
                 </a:solidFill>
-                <a:latin typeface="Arial"/>
-                <a:ea typeface="Arial"/>
-                <a:cs typeface="Arial"/>
-                <a:sym typeface="Arial"/>
               </a:rPr>
-              <a:t>Conclusión</a:t>
+              <a:t>Modelo de negocio</a:t>
             </a:r>
             <a:endParaRPr/>
           </a:p>
@@ -19317,7 +21401,7 @@
         <p:spPr>
           <a:xfrm>
             <a:off x="9921973" y="7086895"/>
-            <a:ext cx="6000750" cy="0"/>
+            <a:ext cx="6000900" cy="0"/>
           </a:xfrm>
           <a:prstGeom prst="straightConnector1">
             <a:avLst/>
@@ -19361,6 +21445,290 @@
           </a:ln>
         </p:spPr>
       </p:pic>
+      <p:sp>
+        <p:nvSpPr>
+          <p:cNvPr id="152" name="Google Shape;152;p2"/>
+          <p:cNvSpPr txBox="1"/>
+          <p:nvPr/>
+        </p:nvSpPr>
+        <p:spPr>
+          <a:xfrm>
+            <a:off x="9921973" y="7390495"/>
+            <a:ext cx="762000" cy="646500"/>
+          </a:xfrm>
+          <a:prstGeom prst="rect">
+            <a:avLst/>
+          </a:prstGeom>
+          <a:noFill/>
+          <a:ln>
+            <a:noFill/>
+          </a:ln>
+        </p:spPr>
+        <p:txBody>
+          <a:bodyPr anchorCtr="0" anchor="t" bIns="0" lIns="0" spcFirstLastPara="1" rIns="0" wrap="square" tIns="0">
+            <a:spAutoFit/>
+          </a:bodyPr>
+          <a:lstStyle/>
+          <a:p>
+            <a:pPr indent="0" lvl="0" marL="0" marR="0" rtl="0" algn="l">
+              <a:lnSpc>
+                <a:spcPct val="140000"/>
+              </a:lnSpc>
+              <a:spcBef>
+                <a:spcPts val="0"/>
+              </a:spcBef>
+              <a:spcAft>
+                <a:spcPts val="0"/>
+              </a:spcAft>
+              <a:buNone/>
+            </a:pPr>
+            <a:r>
+              <a:rPr b="1" i="0" lang="en-US" sz="4200" u="none" cap="none" strike="noStrike">
+                <a:solidFill>
+                  <a:srgbClr val="E30613"/>
+                </a:solidFill>
+                <a:latin typeface="Antonio"/>
+                <a:ea typeface="Antonio"/>
+                <a:cs typeface="Antonio"/>
+                <a:sym typeface="Antonio"/>
+              </a:rPr>
+              <a:t>1</a:t>
+            </a:r>
+            <a:r>
+              <a:rPr b="1" lang="en-US" sz="4200">
+                <a:solidFill>
+                  <a:srgbClr val="E30613"/>
+                </a:solidFill>
+                <a:latin typeface="Antonio"/>
+                <a:ea typeface="Antonio"/>
+                <a:cs typeface="Antonio"/>
+                <a:sym typeface="Antonio"/>
+              </a:rPr>
+              <a:t>2</a:t>
+            </a:r>
+            <a:endParaRPr/>
+          </a:p>
+        </p:txBody>
+      </p:sp>
+      <p:sp>
+        <p:nvSpPr>
+          <p:cNvPr id="153" name="Google Shape;153;p2"/>
+          <p:cNvSpPr txBox="1"/>
+          <p:nvPr/>
+        </p:nvSpPr>
+        <p:spPr>
+          <a:xfrm>
+            <a:off x="10779223" y="7447645"/>
+            <a:ext cx="5715000" cy="492600"/>
+          </a:xfrm>
+          <a:prstGeom prst="rect">
+            <a:avLst/>
+          </a:prstGeom>
+          <a:noFill/>
+          <a:ln>
+            <a:noFill/>
+          </a:ln>
+        </p:spPr>
+        <p:txBody>
+          <a:bodyPr anchorCtr="0" anchor="t" bIns="0" lIns="0" spcFirstLastPara="1" rIns="0" wrap="square" tIns="0">
+            <a:spAutoFit/>
+          </a:bodyPr>
+          <a:lstStyle/>
+          <a:p>
+            <a:pPr indent="0" lvl="0" marL="0" marR="0" rtl="0" algn="l">
+              <a:lnSpc>
+                <a:spcPct val="140000"/>
+              </a:lnSpc>
+              <a:spcBef>
+                <a:spcPts val="0"/>
+              </a:spcBef>
+              <a:spcAft>
+                <a:spcPts val="0"/>
+              </a:spcAft>
+              <a:buNone/>
+            </a:pPr>
+            <a:r>
+              <a:rPr lang="en-US" sz="3200">
+                <a:solidFill>
+                  <a:srgbClr val="FFFFFF"/>
+                </a:solidFill>
+              </a:rPr>
+              <a:t>Mackup</a:t>
+            </a:r>
+            <a:endParaRPr/>
+          </a:p>
+        </p:txBody>
+      </p:sp>
+      <p:cxnSp>
+        <p:nvCxnSpPr>
+          <p:cNvPr id="154" name="Google Shape;154;p2"/>
+          <p:cNvCxnSpPr/>
+          <p:nvPr/>
+        </p:nvCxnSpPr>
+        <p:spPr>
+          <a:xfrm>
+            <a:off x="9921973" y="8038195"/>
+            <a:ext cx="6000900" cy="0"/>
+          </a:xfrm>
+          <a:prstGeom prst="straightConnector1">
+            <a:avLst/>
+          </a:prstGeom>
+          <a:noFill/>
+          <a:ln cap="flat" cmpd="sng" w="9525">
+            <a:solidFill>
+              <a:srgbClr val="333333"/>
+            </a:solidFill>
+            <a:prstDash val="solid"/>
+            <a:round/>
+            <a:headEnd len="sm" w="sm" type="none"/>
+            <a:tailEnd len="sm" w="sm" type="none"/>
+          </a:ln>
+        </p:spPr>
+      </p:cxnSp>
+      <p:sp>
+        <p:nvSpPr>
+          <p:cNvPr id="155" name="Google Shape;155;p2"/>
+          <p:cNvSpPr txBox="1"/>
+          <p:nvPr/>
+        </p:nvSpPr>
+        <p:spPr>
+          <a:xfrm>
+            <a:off x="9921973" y="8278195"/>
+            <a:ext cx="762000" cy="646500"/>
+          </a:xfrm>
+          <a:prstGeom prst="rect">
+            <a:avLst/>
+          </a:prstGeom>
+          <a:noFill/>
+          <a:ln>
+            <a:noFill/>
+          </a:ln>
+        </p:spPr>
+        <p:txBody>
+          <a:bodyPr anchorCtr="0" anchor="t" bIns="0" lIns="0" spcFirstLastPara="1" rIns="0" wrap="square" tIns="0">
+            <a:spAutoFit/>
+          </a:bodyPr>
+          <a:lstStyle/>
+          <a:p>
+            <a:pPr indent="0" lvl="0" marL="0" marR="0" rtl="0" algn="l">
+              <a:lnSpc>
+                <a:spcPct val="140000"/>
+              </a:lnSpc>
+              <a:spcBef>
+                <a:spcPts val="0"/>
+              </a:spcBef>
+              <a:spcAft>
+                <a:spcPts val="0"/>
+              </a:spcAft>
+              <a:buNone/>
+            </a:pPr>
+            <a:r>
+              <a:rPr b="1" i="0" lang="en-US" sz="4200" u="none" cap="none" strike="noStrike">
+                <a:solidFill>
+                  <a:srgbClr val="E30613"/>
+                </a:solidFill>
+                <a:latin typeface="Antonio"/>
+                <a:ea typeface="Antonio"/>
+                <a:cs typeface="Antonio"/>
+                <a:sym typeface="Antonio"/>
+              </a:rPr>
+              <a:t>1</a:t>
+            </a:r>
+            <a:r>
+              <a:rPr b="1" lang="en-US" sz="4200">
+                <a:solidFill>
+                  <a:srgbClr val="E30613"/>
+                </a:solidFill>
+                <a:latin typeface="Antonio"/>
+                <a:ea typeface="Antonio"/>
+                <a:cs typeface="Antonio"/>
+                <a:sym typeface="Antonio"/>
+              </a:rPr>
+              <a:t>3</a:t>
+            </a:r>
+            <a:endParaRPr/>
+          </a:p>
+        </p:txBody>
+      </p:sp>
+      <p:sp>
+        <p:nvSpPr>
+          <p:cNvPr id="156" name="Google Shape;156;p2"/>
+          <p:cNvSpPr txBox="1"/>
+          <p:nvPr/>
+        </p:nvSpPr>
+        <p:spPr>
+          <a:xfrm>
+            <a:off x="10779223" y="8335345"/>
+            <a:ext cx="5715000" cy="492600"/>
+          </a:xfrm>
+          <a:prstGeom prst="rect">
+            <a:avLst/>
+          </a:prstGeom>
+          <a:noFill/>
+          <a:ln>
+            <a:noFill/>
+          </a:ln>
+        </p:spPr>
+        <p:txBody>
+          <a:bodyPr anchorCtr="0" anchor="t" bIns="0" lIns="0" spcFirstLastPara="1" rIns="0" wrap="square" tIns="0">
+            <a:spAutoFit/>
+          </a:bodyPr>
+          <a:lstStyle/>
+          <a:p>
+            <a:pPr indent="0" lvl="0" marL="0" marR="0" rtl="0" algn="l">
+              <a:lnSpc>
+                <a:spcPct val="140000"/>
+              </a:lnSpc>
+              <a:spcBef>
+                <a:spcPts val="0"/>
+              </a:spcBef>
+              <a:spcAft>
+                <a:spcPts val="0"/>
+              </a:spcAft>
+              <a:buNone/>
+            </a:pPr>
+            <a:r>
+              <a:rPr b="0" i="0" lang="en-US" sz="3200" u="none" cap="none" strike="noStrike">
+                <a:solidFill>
+                  <a:srgbClr val="FFFFFF"/>
+                </a:solidFill>
+                <a:latin typeface="Arial"/>
+                <a:ea typeface="Arial"/>
+                <a:cs typeface="Arial"/>
+                <a:sym typeface="Arial"/>
+              </a:rPr>
+              <a:t>Conclusión</a:t>
+            </a:r>
+            <a:endParaRPr/>
+          </a:p>
+        </p:txBody>
+      </p:sp>
+      <p:cxnSp>
+        <p:nvCxnSpPr>
+          <p:cNvPr id="157" name="Google Shape;157;p2"/>
+          <p:cNvCxnSpPr/>
+          <p:nvPr/>
+        </p:nvCxnSpPr>
+        <p:spPr>
+          <a:xfrm>
+            <a:off x="9921973" y="8925895"/>
+            <a:ext cx="6000900" cy="0"/>
+          </a:xfrm>
+          <a:prstGeom prst="straightConnector1">
+            <a:avLst/>
+          </a:prstGeom>
+          <a:noFill/>
+          <a:ln cap="flat" cmpd="sng" w="9525">
+            <a:solidFill>
+              <a:srgbClr val="333333"/>
+            </a:solidFill>
+            <a:prstDash val="solid"/>
+            <a:round/>
+            <a:headEnd len="sm" w="sm" type="none"/>
+            <a:tailEnd len="sm" w="sm" type="none"/>
+          </a:ln>
+        </p:spPr>
+      </p:cxnSp>
     </p:spTree>
   </p:cSld>
   <p:clrMapOvr>
@@ -19381,7 +21749,7 @@
     </p:bg>
     <p:spTree>
       <p:nvGrpSpPr>
-        <p:cNvPr id="155" name="Shape 155"/>
+        <p:cNvPr id="161" name="Shape 161"/>
         <p:cNvGrpSpPr/>
         <p:nvPr/>
       </p:nvGrpSpPr>
@@ -19395,7 +21763,7 @@
       </p:grpSpPr>
       <p:grpSp>
         <p:nvGrpSpPr>
-          <p:cNvPr id="156" name="Google Shape;156;p3"/>
+          <p:cNvPr id="162" name="Google Shape;162;p3"/>
           <p:cNvGrpSpPr/>
           <p:nvPr/>
         </p:nvGrpSpPr>
@@ -19409,7 +21777,7 @@
         </p:grpSpPr>
         <p:sp>
           <p:nvSpPr>
-            <p:cNvPr id="157" name="Google Shape;157;p3"/>
+            <p:cNvPr id="163" name="Google Shape;163;p3"/>
             <p:cNvSpPr/>
             <p:nvPr/>
           </p:nvSpPr>
@@ -19448,7 +21816,7 @@
         </p:sp>
         <p:sp>
           <p:nvSpPr>
-            <p:cNvPr id="158" name="Google Shape;158;p3"/>
+            <p:cNvPr id="164" name="Google Shape;164;p3"/>
             <p:cNvSpPr txBox="1"/>
             <p:nvPr/>
           </p:nvSpPr>
@@ -19501,7 +21869,7 @@
       </p:grpSp>
       <p:sp>
         <p:nvSpPr>
-          <p:cNvPr id="159" name="Google Shape;159;p3"/>
+          <p:cNvPr id="165" name="Google Shape;165;p3"/>
           <p:cNvSpPr txBox="1"/>
           <p:nvPr/>
         </p:nvSpPr>
@@ -19554,7 +21922,7 @@
       </p:sp>
       <p:sp>
         <p:nvSpPr>
-          <p:cNvPr id="160" name="Google Shape;160;p3"/>
+          <p:cNvPr id="166" name="Google Shape;166;p3"/>
           <p:cNvSpPr txBox="1"/>
           <p:nvPr/>
         </p:nvSpPr>
@@ -19607,7 +21975,7 @@
       </p:sp>
       <p:cxnSp>
         <p:nvCxnSpPr>
-          <p:cNvPr id="161" name="Google Shape;161;p3"/>
+          <p:cNvPr id="167" name="Google Shape;167;p3"/>
           <p:cNvCxnSpPr/>
           <p:nvPr/>
         </p:nvCxnSpPr>
@@ -19635,7 +22003,7 @@
       </p:cxnSp>
       <p:sp>
         <p:nvSpPr>
-          <p:cNvPr id="162" name="Google Shape;162;p3"/>
+          <p:cNvPr id="168" name="Google Shape;168;p3"/>
           <p:cNvSpPr txBox="1"/>
           <p:nvPr/>
         </p:nvSpPr>
@@ -19683,7 +22051,7 @@
       </p:sp>
       <p:pic>
         <p:nvPicPr>
-          <p:cNvPr id="163" name="Google Shape;163;p3"/>
+          <p:cNvPr id="169" name="Google Shape;169;p3"/>
           <p:cNvPicPr preferRelativeResize="0"/>
           <p:nvPr/>
         </p:nvPicPr>
@@ -19710,7 +22078,7 @@
       </p:pic>
       <p:sp>
         <p:nvSpPr>
-          <p:cNvPr id="164" name="Google Shape;164;p3"/>
+          <p:cNvPr id="170" name="Google Shape;170;p3"/>
           <p:cNvSpPr txBox="1"/>
           <p:nvPr/>
         </p:nvSpPr>
@@ -19778,7 +22146,7 @@
     </p:bg>
     <p:spTree>
       <p:nvGrpSpPr>
-        <p:cNvPr id="168" name="Shape 168"/>
+        <p:cNvPr id="174" name="Shape 174"/>
         <p:cNvGrpSpPr/>
         <p:nvPr/>
       </p:nvGrpSpPr>
@@ -19792,7 +22160,7 @@
       </p:grpSpPr>
       <p:grpSp>
         <p:nvGrpSpPr>
-          <p:cNvPr id="169" name="Google Shape;169;p4"/>
+          <p:cNvPr id="175" name="Google Shape;175;p4"/>
           <p:cNvGrpSpPr/>
           <p:nvPr/>
         </p:nvGrpSpPr>
@@ -19806,7 +22174,7 @@
         </p:grpSpPr>
         <p:sp>
           <p:nvSpPr>
-            <p:cNvPr id="170" name="Google Shape;170;p4"/>
+            <p:cNvPr id="176" name="Google Shape;176;p4"/>
             <p:cNvSpPr/>
             <p:nvPr/>
           </p:nvSpPr>
@@ -19845,7 +22213,7 @@
         </p:sp>
         <p:sp>
           <p:nvSpPr>
-            <p:cNvPr id="171" name="Google Shape;171;p4"/>
+            <p:cNvPr id="177" name="Google Shape;177;p4"/>
             <p:cNvSpPr txBox="1"/>
             <p:nvPr/>
           </p:nvSpPr>
@@ -19898,7 +22266,7 @@
       </p:grpSp>
       <p:sp>
         <p:nvSpPr>
-          <p:cNvPr id="172" name="Google Shape;172;p4"/>
+          <p:cNvPr id="178" name="Google Shape;178;p4"/>
           <p:cNvSpPr txBox="1"/>
           <p:nvPr/>
         </p:nvSpPr>
@@ -19951,7 +22319,7 @@
       </p:sp>
       <p:sp>
         <p:nvSpPr>
-          <p:cNvPr id="173" name="Google Shape;173;p4"/>
+          <p:cNvPr id="179" name="Google Shape;179;p4"/>
           <p:cNvSpPr txBox="1"/>
           <p:nvPr/>
         </p:nvSpPr>
@@ -20004,7 +22372,7 @@
       </p:sp>
       <p:grpSp>
         <p:nvGrpSpPr>
-          <p:cNvPr id="174" name="Google Shape;174;p4"/>
+          <p:cNvPr id="180" name="Google Shape;180;p4"/>
           <p:cNvGrpSpPr/>
           <p:nvPr/>
         </p:nvGrpSpPr>
@@ -20018,7 +22386,7 @@
         </p:grpSpPr>
         <p:sp>
           <p:nvSpPr>
-            <p:cNvPr id="175" name="Google Shape;175;p4"/>
+            <p:cNvPr id="181" name="Google Shape;181;p4"/>
             <p:cNvSpPr/>
             <p:nvPr/>
           </p:nvSpPr>
@@ -20101,7 +22469,7 @@
         </p:sp>
         <p:sp>
           <p:nvSpPr>
-            <p:cNvPr id="176" name="Google Shape;176;p4"/>
+            <p:cNvPr id="182" name="Google Shape;182;p4"/>
             <p:cNvSpPr txBox="1"/>
             <p:nvPr/>
           </p:nvSpPr>
@@ -20154,7 +22522,7 @@
       </p:grpSp>
       <p:grpSp>
         <p:nvGrpSpPr>
-          <p:cNvPr id="177" name="Google Shape;177;p4"/>
+          <p:cNvPr id="183" name="Google Shape;183;p4"/>
           <p:cNvGrpSpPr/>
           <p:nvPr/>
         </p:nvGrpSpPr>
@@ -20168,7 +22536,7 @@
         </p:grpSpPr>
         <p:sp>
           <p:nvSpPr>
-            <p:cNvPr id="178" name="Google Shape;178;p4"/>
+            <p:cNvPr id="184" name="Google Shape;184;p4"/>
             <p:cNvSpPr/>
             <p:nvPr/>
           </p:nvSpPr>
@@ -20207,7 +22575,7 @@
         </p:sp>
         <p:sp>
           <p:nvSpPr>
-            <p:cNvPr id="179" name="Google Shape;179;p4"/>
+            <p:cNvPr id="185" name="Google Shape;185;p4"/>
             <p:cNvSpPr txBox="1"/>
             <p:nvPr/>
           </p:nvSpPr>
@@ -20260,7 +22628,7 @@
       </p:grpSp>
       <p:sp>
         <p:nvSpPr>
-          <p:cNvPr id="180" name="Google Shape;180;p4"/>
+          <p:cNvPr id="186" name="Google Shape;186;p4"/>
           <p:cNvSpPr txBox="1"/>
           <p:nvPr/>
         </p:nvSpPr>
@@ -20331,7 +22699,7 @@
       </p:sp>
       <p:grpSp>
         <p:nvGrpSpPr>
-          <p:cNvPr id="181" name="Google Shape;181;p4"/>
+          <p:cNvPr id="187" name="Google Shape;187;p4"/>
           <p:cNvGrpSpPr/>
           <p:nvPr/>
         </p:nvGrpSpPr>
@@ -20345,7 +22713,7 @@
         </p:grpSpPr>
         <p:sp>
           <p:nvSpPr>
-            <p:cNvPr id="182" name="Google Shape;182;p4"/>
+            <p:cNvPr id="188" name="Google Shape;188;p4"/>
             <p:cNvSpPr/>
             <p:nvPr/>
           </p:nvSpPr>
@@ -20384,7 +22752,7 @@
         </p:sp>
         <p:sp>
           <p:nvSpPr>
-            <p:cNvPr id="183" name="Google Shape;183;p4"/>
+            <p:cNvPr id="189" name="Google Shape;189;p4"/>
             <p:cNvSpPr txBox="1"/>
             <p:nvPr/>
           </p:nvSpPr>
@@ -20437,7 +22805,7 @@
       </p:grpSp>
       <p:pic>
         <p:nvPicPr>
-          <p:cNvPr id="184" name="Google Shape;184;p4"/>
+          <p:cNvPr id="190" name="Google Shape;190;p4"/>
           <p:cNvPicPr preferRelativeResize="0"/>
           <p:nvPr/>
         </p:nvPicPr>
@@ -20482,7 +22850,7 @@
     </p:bg>
     <p:spTree>
       <p:nvGrpSpPr>
-        <p:cNvPr id="188" name="Shape 188"/>
+        <p:cNvPr id="194" name="Shape 194"/>
         <p:cNvGrpSpPr/>
         <p:nvPr/>
       </p:nvGrpSpPr>
@@ -20496,7 +22864,7 @@
       </p:grpSpPr>
       <p:grpSp>
         <p:nvGrpSpPr>
-          <p:cNvPr id="189" name="Google Shape;189;p5"/>
+          <p:cNvPr id="195" name="Google Shape;195;p5"/>
           <p:cNvGrpSpPr/>
           <p:nvPr/>
         </p:nvGrpSpPr>
@@ -20510,7 +22878,7 @@
         </p:grpSpPr>
         <p:sp>
           <p:nvSpPr>
-            <p:cNvPr id="190" name="Google Shape;190;p5"/>
+            <p:cNvPr id="196" name="Google Shape;196;p5"/>
             <p:cNvSpPr/>
             <p:nvPr/>
           </p:nvSpPr>
@@ -20549,7 +22917,7 @@
         </p:sp>
         <p:sp>
           <p:nvSpPr>
-            <p:cNvPr id="191" name="Google Shape;191;p5"/>
+            <p:cNvPr id="197" name="Google Shape;197;p5"/>
             <p:cNvSpPr txBox="1"/>
             <p:nvPr/>
           </p:nvSpPr>
@@ -20602,7 +22970,7 @@
       </p:grpSp>
       <p:sp>
         <p:nvSpPr>
-          <p:cNvPr id="192" name="Google Shape;192;p5"/>
+          <p:cNvPr id="198" name="Google Shape;198;p5"/>
           <p:cNvSpPr txBox="1"/>
           <p:nvPr/>
         </p:nvSpPr>
@@ -20655,7 +23023,7 @@
       </p:sp>
       <p:sp>
         <p:nvSpPr>
-          <p:cNvPr id="193" name="Google Shape;193;p5"/>
+          <p:cNvPr id="199" name="Google Shape;199;p5"/>
           <p:cNvSpPr txBox="1"/>
           <p:nvPr/>
         </p:nvSpPr>
@@ -20712,7 +23080,7 @@
       </p:sp>
       <p:pic>
         <p:nvPicPr>
-          <p:cNvPr id="194" name="Google Shape;194;p5"/>
+          <p:cNvPr id="200" name="Google Shape;200;p5"/>
           <p:cNvPicPr preferRelativeResize="0"/>
           <p:nvPr/>
         </p:nvPicPr>
@@ -20739,7 +23107,7 @@
       </p:pic>
       <p:sp>
         <p:nvSpPr>
-          <p:cNvPr id="195" name="Google Shape;195;p5"/>
+          <p:cNvPr id="201" name="Google Shape;201;p5"/>
           <p:cNvSpPr txBox="1"/>
           <p:nvPr/>
         </p:nvSpPr>
@@ -20835,7 +23203,7 @@
     </p:bg>
     <p:spTree>
       <p:nvGrpSpPr>
-        <p:cNvPr id="199" name="Shape 199"/>
+        <p:cNvPr id="205" name="Shape 205"/>
         <p:cNvGrpSpPr/>
         <p:nvPr/>
       </p:nvGrpSpPr>
@@ -20849,7 +23217,7 @@
       </p:grpSpPr>
       <p:sp>
         <p:nvSpPr>
-          <p:cNvPr id="200" name="Google Shape;200;p6"/>
+          <p:cNvPr id="206" name="Google Shape;206;p6"/>
           <p:cNvSpPr txBox="1"/>
           <p:nvPr/>
         </p:nvSpPr>
@@ -20902,7 +23270,7 @@
       </p:sp>
       <p:sp>
         <p:nvSpPr>
-          <p:cNvPr id="201" name="Google Shape;201;p6"/>
+          <p:cNvPr id="207" name="Google Shape;207;p6"/>
           <p:cNvSpPr txBox="1"/>
           <p:nvPr/>
         </p:nvSpPr>
@@ -20955,7 +23323,7 @@
       </p:sp>
       <p:pic>
         <p:nvPicPr>
-          <p:cNvPr id="202" name="Google Shape;202;p6"/>
+          <p:cNvPr id="208" name="Google Shape;208;p6"/>
           <p:cNvPicPr preferRelativeResize="0"/>
           <p:nvPr/>
         </p:nvPicPr>
@@ -20982,7 +23350,7 @@
       </p:pic>
       <p:sp>
         <p:nvSpPr>
-          <p:cNvPr id="203" name="Google Shape;203;p6"/>
+          <p:cNvPr id="209" name="Google Shape;209;p6"/>
           <p:cNvSpPr txBox="1"/>
           <p:nvPr/>
         </p:nvSpPr>
@@ -21066,7 +23434,7 @@
     </p:bg>
     <p:spTree>
       <p:nvGrpSpPr>
-        <p:cNvPr id="207" name="Shape 207"/>
+        <p:cNvPr id="213" name="Shape 213"/>
         <p:cNvGrpSpPr/>
         <p:nvPr/>
       </p:nvGrpSpPr>
@@ -21080,7 +23448,7 @@
       </p:grpSpPr>
       <p:grpSp>
         <p:nvGrpSpPr>
-          <p:cNvPr id="208" name="Google Shape;208;p7"/>
+          <p:cNvPr id="214" name="Google Shape;214;p7"/>
           <p:cNvGrpSpPr/>
           <p:nvPr/>
         </p:nvGrpSpPr>
@@ -21094,7 +23462,7 @@
         </p:grpSpPr>
         <p:sp>
           <p:nvSpPr>
-            <p:cNvPr id="209" name="Google Shape;209;p7"/>
+            <p:cNvPr id="215" name="Google Shape;215;p7"/>
             <p:cNvSpPr/>
             <p:nvPr/>
           </p:nvSpPr>
@@ -21133,7 +23501,7 @@
         </p:sp>
         <p:sp>
           <p:nvSpPr>
-            <p:cNvPr id="210" name="Google Shape;210;p7"/>
+            <p:cNvPr id="216" name="Google Shape;216;p7"/>
             <p:cNvSpPr txBox="1"/>
             <p:nvPr/>
           </p:nvSpPr>
@@ -21186,7 +23554,7 @@
       </p:grpSp>
       <p:sp>
         <p:nvSpPr>
-          <p:cNvPr id="211" name="Google Shape;211;p7"/>
+          <p:cNvPr id="217" name="Google Shape;217;p7"/>
           <p:cNvSpPr txBox="1"/>
           <p:nvPr/>
         </p:nvSpPr>
@@ -21239,7 +23607,7 @@
       </p:sp>
       <p:sp>
         <p:nvSpPr>
-          <p:cNvPr id="212" name="Google Shape;212;p7"/>
+          <p:cNvPr id="218" name="Google Shape;218;p7"/>
           <p:cNvSpPr txBox="1"/>
           <p:nvPr/>
         </p:nvSpPr>
@@ -21292,7 +23660,7 @@
       </p:sp>
       <p:grpSp>
         <p:nvGrpSpPr>
-          <p:cNvPr id="213" name="Google Shape;213;p7"/>
+          <p:cNvPr id="219" name="Google Shape;219;p7"/>
           <p:cNvGrpSpPr/>
           <p:nvPr/>
         </p:nvGrpSpPr>
@@ -21306,7 +23674,7 @@
         </p:grpSpPr>
         <p:sp>
           <p:nvSpPr>
-            <p:cNvPr id="214" name="Google Shape;214;p7"/>
+            <p:cNvPr id="220" name="Google Shape;220;p7"/>
             <p:cNvSpPr/>
             <p:nvPr/>
           </p:nvSpPr>
@@ -21345,7 +23713,7 @@
         </p:sp>
         <p:sp>
           <p:nvSpPr>
-            <p:cNvPr id="215" name="Google Shape;215;p7"/>
+            <p:cNvPr id="221" name="Google Shape;221;p7"/>
             <p:cNvSpPr txBox="1"/>
             <p:nvPr/>
           </p:nvSpPr>
@@ -21398,7 +23766,7 @@
       </p:grpSp>
       <p:pic>
         <p:nvPicPr>
-          <p:cNvPr id="216" name="Google Shape;216;p7"/>
+          <p:cNvPr id="222" name="Google Shape;222;p7"/>
           <p:cNvPicPr preferRelativeResize="0"/>
           <p:nvPr/>
         </p:nvPicPr>
@@ -21425,7 +23793,7 @@
       </p:pic>
       <p:grpSp>
         <p:nvGrpSpPr>
-          <p:cNvPr id="217" name="Google Shape;217;p7"/>
+          <p:cNvPr id="223" name="Google Shape;223;p7"/>
           <p:cNvGrpSpPr/>
           <p:nvPr/>
         </p:nvGrpSpPr>
@@ -21439,7 +23807,7 @@
         </p:grpSpPr>
         <p:sp>
           <p:nvSpPr>
-            <p:cNvPr id="218" name="Google Shape;218;p7"/>
+            <p:cNvPr id="224" name="Google Shape;224;p7"/>
             <p:cNvSpPr/>
             <p:nvPr/>
           </p:nvSpPr>
@@ -21522,7 +23890,7 @@
         </p:sp>
         <p:sp>
           <p:nvSpPr>
-            <p:cNvPr id="219" name="Google Shape;219;p7"/>
+            <p:cNvPr id="225" name="Google Shape;225;p7"/>
             <p:cNvSpPr txBox="1"/>
             <p:nvPr/>
           </p:nvSpPr>
@@ -21575,7 +23943,7 @@
       </p:grpSp>
       <p:sp>
         <p:nvSpPr>
-          <p:cNvPr id="220" name="Google Shape;220;p7"/>
+          <p:cNvPr id="226" name="Google Shape;226;p7"/>
           <p:cNvSpPr txBox="1"/>
           <p:nvPr/>
         </p:nvSpPr>
@@ -21624,7 +23992,7 @@
       </p:sp>
       <p:sp>
         <p:nvSpPr>
-          <p:cNvPr id="221" name="Google Shape;221;p7"/>
+          <p:cNvPr id="227" name="Google Shape;227;p7"/>
           <p:cNvSpPr txBox="1"/>
           <p:nvPr/>
         </p:nvSpPr>
@@ -21712,7 +24080,7 @@
       </p:sp>
       <p:sp>
         <p:nvSpPr>
-          <p:cNvPr id="222" name="Google Shape;222;p7"/>
+          <p:cNvPr id="228" name="Google Shape;228;p7"/>
           <p:cNvSpPr txBox="1"/>
           <p:nvPr/>
         </p:nvSpPr>
@@ -21761,7 +24129,7 @@
       </p:sp>
       <p:sp>
         <p:nvSpPr>
-          <p:cNvPr id="223" name="Google Shape;223;p7"/>
+          <p:cNvPr id="229" name="Google Shape;229;p7"/>
           <p:cNvSpPr txBox="1"/>
           <p:nvPr/>
         </p:nvSpPr>
@@ -21814,7 +24182,7 @@
       </p:sp>
       <p:pic>
         <p:nvPicPr>
-          <p:cNvPr id="224" name="Google Shape;224;p7"/>
+          <p:cNvPr id="230" name="Google Shape;230;p7"/>
           <p:cNvPicPr preferRelativeResize="0"/>
           <p:nvPr/>
         </p:nvPicPr>
@@ -21860,7 +24228,7 @@
     </p:bg>
     <p:spTree>
       <p:nvGrpSpPr>
-        <p:cNvPr id="228" name="Shape 228"/>
+        <p:cNvPr id="234" name="Shape 234"/>
         <p:cNvGrpSpPr/>
         <p:nvPr/>
       </p:nvGrpSpPr>
@@ -21874,7 +24242,7 @@
       </p:grpSpPr>
       <p:grpSp>
         <p:nvGrpSpPr>
-          <p:cNvPr id="229" name="Google Shape;229;p8"/>
+          <p:cNvPr id="235" name="Google Shape;235;p8"/>
           <p:cNvGrpSpPr/>
           <p:nvPr/>
         </p:nvGrpSpPr>
@@ -21888,7 +24256,7 @@
         </p:grpSpPr>
         <p:sp>
           <p:nvSpPr>
-            <p:cNvPr id="230" name="Google Shape;230;p8"/>
+            <p:cNvPr id="236" name="Google Shape;236;p8"/>
             <p:cNvSpPr/>
             <p:nvPr/>
           </p:nvSpPr>
@@ -21927,7 +24295,7 @@
         </p:sp>
         <p:sp>
           <p:nvSpPr>
-            <p:cNvPr id="231" name="Google Shape;231;p8"/>
+            <p:cNvPr id="237" name="Google Shape;237;p8"/>
             <p:cNvSpPr txBox="1"/>
             <p:nvPr/>
           </p:nvSpPr>
@@ -21980,7 +24348,7 @@
       </p:grpSp>
       <p:sp>
         <p:nvSpPr>
-          <p:cNvPr id="232" name="Google Shape;232;p8"/>
+          <p:cNvPr id="238" name="Google Shape;238;p8"/>
           <p:cNvSpPr txBox="1"/>
           <p:nvPr/>
         </p:nvSpPr>
@@ -22033,7 +24401,7 @@
       </p:sp>
       <p:sp>
         <p:nvSpPr>
-          <p:cNvPr id="233" name="Google Shape;233;p8"/>
+          <p:cNvPr id="239" name="Google Shape;239;p8"/>
           <p:cNvSpPr txBox="1"/>
           <p:nvPr/>
         </p:nvSpPr>
@@ -22086,7 +24454,7 @@
       </p:sp>
       <p:sp>
         <p:nvSpPr>
-          <p:cNvPr id="234" name="Google Shape;234;p8"/>
+          <p:cNvPr id="240" name="Google Shape;240;p8"/>
           <p:cNvSpPr txBox="1"/>
           <p:nvPr/>
         </p:nvSpPr>
@@ -22139,7 +24507,7 @@
       </p:sp>
       <p:cxnSp>
         <p:nvCxnSpPr>
-          <p:cNvPr id="235" name="Google Shape;235;p8"/>
+          <p:cNvPr id="241" name="Google Shape;241;p8"/>
           <p:cNvCxnSpPr/>
           <p:nvPr/>
         </p:nvCxnSpPr>
@@ -22165,7 +24533,7 @@
       </p:cxnSp>
       <p:grpSp>
         <p:nvGrpSpPr>
-          <p:cNvPr id="236" name="Google Shape;236;p8"/>
+          <p:cNvPr id="242" name="Google Shape;242;p8"/>
           <p:cNvGrpSpPr/>
           <p:nvPr/>
         </p:nvGrpSpPr>
@@ -22179,7 +24547,7 @@
         </p:grpSpPr>
         <p:sp>
           <p:nvSpPr>
-            <p:cNvPr id="237" name="Google Shape;237;p8"/>
+            <p:cNvPr id="243" name="Google Shape;243;p8"/>
             <p:cNvSpPr/>
             <p:nvPr/>
           </p:nvSpPr>
@@ -22218,7 +24586,7 @@
         </p:sp>
         <p:sp>
           <p:nvSpPr>
-            <p:cNvPr id="238" name="Google Shape;238;p8"/>
+            <p:cNvPr id="244" name="Google Shape;244;p8"/>
             <p:cNvSpPr txBox="1"/>
             <p:nvPr/>
           </p:nvSpPr>
@@ -22271,7 +24639,7 @@
       </p:grpSp>
       <p:pic>
         <p:nvPicPr>
-          <p:cNvPr id="239" name="Google Shape;239;p8"/>
+          <p:cNvPr id="245" name="Google Shape;245;p8"/>
           <p:cNvPicPr preferRelativeResize="0"/>
           <p:nvPr/>
         </p:nvPicPr>
@@ -22286,174 +24654,6 @@
           <a:xfrm>
             <a:off x="16001984" y="-868967"/>
             <a:ext cx="2286006" cy="2286006"/>
-          </a:xfrm>
-          <a:prstGeom prst="rect">
-            <a:avLst/>
-          </a:prstGeom>
-          <a:noFill/>
-          <a:ln>
-            <a:noFill/>
-          </a:ln>
-        </p:spPr>
-      </p:pic>
-      <p:pic>
-        <p:nvPicPr>
-          <p:cNvPr id="240" name="Google Shape;240;p8"/>
-          <p:cNvPicPr preferRelativeResize="0"/>
-          <p:nvPr/>
-        </p:nvPicPr>
-        <p:blipFill>
-          <a:blip r:embed="rId4">
-            <a:alphaModFix/>
-          </a:blip>
-          <a:stretch>
-            <a:fillRect/>
-          </a:stretch>
-        </p:blipFill>
-        <p:spPr>
-          <a:xfrm>
-            <a:off x="4342932" y="2352104"/>
-            <a:ext cx="2633396" cy="2633396"/>
-          </a:xfrm>
-          <a:prstGeom prst="rect">
-            <a:avLst/>
-          </a:prstGeom>
-          <a:noFill/>
-          <a:ln>
-            <a:noFill/>
-          </a:ln>
-        </p:spPr>
-      </p:pic>
-      <p:pic>
-        <p:nvPicPr>
-          <p:cNvPr id="241" name="Google Shape;241;p8"/>
-          <p:cNvPicPr preferRelativeResize="0"/>
-          <p:nvPr/>
-        </p:nvPicPr>
-        <p:blipFill>
-          <a:blip r:embed="rId5">
-            <a:alphaModFix/>
-          </a:blip>
-          <a:stretch>
-            <a:fillRect/>
-          </a:stretch>
-        </p:blipFill>
-        <p:spPr>
-          <a:xfrm>
-            <a:off x="11954154" y="2540857"/>
-            <a:ext cx="2255888" cy="2255888"/>
-          </a:xfrm>
-          <a:prstGeom prst="rect">
-            <a:avLst/>
-          </a:prstGeom>
-          <a:noFill/>
-          <a:ln>
-            <a:noFill/>
-          </a:ln>
-        </p:spPr>
-      </p:pic>
-      <p:pic>
-        <p:nvPicPr>
-          <p:cNvPr id="242" name="Google Shape;242;p8"/>
-          <p:cNvPicPr preferRelativeResize="0"/>
-          <p:nvPr/>
-        </p:nvPicPr>
-        <p:blipFill>
-          <a:blip r:embed="rId6">
-            <a:alphaModFix/>
-          </a:blip>
-          <a:stretch>
-            <a:fillRect/>
-          </a:stretch>
-        </p:blipFill>
-        <p:spPr>
-          <a:xfrm>
-            <a:off x="6976332" y="2513289"/>
-            <a:ext cx="2244161" cy="2244161"/>
-          </a:xfrm>
-          <a:prstGeom prst="rect">
-            <a:avLst/>
-          </a:prstGeom>
-          <a:noFill/>
-          <a:ln>
-            <a:noFill/>
-          </a:ln>
-        </p:spPr>
-      </p:pic>
-      <p:pic>
-        <p:nvPicPr>
-          <p:cNvPr id="243" name="Google Shape;243;p8"/>
-          <p:cNvPicPr preferRelativeResize="0"/>
-          <p:nvPr/>
-        </p:nvPicPr>
-        <p:blipFill>
-          <a:blip r:embed="rId7">
-            <a:alphaModFix/>
-          </a:blip>
-          <a:stretch>
-            <a:fillRect/>
-          </a:stretch>
-        </p:blipFill>
-        <p:spPr>
-          <a:xfrm>
-            <a:off x="4083710" y="5619063"/>
-            <a:ext cx="2962050" cy="1946332"/>
-          </a:xfrm>
-          <a:prstGeom prst="rect">
-            <a:avLst/>
-          </a:prstGeom>
-          <a:noFill/>
-          <a:ln>
-            <a:noFill/>
-          </a:ln>
-        </p:spPr>
-      </p:pic>
-      <p:pic>
-        <p:nvPicPr>
-          <p:cNvPr id="244" name="Google Shape;244;p8"/>
-          <p:cNvPicPr preferRelativeResize="0"/>
-          <p:nvPr/>
-        </p:nvPicPr>
-        <p:blipFill>
-          <a:blip r:embed="rId8">
-            <a:alphaModFix/>
-          </a:blip>
-          <a:stretch>
-            <a:fillRect/>
-          </a:stretch>
-        </p:blipFill>
-        <p:spPr>
-          <a:xfrm>
-            <a:off x="9555837" y="2535325"/>
-            <a:ext cx="2200090" cy="2200090"/>
-          </a:xfrm>
-          <a:prstGeom prst="rect">
-            <a:avLst/>
-          </a:prstGeom>
-          <a:noFill/>
-          <a:ln>
-            <a:noFill/>
-          </a:ln>
-        </p:spPr>
-      </p:pic>
-      <p:pic>
-        <p:nvPicPr>
-          <p:cNvPr id="245" name="Google Shape;245;p8"/>
-          <p:cNvPicPr preferRelativeResize="0"/>
-          <p:nvPr/>
-        </p:nvPicPr>
-        <p:blipFill>
-          <a:blip r:embed="rId9">
-            <a:alphaModFix/>
-          </a:blip>
-          <a:stretch>
-            <a:fillRect/>
-          </a:stretch>
-        </p:blipFill>
-        <p:spPr>
-          <a:xfrm>
-            <a:off x="6498252" y="5273840"/>
-            <a:ext cx="2703625" cy="2703625"/>
           </a:xfrm>
           <a:prstGeom prst="rect">
             <a:avLst/>
@@ -22471,7 +24671,7 @@
           <p:nvPr/>
         </p:nvPicPr>
         <p:blipFill>
-          <a:blip r:embed="rId10">
+          <a:blip r:embed="rId4">
             <a:alphaModFix/>
           </a:blip>
           <a:stretch>
@@ -22480,8 +24680,8 @@
         </p:blipFill>
         <p:spPr>
           <a:xfrm>
-            <a:off x="9252853" y="5619067"/>
-            <a:ext cx="2480325" cy="2480325"/>
+            <a:off x="4342932" y="2352104"/>
+            <a:ext cx="2633396" cy="2633396"/>
           </a:xfrm>
           <a:prstGeom prst="rect">
             <a:avLst/>
@@ -22495,6 +24695,174 @@
       <p:pic>
         <p:nvPicPr>
           <p:cNvPr id="247" name="Google Shape;247;p8"/>
+          <p:cNvPicPr preferRelativeResize="0"/>
+          <p:nvPr/>
+        </p:nvPicPr>
+        <p:blipFill>
+          <a:blip r:embed="rId5">
+            <a:alphaModFix/>
+          </a:blip>
+          <a:stretch>
+            <a:fillRect/>
+          </a:stretch>
+        </p:blipFill>
+        <p:spPr>
+          <a:xfrm>
+            <a:off x="11954154" y="2540857"/>
+            <a:ext cx="2255888" cy="2255888"/>
+          </a:xfrm>
+          <a:prstGeom prst="rect">
+            <a:avLst/>
+          </a:prstGeom>
+          <a:noFill/>
+          <a:ln>
+            <a:noFill/>
+          </a:ln>
+        </p:spPr>
+      </p:pic>
+      <p:pic>
+        <p:nvPicPr>
+          <p:cNvPr id="248" name="Google Shape;248;p8"/>
+          <p:cNvPicPr preferRelativeResize="0"/>
+          <p:nvPr/>
+        </p:nvPicPr>
+        <p:blipFill>
+          <a:blip r:embed="rId6">
+            <a:alphaModFix/>
+          </a:blip>
+          <a:stretch>
+            <a:fillRect/>
+          </a:stretch>
+        </p:blipFill>
+        <p:spPr>
+          <a:xfrm>
+            <a:off x="6976332" y="2513289"/>
+            <a:ext cx="2244161" cy="2244161"/>
+          </a:xfrm>
+          <a:prstGeom prst="rect">
+            <a:avLst/>
+          </a:prstGeom>
+          <a:noFill/>
+          <a:ln>
+            <a:noFill/>
+          </a:ln>
+        </p:spPr>
+      </p:pic>
+      <p:pic>
+        <p:nvPicPr>
+          <p:cNvPr id="249" name="Google Shape;249;p8"/>
+          <p:cNvPicPr preferRelativeResize="0"/>
+          <p:nvPr/>
+        </p:nvPicPr>
+        <p:blipFill>
+          <a:blip r:embed="rId7">
+            <a:alphaModFix/>
+          </a:blip>
+          <a:stretch>
+            <a:fillRect/>
+          </a:stretch>
+        </p:blipFill>
+        <p:spPr>
+          <a:xfrm>
+            <a:off x="4083710" y="5619063"/>
+            <a:ext cx="2962050" cy="1946332"/>
+          </a:xfrm>
+          <a:prstGeom prst="rect">
+            <a:avLst/>
+          </a:prstGeom>
+          <a:noFill/>
+          <a:ln>
+            <a:noFill/>
+          </a:ln>
+        </p:spPr>
+      </p:pic>
+      <p:pic>
+        <p:nvPicPr>
+          <p:cNvPr id="250" name="Google Shape;250;p8"/>
+          <p:cNvPicPr preferRelativeResize="0"/>
+          <p:nvPr/>
+        </p:nvPicPr>
+        <p:blipFill>
+          <a:blip r:embed="rId8">
+            <a:alphaModFix/>
+          </a:blip>
+          <a:stretch>
+            <a:fillRect/>
+          </a:stretch>
+        </p:blipFill>
+        <p:spPr>
+          <a:xfrm>
+            <a:off x="9555837" y="2535325"/>
+            <a:ext cx="2200090" cy="2200090"/>
+          </a:xfrm>
+          <a:prstGeom prst="rect">
+            <a:avLst/>
+          </a:prstGeom>
+          <a:noFill/>
+          <a:ln>
+            <a:noFill/>
+          </a:ln>
+        </p:spPr>
+      </p:pic>
+      <p:pic>
+        <p:nvPicPr>
+          <p:cNvPr id="251" name="Google Shape;251;p8"/>
+          <p:cNvPicPr preferRelativeResize="0"/>
+          <p:nvPr/>
+        </p:nvPicPr>
+        <p:blipFill>
+          <a:blip r:embed="rId9">
+            <a:alphaModFix/>
+          </a:blip>
+          <a:stretch>
+            <a:fillRect/>
+          </a:stretch>
+        </p:blipFill>
+        <p:spPr>
+          <a:xfrm>
+            <a:off x="6498252" y="5273840"/>
+            <a:ext cx="2703625" cy="2703625"/>
+          </a:xfrm>
+          <a:prstGeom prst="rect">
+            <a:avLst/>
+          </a:prstGeom>
+          <a:noFill/>
+          <a:ln>
+            <a:noFill/>
+          </a:ln>
+        </p:spPr>
+      </p:pic>
+      <p:pic>
+        <p:nvPicPr>
+          <p:cNvPr id="252" name="Google Shape;252;p8"/>
+          <p:cNvPicPr preferRelativeResize="0"/>
+          <p:nvPr/>
+        </p:nvPicPr>
+        <p:blipFill>
+          <a:blip r:embed="rId10">
+            <a:alphaModFix/>
+          </a:blip>
+          <a:stretch>
+            <a:fillRect/>
+          </a:stretch>
+        </p:blipFill>
+        <p:spPr>
+          <a:xfrm>
+            <a:off x="9252853" y="5619067"/>
+            <a:ext cx="2480325" cy="2480325"/>
+          </a:xfrm>
+          <a:prstGeom prst="rect">
+            <a:avLst/>
+          </a:prstGeom>
+          <a:noFill/>
+          <a:ln>
+            <a:noFill/>
+          </a:ln>
+        </p:spPr>
+      </p:pic>
+      <p:pic>
+        <p:nvPicPr>
+          <p:cNvPr id="253" name="Google Shape;253;p8"/>
           <p:cNvPicPr preferRelativeResize="0"/>
           <p:nvPr/>
         </p:nvPicPr>
@@ -22540,7 +24908,7 @@
     </p:bg>
     <p:spTree>
       <p:nvGrpSpPr>
-        <p:cNvPr id="251" name="Shape 251"/>
+        <p:cNvPr id="257" name="Shape 257"/>
         <p:cNvGrpSpPr/>
         <p:nvPr/>
       </p:nvGrpSpPr>
@@ -22554,7 +24922,7 @@
       </p:grpSpPr>
       <p:grpSp>
         <p:nvGrpSpPr>
-          <p:cNvPr id="252" name="Google Shape;252;p9"/>
+          <p:cNvPr id="258" name="Google Shape;258;p9"/>
           <p:cNvGrpSpPr/>
           <p:nvPr/>
         </p:nvGrpSpPr>
@@ -22568,7 +24936,7 @@
         </p:grpSpPr>
         <p:sp>
           <p:nvSpPr>
-            <p:cNvPr id="253" name="Google Shape;253;p9"/>
+            <p:cNvPr id="259" name="Google Shape;259;p9"/>
             <p:cNvSpPr/>
             <p:nvPr/>
           </p:nvSpPr>
@@ -22615,7 +24983,7 @@
         </p:sp>
         <p:sp>
           <p:nvSpPr>
-            <p:cNvPr id="254" name="Google Shape;254;p9"/>
+            <p:cNvPr id="260" name="Google Shape;260;p9"/>
             <p:cNvSpPr txBox="1"/>
             <p:nvPr/>
           </p:nvSpPr>
@@ -22668,7 +25036,7 @@
       </p:grpSp>
       <p:sp>
         <p:nvSpPr>
-          <p:cNvPr id="255" name="Google Shape;255;p9"/>
+          <p:cNvPr id="261" name="Google Shape;261;p9"/>
           <p:cNvSpPr txBox="1"/>
           <p:nvPr/>
         </p:nvSpPr>
@@ -22721,7 +25089,7 @@
       </p:sp>
       <p:sp>
         <p:nvSpPr>
-          <p:cNvPr id="256" name="Google Shape;256;p9"/>
+          <p:cNvPr id="262" name="Google Shape;262;p9"/>
           <p:cNvSpPr txBox="1"/>
           <p:nvPr/>
         </p:nvSpPr>
@@ -22774,7 +25142,7 @@
       </p:sp>
       <p:grpSp>
         <p:nvGrpSpPr>
-          <p:cNvPr id="257" name="Google Shape;257;p9"/>
+          <p:cNvPr id="263" name="Google Shape;263;p9"/>
           <p:cNvGrpSpPr/>
           <p:nvPr/>
         </p:nvGrpSpPr>
@@ -22788,7 +25156,7 @@
         </p:grpSpPr>
         <p:sp>
           <p:nvSpPr>
-            <p:cNvPr id="258" name="Google Shape;258;p9"/>
+            <p:cNvPr id="264" name="Google Shape;264;p9"/>
             <p:cNvSpPr/>
             <p:nvPr/>
           </p:nvSpPr>
@@ -22827,7 +25195,7 @@
         </p:sp>
         <p:sp>
           <p:nvSpPr>
-            <p:cNvPr id="259" name="Google Shape;259;p9"/>
+            <p:cNvPr id="265" name="Google Shape;265;p9"/>
             <p:cNvSpPr txBox="1"/>
             <p:nvPr/>
           </p:nvSpPr>
@@ -22880,7 +25248,7 @@
       </p:grpSp>
       <p:grpSp>
         <p:nvGrpSpPr>
-          <p:cNvPr id="260" name="Google Shape;260;p9"/>
+          <p:cNvPr id="266" name="Google Shape;266;p9"/>
           <p:cNvGrpSpPr/>
           <p:nvPr/>
         </p:nvGrpSpPr>
@@ -22894,7 +25262,7 @@
         </p:grpSpPr>
         <p:sp>
           <p:nvSpPr>
-            <p:cNvPr id="261" name="Google Shape;261;p9"/>
+            <p:cNvPr id="267" name="Google Shape;267;p9"/>
             <p:cNvSpPr/>
             <p:nvPr/>
           </p:nvSpPr>
@@ -22977,7 +25345,7 @@
         </p:sp>
         <p:sp>
           <p:nvSpPr>
-            <p:cNvPr id="262" name="Google Shape;262;p9"/>
+            <p:cNvPr id="268" name="Google Shape;268;p9"/>
             <p:cNvSpPr txBox="1"/>
             <p:nvPr/>
           </p:nvSpPr>
@@ -23030,7 +25398,7 @@
       </p:grpSp>
       <p:grpSp>
         <p:nvGrpSpPr>
-          <p:cNvPr id="263" name="Google Shape;263;p9"/>
+          <p:cNvPr id="269" name="Google Shape;269;p9"/>
           <p:cNvGrpSpPr/>
           <p:nvPr/>
         </p:nvGrpSpPr>
@@ -23044,7 +25412,7 @@
         </p:grpSpPr>
         <p:sp>
           <p:nvSpPr>
-            <p:cNvPr id="264" name="Google Shape;264;p9"/>
+            <p:cNvPr id="270" name="Google Shape;270;p9"/>
             <p:cNvSpPr/>
             <p:nvPr/>
           </p:nvSpPr>
@@ -23083,7 +25451,7 @@
         </p:sp>
         <p:sp>
           <p:nvSpPr>
-            <p:cNvPr id="265" name="Google Shape;265;p9"/>
+            <p:cNvPr id="271" name="Google Shape;271;p9"/>
             <p:cNvSpPr txBox="1"/>
             <p:nvPr/>
           </p:nvSpPr>
@@ -23136,7 +25504,7 @@
       </p:grpSp>
       <p:sp>
         <p:nvSpPr>
-          <p:cNvPr id="266" name="Google Shape;266;p9"/>
+          <p:cNvPr id="272" name="Google Shape;272;p9"/>
           <p:cNvSpPr txBox="1"/>
           <p:nvPr/>
         </p:nvSpPr>
@@ -23229,7 +25597,7 @@
       </p:sp>
       <p:sp>
         <p:nvSpPr>
-          <p:cNvPr id="267" name="Google Shape;267;p9"/>
+          <p:cNvPr id="273" name="Google Shape;273;p9"/>
           <p:cNvSpPr txBox="1"/>
           <p:nvPr/>
         </p:nvSpPr>
@@ -23282,7 +25650,7 @@
       </p:sp>
       <p:pic>
         <p:nvPicPr>
-          <p:cNvPr id="268" name="Google Shape;268;p9"/>
+          <p:cNvPr id="274" name="Google Shape;274;p9"/>
           <p:cNvPicPr preferRelativeResize="0"/>
           <p:nvPr/>
         </p:nvPicPr>
@@ -23309,7 +25677,7 @@
       </p:pic>
       <p:pic>
         <p:nvPicPr>
-          <p:cNvPr id="269" name="Google Shape;269;p9"/>
+          <p:cNvPr id="275" name="Google Shape;275;p9"/>
           <p:cNvPicPr preferRelativeResize="0"/>
           <p:nvPr/>
         </p:nvPicPr>
@@ -23344,6 +25712,285 @@
 </file>
 
 <file path=ppt/theme/theme1.xml><?xml version="1.0" encoding="utf-8"?>
+<a:theme xmlns:a="http://schemas.openxmlformats.org/drawingml/2006/main" xmlns:r="http://schemas.openxmlformats.org/officeDocument/2006/relationships" name="Office Theme">
+  <a:themeElements>
+    <a:clrScheme name="Office">
+      <a:dk1>
+        <a:srgbClr val="000000"/>
+      </a:dk1>
+      <a:lt1>
+        <a:srgbClr val="FFFFFF"/>
+      </a:lt1>
+      <a:dk2>
+        <a:srgbClr val="1F497D"/>
+      </a:dk2>
+      <a:lt2>
+        <a:srgbClr val="EEECE1"/>
+      </a:lt2>
+      <a:accent1>
+        <a:srgbClr val="4F81BD"/>
+      </a:accent1>
+      <a:accent2>
+        <a:srgbClr val="C0504D"/>
+      </a:accent2>
+      <a:accent3>
+        <a:srgbClr val="9BBB59"/>
+      </a:accent3>
+      <a:accent4>
+        <a:srgbClr val="8064A2"/>
+      </a:accent4>
+      <a:accent5>
+        <a:srgbClr val="4BACC6"/>
+      </a:accent5>
+      <a:accent6>
+        <a:srgbClr val="F79646"/>
+      </a:accent6>
+      <a:hlink>
+        <a:srgbClr val="0000FF"/>
+      </a:hlink>
+      <a:folHlink>
+        <a:srgbClr val="800080"/>
+      </a:folHlink>
+    </a:clrScheme>
+    <a:fontScheme name="Office">
+      <a:majorFont>
+        <a:latin typeface="Arial"/>
+        <a:ea typeface=""/>
+        <a:cs typeface=""/>
+        <a:font script="Jpan" typeface="ＭＳ Ｐゴシック"/>
+        <a:font script="Hang" typeface="맑은 고딕"/>
+        <a:font script="Hans" typeface="宋体"/>
+        <a:font script="Hant" typeface="新細明體"/>
+        <a:font script="Arab" typeface="Times New Roman"/>
+        <a:font script="Hebr" typeface="Times New Roman"/>
+        <a:font script="Thai" typeface="Angsana New"/>
+        <a:font script="Ethi" typeface="Nyala"/>
+        <a:font script="Beng" typeface="Vrinda"/>
+        <a:font script="Gujr" typeface="Shruti"/>
+        <a:font script="Khmr" typeface="MoolBoran"/>
+        <a:font script="Knda" typeface="Tunga"/>
+        <a:font script="Guru" typeface="Raavi"/>
+        <a:font script="Cans" typeface="Euphemia"/>
+        <a:font script="Cher" typeface="Plantagenet Cherokee"/>
+        <a:font script="Yiii" typeface="Microsoft Yi Baiti"/>
+        <a:font script="Tibt" typeface="Microsoft Himalaya"/>
+        <a:font script="Thaa" typeface="MV Boli"/>
+        <a:font script="Deva" typeface="Mangal"/>
+        <a:font script="Telu" typeface="Gautami"/>
+        <a:font script="Taml" typeface="Latha"/>
+        <a:font script="Syrc" typeface="Estrangelo Edessa"/>
+        <a:font script="Orya" typeface="Kalinga"/>
+        <a:font script="Mlym" typeface="Kartika"/>
+        <a:font script="Laoo" typeface="DokChampa"/>
+        <a:font script="Sinh" typeface="Iskoola Pota"/>
+        <a:font script="Mong" typeface="Mongolian Baiti"/>
+        <a:font script="Viet" typeface="Times New Roman"/>
+        <a:font script="Uigh" typeface="Microsoft Uighur"/>
+        <a:font script="Geor" typeface="Sylfaen"/>
+      </a:majorFont>
+      <a:minorFont>
+        <a:latin typeface="Arial"/>
+        <a:ea typeface=""/>
+        <a:cs typeface=""/>
+        <a:font script="Jpan" typeface="ＭＳ Ｐゴシック"/>
+        <a:font script="Hang" typeface="맑은 고딕"/>
+        <a:font script="Hans" typeface="宋体"/>
+        <a:font script="Hant" typeface="新細明體"/>
+        <a:font script="Arab" typeface="Arial"/>
+        <a:font script="Hebr" typeface="Arial"/>
+        <a:font script="Thai" typeface="Cordia New"/>
+        <a:font script="Ethi" typeface="Nyala"/>
+        <a:font script="Beng" typeface="Vrinda"/>
+        <a:font script="Gujr" typeface="Shruti"/>
+        <a:font script="Khmr" typeface="DaunPenh"/>
+        <a:font script="Knda" typeface="Tunga"/>
+        <a:font script="Guru" typeface="Raavi"/>
+        <a:font script="Cans" typeface="Euphemia"/>
+        <a:font script="Cher" typeface="Plantagenet Cherokee"/>
+        <a:font script="Yiii" typeface="Microsoft Yi Baiti"/>
+        <a:font script="Tibt" typeface="Microsoft Himalaya"/>
+        <a:font script="Thaa" typeface="MV Boli"/>
+        <a:font script="Deva" typeface="Mangal"/>
+        <a:font script="Telu" typeface="Gautami"/>
+        <a:font script="Taml" typeface="Latha"/>
+        <a:font script="Syrc" typeface="Estrangelo Edessa"/>
+        <a:font script="Orya" typeface="Kalinga"/>
+        <a:font script="Mlym" typeface="Kartika"/>
+        <a:font script="Laoo" typeface="DokChampa"/>
+        <a:font script="Sinh" typeface="Iskoola Pota"/>
+        <a:font script="Mong" typeface="Mongolian Baiti"/>
+        <a:font script="Viet" typeface="Arial"/>
+        <a:font script="Uigh" typeface="Microsoft Uighur"/>
+        <a:font script="Geor" typeface="Sylfaen"/>
+      </a:minorFont>
+    </a:fontScheme>
+    <a:fmtScheme name="Office">
+      <a:fillStyleLst>
+        <a:solidFill>
+          <a:schemeClr val="phClr"/>
+        </a:solidFill>
+        <a:gradFill rotWithShape="1">
+          <a:gsLst>
+            <a:gs pos="0">
+              <a:schemeClr val="phClr">
+                <a:tint val="50000"/>
+                <a:satMod val="300000"/>
+              </a:schemeClr>
+            </a:gs>
+            <a:gs pos="35000">
+              <a:schemeClr val="phClr">
+                <a:tint val="37000"/>
+                <a:satMod val="300000"/>
+              </a:schemeClr>
+            </a:gs>
+            <a:gs pos="100000">
+              <a:schemeClr val="phClr">
+                <a:tint val="15000"/>
+                <a:satMod val="350000"/>
+              </a:schemeClr>
+            </a:gs>
+          </a:gsLst>
+          <a:lin ang="16200000" scaled="1"/>
+        </a:gradFill>
+        <a:gradFill rotWithShape="1">
+          <a:gsLst>
+            <a:gs pos="0">
+              <a:schemeClr val="phClr">
+                <a:tint val="100000"/>
+                <a:shade val="100000"/>
+                <a:satMod val="130000"/>
+              </a:schemeClr>
+            </a:gs>
+            <a:gs pos="100000">
+              <a:schemeClr val="phClr">
+                <a:tint val="50000"/>
+                <a:shade val="100000"/>
+                <a:satMod val="350000"/>
+              </a:schemeClr>
+            </a:gs>
+          </a:gsLst>
+          <a:lin ang="16200000" scaled="0"/>
+        </a:gradFill>
+      </a:fillStyleLst>
+      <a:lnStyleLst>
+        <a:ln w="9525" cap="flat" cmpd="sng" algn="ctr">
+          <a:solidFill>
+            <a:schemeClr val="phClr">
+              <a:shade val="95000"/>
+              <a:satMod val="105000"/>
+            </a:schemeClr>
+          </a:solidFill>
+          <a:prstDash val="solid"/>
+        </a:ln>
+        <a:ln w="25400" cap="flat" cmpd="sng" algn="ctr">
+          <a:solidFill>
+            <a:schemeClr val="phClr"/>
+          </a:solidFill>
+          <a:prstDash val="solid"/>
+        </a:ln>
+        <a:ln w="38100" cap="flat" cmpd="sng" algn="ctr">
+          <a:solidFill>
+            <a:schemeClr val="phClr"/>
+          </a:solidFill>
+          <a:prstDash val="solid"/>
+        </a:ln>
+      </a:lnStyleLst>
+      <a:effectStyleLst>
+        <a:effectStyle>
+          <a:effectLst>
+            <a:outerShdw blurRad="40000" dist="20000" dir="5400000" rotWithShape="0">
+              <a:srgbClr val="000000">
+                <a:alpha val="38000"/>
+              </a:srgbClr>
+            </a:outerShdw>
+          </a:effectLst>
+        </a:effectStyle>
+        <a:effectStyle>
+          <a:effectLst>
+            <a:outerShdw blurRad="40000" dist="23000" dir="5400000" rotWithShape="0">
+              <a:srgbClr val="000000">
+                <a:alpha val="35000"/>
+              </a:srgbClr>
+            </a:outerShdw>
+          </a:effectLst>
+        </a:effectStyle>
+        <a:effectStyle>
+          <a:effectLst>
+            <a:outerShdw blurRad="40000" dist="23000" dir="5400000" rotWithShape="0">
+              <a:srgbClr val="000000">
+                <a:alpha val="35000"/>
+              </a:srgbClr>
+            </a:outerShdw>
+          </a:effectLst>
+          <a:scene3d>
+            <a:camera prst="orthographicFront">
+              <a:rot lat="0" lon="0" rev="0"/>
+            </a:camera>
+            <a:lightRig rig="threePt" dir="t">
+              <a:rot lat="0" lon="0" rev="1200000"/>
+            </a:lightRig>
+          </a:scene3d>
+          <a:sp3d>
+            <a:bevelT w="63500" h="25400"/>
+          </a:sp3d>
+        </a:effectStyle>
+      </a:effectStyleLst>
+      <a:bgFillStyleLst>
+        <a:solidFill>
+          <a:schemeClr val="phClr"/>
+        </a:solidFill>
+        <a:gradFill rotWithShape="1">
+          <a:gsLst>
+            <a:gs pos="0">
+              <a:schemeClr val="phClr">
+                <a:tint val="40000"/>
+                <a:satMod val="350000"/>
+              </a:schemeClr>
+            </a:gs>
+            <a:gs pos="40000">
+              <a:schemeClr val="phClr">
+                <a:tint val="45000"/>
+                <a:shade val="99000"/>
+                <a:satMod val="350000"/>
+              </a:schemeClr>
+            </a:gs>
+            <a:gs pos="100000">
+              <a:schemeClr val="phClr">
+                <a:shade val="20000"/>
+                <a:satMod val="255000"/>
+              </a:schemeClr>
+            </a:gs>
+          </a:gsLst>
+          <a:path path="circle">
+            <a:fillToRect l="50000" t="-80000" r="50000" b="180000"/>
+          </a:path>
+        </a:gradFill>
+        <a:gradFill rotWithShape="1">
+          <a:gsLst>
+            <a:gs pos="0">
+              <a:schemeClr val="phClr">
+                <a:tint val="80000"/>
+                <a:satMod val="300000"/>
+              </a:schemeClr>
+            </a:gs>
+            <a:gs pos="100000">
+              <a:schemeClr val="phClr">
+                <a:shade val="30000"/>
+                <a:satMod val="200000"/>
+              </a:schemeClr>
+            </a:gs>
+          </a:gsLst>
+          <a:path path="circle">
+            <a:fillToRect l="50000" t="50000" r="50000" b="50000"/>
+          </a:path>
+        </a:gradFill>
+      </a:bgFillStyleLst>
+    </a:fmtScheme>
+  </a:themeElements>
+</a:theme>
+</file>
+
+<file path=ppt/theme/theme2.xml><?xml version="1.0" encoding="utf-8"?>
 <a:theme xmlns:a="http://schemas.openxmlformats.org/drawingml/2006/main" xmlns:r="http://schemas.openxmlformats.org/officeDocument/2006/relationships">
   <a:themeElements>
     <a:clrScheme name="Default">
@@ -23620,283 +26267,4 @@
     </a:fmtScheme>
   </a:themeElements>
 </a:theme>
-</file>
-
-<file path=ppt/theme/theme2.xml><?xml version="1.0" encoding="utf-8"?>
-<a:theme xmlns:a="http://schemas.openxmlformats.org/drawingml/2006/main" xmlns:r="http://schemas.openxmlformats.org/officeDocument/2006/relationships" name="Office Theme">
-  <a:themeElements>
-    <a:clrScheme name="Office">
-      <a:dk1>
-        <a:srgbClr val="000000"/>
-      </a:dk1>
-      <a:lt1>
-        <a:srgbClr val="FFFFFF"/>
-      </a:lt1>
-      <a:dk2>
-        <a:srgbClr val="1F497D"/>
-      </a:dk2>
-      <a:lt2>
-        <a:srgbClr val="EEECE1"/>
-      </a:lt2>
-      <a:accent1>
-        <a:srgbClr val="4F81BD"/>
-      </a:accent1>
-      <a:accent2>
-        <a:srgbClr val="C0504D"/>
-      </a:accent2>
-      <a:accent3>
-        <a:srgbClr val="9BBB59"/>
-      </a:accent3>
-      <a:accent4>
-        <a:srgbClr val="8064A2"/>
-      </a:accent4>
-      <a:accent5>
-        <a:srgbClr val="4BACC6"/>
-      </a:accent5>
-      <a:accent6>
-        <a:srgbClr val="F79646"/>
-      </a:accent6>
-      <a:hlink>
-        <a:srgbClr val="0000FF"/>
-      </a:hlink>
-      <a:folHlink>
-        <a:srgbClr val="800080"/>
-      </a:folHlink>
-    </a:clrScheme>
-    <a:fontScheme name="Office">
-      <a:majorFont>
-        <a:latin typeface="Arial"/>
-        <a:ea typeface=""/>
-        <a:cs typeface=""/>
-        <a:font script="Jpan" typeface="ＭＳ Ｐゴシック"/>
-        <a:font script="Hang" typeface="맑은 고딕"/>
-        <a:font script="Hans" typeface="宋体"/>
-        <a:font script="Hant" typeface="新細明體"/>
-        <a:font script="Arab" typeface="Times New Roman"/>
-        <a:font script="Hebr" typeface="Times New Roman"/>
-        <a:font script="Thai" typeface="Angsana New"/>
-        <a:font script="Ethi" typeface="Nyala"/>
-        <a:font script="Beng" typeface="Vrinda"/>
-        <a:font script="Gujr" typeface="Shruti"/>
-        <a:font script="Khmr" typeface="MoolBoran"/>
-        <a:font script="Knda" typeface="Tunga"/>
-        <a:font script="Guru" typeface="Raavi"/>
-        <a:font script="Cans" typeface="Euphemia"/>
-        <a:font script="Cher" typeface="Plantagenet Cherokee"/>
-        <a:font script="Yiii" typeface="Microsoft Yi Baiti"/>
-        <a:font script="Tibt" typeface="Microsoft Himalaya"/>
-        <a:font script="Thaa" typeface="MV Boli"/>
-        <a:font script="Deva" typeface="Mangal"/>
-        <a:font script="Telu" typeface="Gautami"/>
-        <a:font script="Taml" typeface="Latha"/>
-        <a:font script="Syrc" typeface="Estrangelo Edessa"/>
-        <a:font script="Orya" typeface="Kalinga"/>
-        <a:font script="Mlym" typeface="Kartika"/>
-        <a:font script="Laoo" typeface="DokChampa"/>
-        <a:font script="Sinh" typeface="Iskoola Pota"/>
-        <a:font script="Mong" typeface="Mongolian Baiti"/>
-        <a:font script="Viet" typeface="Times New Roman"/>
-        <a:font script="Uigh" typeface="Microsoft Uighur"/>
-        <a:font script="Geor" typeface="Sylfaen"/>
-      </a:majorFont>
-      <a:minorFont>
-        <a:latin typeface="Arial"/>
-        <a:ea typeface=""/>
-        <a:cs typeface=""/>
-        <a:font script="Jpan" typeface="ＭＳ Ｐゴシック"/>
-        <a:font script="Hang" typeface="맑은 고딕"/>
-        <a:font script="Hans" typeface="宋体"/>
-        <a:font script="Hant" typeface="新細明體"/>
-        <a:font script="Arab" typeface="Arial"/>
-        <a:font script="Hebr" typeface="Arial"/>
-        <a:font script="Thai" typeface="Cordia New"/>
-        <a:font script="Ethi" typeface="Nyala"/>
-        <a:font script="Beng" typeface="Vrinda"/>
-        <a:font script="Gujr" typeface="Shruti"/>
-        <a:font script="Khmr" typeface="DaunPenh"/>
-        <a:font script="Knda" typeface="Tunga"/>
-        <a:font script="Guru" typeface="Raavi"/>
-        <a:font script="Cans" typeface="Euphemia"/>
-        <a:font script="Cher" typeface="Plantagenet Cherokee"/>
-        <a:font script="Yiii" typeface="Microsoft Yi Baiti"/>
-        <a:font script="Tibt" typeface="Microsoft Himalaya"/>
-        <a:font script="Thaa" typeface="MV Boli"/>
-        <a:font script="Deva" typeface="Mangal"/>
-        <a:font script="Telu" typeface="Gautami"/>
-        <a:font script="Taml" typeface="Latha"/>
-        <a:font script="Syrc" typeface="Estrangelo Edessa"/>
-        <a:font script="Orya" typeface="Kalinga"/>
-        <a:font script="Mlym" typeface="Kartika"/>
-        <a:font script="Laoo" typeface="DokChampa"/>
-        <a:font script="Sinh" typeface="Iskoola Pota"/>
-        <a:font script="Mong" typeface="Mongolian Baiti"/>
-        <a:font script="Viet" typeface="Arial"/>
-        <a:font script="Uigh" typeface="Microsoft Uighur"/>
-        <a:font script="Geor" typeface="Sylfaen"/>
-      </a:minorFont>
-    </a:fontScheme>
-    <a:fmtScheme name="Office">
-      <a:fillStyleLst>
-        <a:solidFill>
-          <a:schemeClr val="phClr"/>
-        </a:solidFill>
-        <a:gradFill rotWithShape="1">
-          <a:gsLst>
-            <a:gs pos="0">
-              <a:schemeClr val="phClr">
-                <a:tint val="50000"/>
-                <a:satMod val="300000"/>
-              </a:schemeClr>
-            </a:gs>
-            <a:gs pos="35000">
-              <a:schemeClr val="phClr">
-                <a:tint val="37000"/>
-                <a:satMod val="300000"/>
-              </a:schemeClr>
-            </a:gs>
-            <a:gs pos="100000">
-              <a:schemeClr val="phClr">
-                <a:tint val="15000"/>
-                <a:satMod val="350000"/>
-              </a:schemeClr>
-            </a:gs>
-          </a:gsLst>
-          <a:lin ang="16200000" scaled="1"/>
-        </a:gradFill>
-        <a:gradFill rotWithShape="1">
-          <a:gsLst>
-            <a:gs pos="0">
-              <a:schemeClr val="phClr">
-                <a:tint val="100000"/>
-                <a:shade val="100000"/>
-                <a:satMod val="130000"/>
-              </a:schemeClr>
-            </a:gs>
-            <a:gs pos="100000">
-              <a:schemeClr val="phClr">
-                <a:tint val="50000"/>
-                <a:shade val="100000"/>
-                <a:satMod val="350000"/>
-              </a:schemeClr>
-            </a:gs>
-          </a:gsLst>
-          <a:lin ang="16200000" scaled="0"/>
-        </a:gradFill>
-      </a:fillStyleLst>
-      <a:lnStyleLst>
-        <a:ln w="9525" cap="flat" cmpd="sng" algn="ctr">
-          <a:solidFill>
-            <a:schemeClr val="phClr">
-              <a:shade val="95000"/>
-              <a:satMod val="105000"/>
-            </a:schemeClr>
-          </a:solidFill>
-          <a:prstDash val="solid"/>
-        </a:ln>
-        <a:ln w="25400" cap="flat" cmpd="sng" algn="ctr">
-          <a:solidFill>
-            <a:schemeClr val="phClr"/>
-          </a:solidFill>
-          <a:prstDash val="solid"/>
-        </a:ln>
-        <a:ln w="38100" cap="flat" cmpd="sng" algn="ctr">
-          <a:solidFill>
-            <a:schemeClr val="phClr"/>
-          </a:solidFill>
-          <a:prstDash val="solid"/>
-        </a:ln>
-      </a:lnStyleLst>
-      <a:effectStyleLst>
-        <a:effectStyle>
-          <a:effectLst>
-            <a:outerShdw blurRad="40000" dist="20000" dir="5400000" rotWithShape="0">
-              <a:srgbClr val="000000">
-                <a:alpha val="38000"/>
-              </a:srgbClr>
-            </a:outerShdw>
-          </a:effectLst>
-        </a:effectStyle>
-        <a:effectStyle>
-          <a:effectLst>
-            <a:outerShdw blurRad="40000" dist="23000" dir="5400000" rotWithShape="0">
-              <a:srgbClr val="000000">
-                <a:alpha val="35000"/>
-              </a:srgbClr>
-            </a:outerShdw>
-          </a:effectLst>
-        </a:effectStyle>
-        <a:effectStyle>
-          <a:effectLst>
-            <a:outerShdw blurRad="40000" dist="23000" dir="5400000" rotWithShape="0">
-              <a:srgbClr val="000000">
-                <a:alpha val="35000"/>
-              </a:srgbClr>
-            </a:outerShdw>
-          </a:effectLst>
-          <a:scene3d>
-            <a:camera prst="orthographicFront">
-              <a:rot lat="0" lon="0" rev="0"/>
-            </a:camera>
-            <a:lightRig rig="threePt" dir="t">
-              <a:rot lat="0" lon="0" rev="1200000"/>
-            </a:lightRig>
-          </a:scene3d>
-          <a:sp3d>
-            <a:bevelT w="63500" h="25400"/>
-          </a:sp3d>
-        </a:effectStyle>
-      </a:effectStyleLst>
-      <a:bgFillStyleLst>
-        <a:solidFill>
-          <a:schemeClr val="phClr"/>
-        </a:solidFill>
-        <a:gradFill rotWithShape="1">
-          <a:gsLst>
-            <a:gs pos="0">
-              <a:schemeClr val="phClr">
-                <a:tint val="40000"/>
-                <a:satMod val="350000"/>
-              </a:schemeClr>
-            </a:gs>
-            <a:gs pos="40000">
-              <a:schemeClr val="phClr">
-                <a:tint val="45000"/>
-                <a:shade val="99000"/>
-                <a:satMod val="350000"/>
-              </a:schemeClr>
-            </a:gs>
-            <a:gs pos="100000">
-              <a:schemeClr val="phClr">
-                <a:shade val="20000"/>
-                <a:satMod val="255000"/>
-              </a:schemeClr>
-            </a:gs>
-          </a:gsLst>
-          <a:path path="circle">
-            <a:fillToRect l="50000" t="-80000" r="50000" b="180000"/>
-          </a:path>
-        </a:gradFill>
-        <a:gradFill rotWithShape="1">
-          <a:gsLst>
-            <a:gs pos="0">
-              <a:schemeClr val="phClr">
-                <a:tint val="80000"/>
-                <a:satMod val="300000"/>
-              </a:schemeClr>
-            </a:gs>
-            <a:gs pos="100000">
-              <a:schemeClr val="phClr">
-                <a:shade val="30000"/>
-                <a:satMod val="200000"/>
-              </a:schemeClr>
-            </a:gs>
-          </a:gsLst>
-          <a:path path="circle">
-            <a:fillToRect l="50000" t="50000" r="50000" b="50000"/>
-          </a:path>
-        </a:gradFill>
-      </a:bgFillStyleLst>
-    </a:fmtScheme>
-  </a:themeElements>
-</a:theme>
 </file>